--- a/7-Presentation/presentation.pptx
+++ b/7-Presentation/presentation.pptx
@@ -44,6 +44,9 @@
   <p:notesSz cx="7772400" cy="10058400"/>
   <p:embeddedFontLst>
     <p:embeddedFont>
+      <p:font typeface="SRH"/>
+    </p:embeddedFont>
+    <p:embeddedFont>
       <p:font typeface="SRH Headline"/>
     </p:embeddedFont>
     <p:embeddedFont>
@@ -51,9 +54,6 @@
     </p:embeddedFont>
     <p:embeddedFont>
       <p:font typeface="Arial MT"/>
-    </p:embeddedFont>
-    <p:embeddedFont>
-      <p:font typeface="SRH"/>
     </p:embeddedFont>
   </p:embeddedFontLst>
 </p:presentation>
@@ -866,7 +866,7 @@
                 <a:latin typeface="SRH Text"/>
                 <a:ea typeface="SRH"/>
               </a:rPr>
-              <a:t> </a:t>
+              <a:t>&lt;date/time&gt;</a:t>
             </a:r>
             <a:endParaRPr lang="en-US" sz="900" b="0" u="none" strike="noStrike">
               <a:solidFill>
@@ -946,7 +946,7 @@
                 <a:latin typeface="SRH Text"/>
                 <a:ea typeface="SRH"/>
               </a:rPr>
-              <a:t> </a:t>
+              <a:t>&lt;footer&gt;</a:t>
             </a:r>
             <a:endParaRPr lang="en-US" sz="900" b="0" u="none" strike="noStrike">
               <a:solidFill>
@@ -1016,7 +1016,7 @@
                 <a:tab pos="0" algn="l"/>
               </a:tabLst>
             </a:pPr>
-            <a:fld id="{2DF0EEB5-A09A-4029-9CB9-2D2630CB58E7}" type="slidenum">
+            <a:fld id="{E60ED788-DE77-4F0C-90E3-ED7CA6CBFD13}" type="slidenum">
               <a:rPr lang="de-DE" sz="1550" b="1" u="none" strike="noStrike">
                 <a:solidFill>
                   <a:srgbClr val="6D7373"/>
@@ -1026,7 +1026,7 @@
                 <a:latin typeface="SRH Text"/>
                 <a:ea typeface="SRH"/>
               </a:rPr>
-              <a:t>13</a:t>
+              <a:t>&lt;number&gt;</a:t>
             </a:fld>
             <a:endParaRPr lang="en-US" sz="1550" b="0" u="none" strike="noStrike">
               <a:solidFill>
@@ -2339,7 +2339,7 @@
                 <a:latin typeface="SRH Text"/>
                 <a:ea typeface="SRH"/>
               </a:rPr>
-              <a:t> </a:t>
+              <a:t>&lt;date/time&gt;</a:t>
             </a:r>
             <a:endParaRPr lang="en-US" sz="900" b="0" u="none" strike="noStrike">
               <a:solidFill>
@@ -2419,7 +2419,7 @@
                 <a:latin typeface="SRH Text"/>
                 <a:ea typeface="SRH"/>
               </a:rPr>
-              <a:t> </a:t>
+              <a:t>&lt;footer&gt;</a:t>
             </a:r>
             <a:endParaRPr lang="en-US" sz="900" b="0" u="none" strike="noStrike">
               <a:solidFill>
@@ -2489,7 +2489,7 @@
                 <a:tab pos="0" algn="l"/>
               </a:tabLst>
             </a:pPr>
-            <a:fld id="{761BDFBF-8D2A-4333-B5ED-9D0376904200}" type="slidenum">
+            <a:fld id="{A542B8E8-1F17-469A-9C45-29563881DDB2}" type="slidenum">
               <a:rPr lang="de-DE" sz="1550" b="1" u="none" strike="noStrike">
                 <a:solidFill>
                   <a:schemeClr val="lt1"/>
@@ -2499,7 +2499,7 @@
                 <a:latin typeface="SRH Text"/>
                 <a:ea typeface="SRH"/>
               </a:rPr>
-              <a:t>13</a:t>
+              <a:t>&lt;number&gt;</a:t>
             </a:fld>
             <a:endParaRPr lang="en-US" sz="1550" b="0" u="none" strike="noStrike">
               <a:solidFill>
@@ -3762,7 +3762,7 @@
                 <a:latin typeface="SRH Text"/>
                 <a:ea typeface="SRH"/>
               </a:rPr>
-              <a:t> </a:t>
+              <a:t>&lt;date/time&gt;</a:t>
             </a:r>
             <a:endParaRPr lang="en-US" sz="900" b="0" u="none" strike="noStrike">
               <a:solidFill>
@@ -3842,7 +3842,7 @@
                 <a:latin typeface="SRH Text"/>
                 <a:ea typeface="SRH"/>
               </a:rPr>
-              <a:t> </a:t>
+              <a:t>&lt;footer&gt;</a:t>
             </a:r>
             <a:endParaRPr lang="en-US" sz="900" b="0" u="none" strike="noStrike">
               <a:solidFill>
@@ -3912,7 +3912,7 @@
                 <a:tab pos="0" algn="l"/>
               </a:tabLst>
             </a:pPr>
-            <a:fld id="{60D071BD-D8A3-47AB-BB0E-59D3275FBB9C}" type="slidenum">
+            <a:fld id="{20275999-F5BB-4B34-932A-9EDF4CEE8821}" type="slidenum">
               <a:rPr lang="de-DE" sz="1550" b="1" u="none" strike="noStrike">
                 <a:solidFill>
                   <a:srgbClr val="6D7373"/>
@@ -3922,7 +3922,7 @@
                 <a:latin typeface="SRH Text"/>
                 <a:ea typeface="SRH"/>
               </a:rPr>
-              <a:t>13</a:t>
+              <a:t>&lt;number&gt;</a:t>
             </a:fld>
             <a:endParaRPr lang="en-US" sz="1550" b="0" u="none" strike="noStrike">
               <a:solidFill>
@@ -5288,7 +5288,7 @@
                 <a:latin typeface="SRH Text"/>
                 <a:ea typeface="SRH"/>
               </a:rPr>
-              <a:t> </a:t>
+              <a:t>&lt;date/time&gt;</a:t>
             </a:r>
             <a:endParaRPr lang="en-US" sz="900" b="0" u="none" strike="noStrike">
               <a:solidFill>
@@ -5368,7 +5368,7 @@
                 <a:latin typeface="SRH Text"/>
                 <a:ea typeface="SRH"/>
               </a:rPr>
-              <a:t> </a:t>
+              <a:t>&lt;footer&gt;</a:t>
             </a:r>
             <a:endParaRPr lang="en-US" sz="900" b="0" u="none" strike="noStrike">
               <a:solidFill>
@@ -5438,7 +5438,7 @@
                 <a:tab pos="0" algn="l"/>
               </a:tabLst>
             </a:pPr>
-            <a:fld id="{5D8E2CEA-1C8A-49CC-864D-AB719E569EBD}" type="slidenum">
+            <a:fld id="{4394EC23-C4F0-4655-A2D9-3C94A90FCB66}" type="slidenum">
               <a:rPr lang="de-DE" sz="1550" b="1" u="none" strike="noStrike">
                 <a:solidFill>
                   <a:schemeClr val="lt1"/>
@@ -5448,7 +5448,7 @@
                 <a:latin typeface="SRH Text"/>
                 <a:ea typeface="SRH"/>
               </a:rPr>
-              <a:t>13</a:t>
+              <a:t>&lt;number&gt;</a:t>
             </a:fld>
             <a:endParaRPr lang="en-US" sz="1550" b="0" u="none" strike="noStrike">
               <a:solidFill>
@@ -6448,7 +6448,7 @@
                 <a:latin typeface="SRH Text"/>
                 <a:ea typeface="SRH"/>
               </a:rPr>
-              <a:t> </a:t>
+              <a:t>&lt;date/time&gt;</a:t>
             </a:r>
             <a:endParaRPr lang="en-US" sz="900" b="0" u="none" strike="noStrike">
               <a:solidFill>
@@ -6528,7 +6528,7 @@
                 <a:latin typeface="SRH Text"/>
                 <a:ea typeface="SRH"/>
               </a:rPr>
-              <a:t> </a:t>
+              <a:t>&lt;footer&gt;</a:t>
             </a:r>
             <a:endParaRPr lang="en-US" sz="900" b="0" u="none" strike="noStrike">
               <a:solidFill>
@@ -6598,7 +6598,7 @@
                 <a:tab pos="0" algn="l"/>
               </a:tabLst>
             </a:pPr>
-            <a:fld id="{4B11D116-51B3-4ED8-A657-CE38342A618A}" type="slidenum">
+            <a:fld id="{FD1663A7-0785-498B-AC6D-D083641C2A9A}" type="slidenum">
               <a:rPr lang="de-DE" sz="1550" b="1" u="none" strike="noStrike">
                 <a:solidFill>
                   <a:srgbClr val="6D7373"/>
@@ -6608,7 +6608,7 @@
                 <a:latin typeface="SRH Text"/>
                 <a:ea typeface="SRH"/>
               </a:rPr>
-              <a:t>13</a:t>
+              <a:t>&lt;number&gt;</a:t>
             </a:fld>
             <a:endParaRPr lang="en-US" sz="1550" b="0" u="none" strike="noStrike">
               <a:solidFill>
@@ -7057,7 +7057,7 @@
                 <a:latin typeface="SRH Text"/>
                 <a:ea typeface="SRH"/>
               </a:rPr>
-              <a:t> </a:t>
+              <a:t>&lt;date/time&gt;</a:t>
             </a:r>
             <a:endParaRPr lang="en-US" sz="900" b="0" u="none" strike="noStrike">
               <a:solidFill>
@@ -7137,7 +7137,7 @@
                 <a:latin typeface="SRH Text"/>
                 <a:ea typeface="SRH"/>
               </a:rPr>
-              <a:t> </a:t>
+              <a:t>&lt;footer&gt;</a:t>
             </a:r>
             <a:endParaRPr lang="en-US" sz="900" b="0" u="none" strike="noStrike">
               <a:solidFill>
@@ -7207,7 +7207,7 @@
                 <a:tab pos="0" algn="l"/>
               </a:tabLst>
             </a:pPr>
-            <a:fld id="{CBDBB692-FADA-43C7-968F-4CAE884FD0BD}" type="slidenum">
+            <a:fld id="{7D792A75-CBDB-4CC9-A654-63DA86EC643E}" type="slidenum">
               <a:rPr lang="de-DE" sz="1550" b="1" u="none" strike="noStrike">
                 <a:solidFill>
                   <a:schemeClr val="lt1"/>
@@ -7217,7 +7217,7 @@
                 <a:latin typeface="SRH Text"/>
                 <a:ea typeface="SRH"/>
               </a:rPr>
-              <a:t>13</a:t>
+              <a:t>&lt;number&gt;</a:t>
             </a:fld>
             <a:endParaRPr lang="en-US" sz="1550" b="0" u="none" strike="noStrike">
               <a:solidFill>
@@ -7878,7 +7878,7 @@
                 <a:latin typeface="SRH Text"/>
                 <a:ea typeface="SRH"/>
               </a:rPr>
-              <a:t> </a:t>
+              <a:t>&lt;date/time&gt;</a:t>
             </a:r>
             <a:endParaRPr lang="en-US" sz="900" b="0" u="none" strike="noStrike">
               <a:solidFill>
@@ -7958,7 +7958,7 @@
                 <a:latin typeface="SRH Text"/>
                 <a:ea typeface="SRH"/>
               </a:rPr>
-              <a:t> </a:t>
+              <a:t>&lt;footer&gt;</a:t>
             </a:r>
             <a:endParaRPr lang="en-US" sz="900" b="0" u="none" strike="noStrike">
               <a:solidFill>
@@ -8028,7 +8028,7 @@
                 <a:tab pos="0" algn="l"/>
               </a:tabLst>
             </a:pPr>
-            <a:fld id="{DABB04CF-2A86-4AB0-9138-D120699C059C}" type="slidenum">
+            <a:fld id="{42908E6E-8049-4F61-AAAF-20E9DD9C2407}" type="slidenum">
               <a:rPr lang="de-DE" sz="1550" b="1" u="none" strike="noStrike">
                 <a:solidFill>
                   <a:srgbClr val="6D7373"/>
@@ -8038,7 +8038,7 @@
                 <a:latin typeface="SRH Text"/>
                 <a:ea typeface="SRH"/>
               </a:rPr>
-              <a:t>13</a:t>
+              <a:t>&lt;number&gt;</a:t>
             </a:fld>
             <a:endParaRPr lang="en-US" sz="1550" b="0" u="none" strike="noStrike">
               <a:solidFill>
@@ -8497,7 +8497,7 @@
                 <a:latin typeface="SRH Text"/>
                 <a:ea typeface="SRH"/>
               </a:rPr>
-              <a:t> </a:t>
+              <a:t>&lt;date/time&gt;</a:t>
             </a:r>
             <a:endParaRPr lang="en-US" sz="900" b="0" u="none" strike="noStrike">
               <a:solidFill>
@@ -8577,7 +8577,7 @@
                 <a:latin typeface="SRH Text"/>
                 <a:ea typeface="SRH"/>
               </a:rPr>
-              <a:t> </a:t>
+              <a:t>&lt;footer&gt;</a:t>
             </a:r>
             <a:endParaRPr lang="en-US" sz="900" b="0" u="none" strike="noStrike">
               <a:solidFill>
@@ -8647,7 +8647,7 @@
                 <a:tab pos="0" algn="l"/>
               </a:tabLst>
             </a:pPr>
-            <a:fld id="{C392C38E-C3C5-4C4E-A28F-7EA0897AE7BB}" type="slidenum">
+            <a:fld id="{F64BC54D-D14B-4CEE-8024-4D32AA1A3703}" type="slidenum">
               <a:rPr lang="de-DE" sz="1550" b="1" u="none" strike="noStrike">
                 <a:solidFill>
                   <a:srgbClr val="6D7373"/>
@@ -8657,7 +8657,7 @@
                 <a:latin typeface="SRH Text"/>
                 <a:ea typeface="SRH"/>
               </a:rPr>
-              <a:t>13</a:t>
+              <a:t>&lt;number&gt;</a:t>
             </a:fld>
             <a:endParaRPr lang="en-US" sz="1550" b="0" u="none" strike="noStrike">
               <a:solidFill>
@@ -9476,7 +9476,7 @@
                 <a:latin typeface="SRH Text"/>
                 <a:ea typeface="SRH"/>
               </a:rPr>
-              <a:t> </a:t>
+              <a:t>&lt;date/time&gt;</a:t>
             </a:r>
             <a:endParaRPr lang="en-US" sz="900" b="0" u="none" strike="noStrike">
               <a:solidFill>
@@ -9556,7 +9556,7 @@
                 <a:latin typeface="SRH Text"/>
                 <a:ea typeface="SRH"/>
               </a:rPr>
-              <a:t> </a:t>
+              <a:t>&lt;footer&gt;</a:t>
             </a:r>
             <a:endParaRPr lang="en-US" sz="900" b="0" u="none" strike="noStrike">
               <a:solidFill>
@@ -9626,7 +9626,7 @@
                 <a:tab pos="0" algn="l"/>
               </a:tabLst>
             </a:pPr>
-            <a:fld id="{1DFFF422-3F6F-48FF-AFBA-826F02F8F176}" type="slidenum">
+            <a:fld id="{644F7981-7110-4D3C-9792-1A6F1F7DED13}" type="slidenum">
               <a:rPr lang="de-DE" sz="1550" b="1" u="none" strike="noStrike">
                 <a:solidFill>
                   <a:srgbClr val="6D7373"/>
@@ -9636,7 +9636,7 @@
                 <a:latin typeface="SRH Text"/>
                 <a:ea typeface="SRH"/>
               </a:rPr>
-              <a:t>13</a:t>
+              <a:t>&lt;number&gt;</a:t>
             </a:fld>
             <a:endParaRPr lang="en-US" sz="1550" b="0" u="none" strike="noStrike">
               <a:solidFill>
@@ -11034,7 +11034,7 @@
                 <a:latin typeface="SRH Text"/>
                 <a:ea typeface="SRH"/>
               </a:rPr>
-              <a:t> </a:t>
+              <a:t>&lt;date/time&gt;</a:t>
             </a:r>
             <a:endParaRPr lang="en-US" sz="900" b="0" u="none" strike="noStrike">
               <a:solidFill>
@@ -11114,7 +11114,7 @@
                 <a:latin typeface="SRH Text"/>
                 <a:ea typeface="SRH"/>
               </a:rPr>
-              <a:t> </a:t>
+              <a:t>&lt;footer&gt;</a:t>
             </a:r>
             <a:endParaRPr lang="en-US" sz="900" b="0" u="none" strike="noStrike">
               <a:solidFill>
@@ -11184,7 +11184,7 @@
                 <a:tab pos="0" algn="l"/>
               </a:tabLst>
             </a:pPr>
-            <a:fld id="{789607B9-670E-4772-80D8-9FC2ABC09DB7}" type="slidenum">
+            <a:fld id="{F3134DC6-9BC5-4E68-831E-1A82C10506E4}" type="slidenum">
               <a:rPr lang="de-DE" sz="1550" b="1" u="none" strike="noStrike">
                 <a:solidFill>
                   <a:srgbClr val="6D7373"/>
@@ -11194,7 +11194,7 @@
                 <a:latin typeface="SRH Text"/>
                 <a:ea typeface="SRH"/>
               </a:rPr>
-              <a:t>13</a:t>
+              <a:t>&lt;number&gt;</a:t>
             </a:fld>
             <a:endParaRPr lang="en-US" sz="1550" b="0" u="none" strike="noStrike">
               <a:solidFill>
@@ -12821,7 +12821,7 @@
                 <a:latin typeface="SRH Text"/>
                 <a:ea typeface="SRH"/>
               </a:rPr>
-              <a:t> </a:t>
+              <a:t>&lt;date/time&gt;</a:t>
             </a:r>
             <a:endParaRPr lang="en-US" sz="900" b="0" u="none" strike="noStrike">
               <a:solidFill>
@@ -12901,7 +12901,7 @@
                 <a:latin typeface="SRH Text"/>
                 <a:ea typeface="SRH"/>
               </a:rPr>
-              <a:t> </a:t>
+              <a:t>&lt;footer&gt;</a:t>
             </a:r>
             <a:endParaRPr lang="en-US" sz="900" b="0" u="none" strike="noStrike">
               <a:solidFill>
@@ -12971,7 +12971,7 @@
                 <a:tab pos="0" algn="l"/>
               </a:tabLst>
             </a:pPr>
-            <a:fld id="{30166CE2-273C-4617-B362-01B8EFB3FD3D}" type="slidenum">
+            <a:fld id="{E05DA845-AABE-44E9-B07C-2278593193BC}" type="slidenum">
               <a:rPr lang="de-DE" sz="1550" b="1" u="none" strike="noStrike">
                 <a:solidFill>
                   <a:srgbClr val="6D7373"/>
@@ -12981,7 +12981,7 @@
                 <a:latin typeface="SRH Text"/>
                 <a:ea typeface="SRH"/>
               </a:rPr>
-              <a:t>13</a:t>
+              <a:t>&lt;number&gt;</a:t>
             </a:fld>
             <a:endParaRPr lang="en-US" sz="1550" b="0" u="none" strike="noStrike">
               <a:solidFill>
@@ -13808,7 +13808,7 @@
                 <a:tab pos="0" algn="l"/>
               </a:tabLst>
             </a:pPr>
-            <a:fld id="{9D6C36A7-EAAB-4F84-81B3-6E123B8CDAA0}" type="slidenum">
+            <a:fld id="{6BD639B3-3A19-4450-99D7-6672BB9D8B9E}" type="slidenum">
               <a:rPr lang="de-DE" sz="1550" b="1" u="none" strike="noStrike">
                 <a:solidFill>
                   <a:srgbClr val="6D7373"/>
@@ -13818,7 +13818,7 @@
                 <a:latin typeface="SRH Text"/>
                 <a:ea typeface="SRH"/>
               </a:rPr>
-              <a:t>13</a:t>
+              <a:t>&lt;number&gt;</a:t>
             </a:fld>
             <a:endParaRPr lang="en-US" sz="1550" b="0" u="none" strike="noStrike">
               <a:solidFill>
@@ -13898,7 +13898,7 @@
                 <a:latin typeface="SRH Text"/>
                 <a:ea typeface="SRH"/>
               </a:rPr>
-              <a:t> </a:t>
+              <a:t>&lt;footer&gt;</a:t>
             </a:r>
             <a:endParaRPr lang="en-US" sz="900" b="0" u="none" strike="noStrike">
               <a:solidFill>
@@ -13978,7 +13978,7 @@
                 <a:latin typeface="SRH Text"/>
                 <a:ea typeface="SRH"/>
               </a:rPr>
-              <a:t> </a:t>
+              <a:t>&lt;date/time&gt;</a:t>
             </a:r>
             <a:endParaRPr lang="en-US" sz="900" b="0" u="none" strike="noStrike">
               <a:solidFill>
@@ -16923,7 +16923,7 @@
                 <a:latin typeface="SRH Text"/>
                 <a:ea typeface="SRH"/>
               </a:rPr>
-              <a:t> </a:t>
+              <a:t>&lt;date/time&gt;</a:t>
             </a:r>
             <a:endParaRPr lang="en-US" sz="900" b="0" u="none" strike="noStrike">
               <a:solidFill>
@@ -17003,7 +17003,7 @@
                 <a:latin typeface="SRH Text"/>
                 <a:ea typeface="SRH"/>
               </a:rPr>
-              <a:t> </a:t>
+              <a:t>&lt;footer&gt;</a:t>
             </a:r>
             <a:endParaRPr lang="en-US" sz="900" b="0" u="none" strike="noStrike">
               <a:solidFill>
@@ -17073,7 +17073,7 @@
                 <a:tab pos="0" algn="l"/>
               </a:tabLst>
             </a:pPr>
-            <a:fld id="{55D3743D-AB47-43CB-B45F-B17356F3D69D}" type="slidenum">
+            <a:fld id="{BB08FC07-12F1-4ABD-8887-8FD4B958484A}" type="slidenum">
               <a:rPr lang="de-DE" sz="1550" b="1" u="none" strike="noStrike">
                 <a:solidFill>
                   <a:srgbClr val="6D7373"/>
@@ -17083,7 +17083,7 @@
                 <a:latin typeface="SRH Text"/>
                 <a:ea typeface="SRH"/>
               </a:rPr>
-              <a:t>13</a:t>
+              <a:t>&lt;number&gt;</a:t>
             </a:fld>
             <a:endParaRPr lang="en-US" sz="1550" b="0" u="none" strike="noStrike">
               <a:solidFill>
@@ -18359,7 +18359,7 @@
                 <a:latin typeface="SRH Text"/>
                 <a:ea typeface="SRH"/>
               </a:rPr>
-              <a:t> </a:t>
+              <a:t>&lt;date/time&gt;</a:t>
             </a:r>
             <a:endParaRPr lang="en-US" sz="900" b="0" u="none" strike="noStrike">
               <a:solidFill>
@@ -18439,7 +18439,7 @@
                 <a:latin typeface="SRH Text"/>
                 <a:ea typeface="SRH"/>
               </a:rPr>
-              <a:t> </a:t>
+              <a:t>&lt;footer&gt;</a:t>
             </a:r>
             <a:endParaRPr lang="en-US" sz="900" b="0" u="none" strike="noStrike">
               <a:solidFill>
@@ -18509,7 +18509,7 @@
                 <a:tab pos="0" algn="l"/>
               </a:tabLst>
             </a:pPr>
-            <a:fld id="{2F5945CA-64E5-4331-97B4-019B0E594826}" type="slidenum">
+            <a:fld id="{5B15A17E-F859-4BE5-8687-4C40C077D6DD}" type="slidenum">
               <a:rPr lang="de-DE" sz="1550" b="1" u="none" strike="noStrike">
                 <a:solidFill>
                   <a:srgbClr val="6D7373"/>
@@ -18519,7 +18519,7 @@
                 <a:latin typeface="SRH Text"/>
                 <a:ea typeface="SRH"/>
               </a:rPr>
-              <a:t>13</a:t>
+              <a:t>&lt;number&gt;</a:t>
             </a:fld>
             <a:endParaRPr lang="en-US" sz="1550" b="0" u="none" strike="noStrike">
               <a:solidFill>
@@ -19381,7 +19381,7 @@
                 <a:latin typeface="SRH Text"/>
                 <a:ea typeface="SRH"/>
               </a:rPr>
-              <a:t> </a:t>
+              <a:t>&lt;date/time&gt;</a:t>
             </a:r>
             <a:endParaRPr lang="en-US" sz="900" b="0" u="none" strike="noStrike">
               <a:solidFill>
@@ -19461,7 +19461,7 @@
                 <a:latin typeface="SRH Text"/>
                 <a:ea typeface="SRH"/>
               </a:rPr>
-              <a:t> </a:t>
+              <a:t>&lt;footer&gt;</a:t>
             </a:r>
             <a:endParaRPr lang="en-US" sz="900" b="0" u="none" strike="noStrike">
               <a:solidFill>
@@ -19531,7 +19531,7 @@
                 <a:tab pos="0" algn="l"/>
               </a:tabLst>
             </a:pPr>
-            <a:fld id="{DF6F593A-148F-4D0A-B0A5-9F50F45628A0}" type="slidenum">
+            <a:fld id="{11C7282D-E056-4FD3-83C0-432FEF309014}" type="slidenum">
               <a:rPr lang="de-DE" sz="1550" b="1" u="none" strike="noStrike">
                 <a:solidFill>
                   <a:srgbClr val="6D7373"/>
@@ -19541,7 +19541,7 @@
                 <a:latin typeface="SRH Text"/>
                 <a:ea typeface="SRH"/>
               </a:rPr>
-              <a:t>13</a:t>
+              <a:t>&lt;number&gt;</a:t>
             </a:fld>
             <a:endParaRPr lang="en-US" sz="1550" b="0" u="none" strike="noStrike">
               <a:solidFill>
@@ -21013,7 +21013,7 @@
                 <a:latin typeface="SRH Text"/>
                 <a:ea typeface="SRH"/>
               </a:rPr>
-              <a:t> </a:t>
+              <a:t>&lt;date/time&gt;</a:t>
             </a:r>
             <a:endParaRPr lang="en-US" sz="900" b="0" u="none" strike="noStrike">
               <a:solidFill>
@@ -21093,7 +21093,7 @@
                 <a:latin typeface="SRH Text"/>
                 <a:ea typeface="SRH"/>
               </a:rPr>
-              <a:t> </a:t>
+              <a:t>&lt;footer&gt;</a:t>
             </a:r>
             <a:endParaRPr lang="en-US" sz="900" b="0" u="none" strike="noStrike">
               <a:solidFill>
@@ -21163,7 +21163,7 @@
                 <a:tab pos="0" algn="l"/>
               </a:tabLst>
             </a:pPr>
-            <a:fld id="{AEF4D24D-B87E-4A60-8AC4-0B8E384FCFD1}" type="slidenum">
+            <a:fld id="{B13916C4-4AF0-4AF5-8F9F-AFDD741D9471}" type="slidenum">
               <a:rPr lang="de-DE" sz="1550" b="1" u="none" strike="noStrike">
                 <a:solidFill>
                   <a:srgbClr val="6D7373"/>
@@ -21173,7 +21173,7 @@
                 <a:latin typeface="SRH Text"/>
                 <a:ea typeface="SRH"/>
               </a:rPr>
-              <a:t>13</a:t>
+              <a:t>&lt;number&gt;</a:t>
             </a:fld>
             <a:endParaRPr lang="en-US" sz="1550" b="0" u="none" strike="noStrike">
               <a:solidFill>
@@ -22478,7 +22478,7 @@
                 <a:latin typeface="SRH Text"/>
                 <a:ea typeface="SRH"/>
               </a:rPr>
-              <a:t> </a:t>
+              <a:t>&lt;date/time&gt;</a:t>
             </a:r>
             <a:endParaRPr lang="en-US" sz="900" b="0" u="none" strike="noStrike">
               <a:solidFill>
@@ -22558,7 +22558,7 @@
                 <a:latin typeface="SRH Text"/>
                 <a:ea typeface="SRH"/>
               </a:rPr>
-              <a:t> </a:t>
+              <a:t>&lt;footer&gt;</a:t>
             </a:r>
             <a:endParaRPr lang="en-US" sz="900" b="0" u="none" strike="noStrike">
               <a:solidFill>
@@ -22628,7 +22628,7 @@
                 <a:tab pos="0" algn="l"/>
               </a:tabLst>
             </a:pPr>
-            <a:fld id="{11D9C406-A4CD-4D38-A907-B0A7FEB1720B}" type="slidenum">
+            <a:fld id="{0E2F187C-66EC-430D-B3F7-E3B9E818454B}" type="slidenum">
               <a:rPr lang="de-DE" sz="1550" b="1" u="none" strike="noStrike">
                 <a:solidFill>
                   <a:srgbClr val="6D7373"/>
@@ -22638,7 +22638,7 @@
                 <a:latin typeface="SRH Text"/>
                 <a:ea typeface="SRH"/>
               </a:rPr>
-              <a:t>13</a:t>
+              <a:t>&lt;number&gt;</a:t>
             </a:fld>
             <a:endParaRPr lang="en-US" sz="1550" b="0" u="none" strike="noStrike">
               <a:solidFill>
@@ -24287,7 +24287,7 @@
                 <a:latin typeface="SRH Text"/>
                 <a:ea typeface="SRH"/>
               </a:rPr>
-              <a:t> </a:t>
+              <a:t>&lt;date/time&gt;</a:t>
             </a:r>
             <a:endParaRPr lang="en-US" sz="900" b="0" u="none" strike="noStrike">
               <a:solidFill>
@@ -24367,7 +24367,7 @@
                 <a:latin typeface="SRH Text"/>
                 <a:ea typeface="SRH"/>
               </a:rPr>
-              <a:t> </a:t>
+              <a:t>&lt;footer&gt;</a:t>
             </a:r>
             <a:endParaRPr lang="en-US" sz="900" b="0" u="none" strike="noStrike">
               <a:solidFill>
@@ -24437,7 +24437,7 @@
                 <a:tab pos="0" algn="l"/>
               </a:tabLst>
             </a:pPr>
-            <a:fld id="{9F9B27CB-95B1-4BF0-88A2-E2B7323CB2DA}" type="slidenum">
+            <a:fld id="{BE7BC95F-952E-40AB-9D4B-9553A1BB49BA}" type="slidenum">
               <a:rPr lang="de-DE" sz="1550" b="1" u="none" strike="noStrike">
                 <a:solidFill>
                   <a:srgbClr val="6D7373"/>
@@ -24447,7 +24447,7 @@
                 <a:latin typeface="SRH Text"/>
                 <a:ea typeface="SRH"/>
               </a:rPr>
-              <a:t>13</a:t>
+              <a:t>&lt;number&gt;</a:t>
             </a:fld>
             <a:endParaRPr lang="en-US" sz="1550" b="0" u="none" strike="noStrike">
               <a:solidFill>
@@ -24736,7 +24736,7 @@
                 <a:latin typeface="SRH Text"/>
                 <a:ea typeface="SRH"/>
               </a:rPr>
-              <a:t> </a:t>
+              <a:t>&lt;date/time&gt;</a:t>
             </a:r>
             <a:endParaRPr lang="en-US" sz="900" b="0" u="none" strike="noStrike">
               <a:solidFill>
@@ -24816,7 +24816,7 @@
                 <a:latin typeface="SRH Text"/>
                 <a:ea typeface="SRH"/>
               </a:rPr>
-              <a:t> </a:t>
+              <a:t>&lt;footer&gt;</a:t>
             </a:r>
             <a:endParaRPr lang="en-US" sz="900" b="0" u="none" strike="noStrike">
               <a:solidFill>
@@ -24886,7 +24886,7 @@
                 <a:tab pos="0" algn="l"/>
               </a:tabLst>
             </a:pPr>
-            <a:fld id="{31AD9031-BC72-4DDF-BE1A-19C1DB40AF2A}" type="slidenum">
+            <a:fld id="{A3B38534-FC3C-4DE5-87C3-A95D27BF00A3}" type="slidenum">
               <a:rPr lang="de-DE" sz="1550" b="1" u="none" strike="noStrike">
                 <a:solidFill>
                   <a:srgbClr val="6D7373"/>
@@ -24896,7 +24896,7 @@
                 <a:latin typeface="SRH Text"/>
                 <a:ea typeface="SRH"/>
               </a:rPr>
-              <a:t>13</a:t>
+              <a:t>&lt;number&gt;</a:t>
             </a:fld>
             <a:endParaRPr lang="en-US" sz="1550" b="0" u="none" strike="noStrike">
               <a:solidFill>
@@ -27043,7 +27043,7 @@
                 <a:tab pos="0" algn="l"/>
               </a:tabLst>
             </a:pPr>
-            <a:fld id="{22490BB6-CFD1-4B13-B77F-C0239404BDE5}" type="datetime1">
+            <a:fld id="{D687DC9A-3859-47DC-B186-4C53116217A1}" type="datetime1">
               <a:rPr lang="en-CA" sz="900" b="1" u="none" strike="noStrike">
                 <a:solidFill>
                   <a:schemeClr val="lt1"/>
@@ -27053,7 +27053,7 @@
                 <a:latin typeface="SRH Text"/>
                 <a:ea typeface="SRH"/>
               </a:rPr>
-              <a:t>2026-09-11</a:t>
+              <a:t>2026-09-12</a:t>
             </a:fld>
             <a:endParaRPr lang="en-US" sz="900" b="0" u="none" strike="noStrike">
               <a:solidFill>
@@ -27203,7 +27203,7 @@
                 <a:tab pos="0" algn="l"/>
               </a:tabLst>
             </a:pPr>
-            <a:fld id="{39E8BD2F-257E-45E8-A173-617E082603D3}" type="slidenum">
+            <a:fld id="{FD7AF2AA-1BFF-4814-850F-98210CBBD38D}" type="slidenum">
               <a:rPr lang="de-DE" sz="1550" b="1" u="none" strike="noStrike">
                 <a:solidFill>
                   <a:schemeClr val="lt1"/>
@@ -27213,7 +27213,7 @@
                 <a:latin typeface="SRH Text"/>
                 <a:ea typeface="SRH"/>
               </a:rPr>
-              <a:t>13</a:t>
+              <a:t>&lt;number&gt;</a:t>
             </a:fld>
             <a:endParaRPr lang="en-US" sz="1550" b="0" u="none" strike="noStrike">
               <a:solidFill>
@@ -27879,7 +27879,7 @@
                 <a:tab pos="0" algn="l"/>
               </a:tabLst>
             </a:pPr>
-            <a:fld id="{17084755-B6E7-404D-A715-F3D5B9F0B018}" type="datetime1">
+            <a:fld id="{35499CB5-4B92-497F-9BAC-916762922E2F}" type="datetime1">
               <a:rPr lang="en-CA" sz="900" b="1" u="none" strike="noStrike">
                 <a:solidFill>
                   <a:srgbClr val="6D7373"/>
@@ -27889,7 +27889,7 @@
                 <a:latin typeface="SRH Text"/>
                 <a:ea typeface="SRH"/>
               </a:rPr>
-              <a:t>2026-09-11</a:t>
+              <a:t>2026-09-12</a:t>
             </a:fld>
             <a:endParaRPr lang="en-US" sz="900" b="0" u="none" strike="noStrike">
               <a:solidFill>
@@ -28039,7 +28039,7 @@
                 <a:tab pos="0" algn="l"/>
               </a:tabLst>
             </a:pPr>
-            <a:fld id="{99335F8B-D19D-47B0-AEBB-F50C003790E1}" type="slidenum">
+            <a:fld id="{14E86963-F954-4566-B98F-18530BEA3DE6}" type="slidenum">
               <a:rPr lang="de-DE" sz="1550" b="1" u="none" strike="noStrike">
                 <a:solidFill>
                   <a:srgbClr val="6D7373"/>
@@ -28049,7 +28049,7 @@
                 <a:latin typeface="SRH Text"/>
                 <a:ea typeface="SRH"/>
               </a:rPr>
-              <a:t>13</a:t>
+              <a:t>&lt;number&gt;</a:t>
             </a:fld>
             <a:endParaRPr lang="en-US" sz="1550" b="0" u="none" strike="noStrike">
               <a:solidFill>
@@ -28650,7 +28650,7 @@
                 <a:tab pos="0" algn="l"/>
               </a:tabLst>
             </a:pPr>
-            <a:fld id="{22DF4B05-9847-4847-BA88-BA50BD836FF2}" type="datetime1">
+            <a:fld id="{17082563-F3C8-428A-8A67-5202B0C238EE}" type="datetime1">
               <a:rPr lang="en-CA" sz="900" b="1" u="none" strike="noStrike">
                 <a:solidFill>
                   <a:srgbClr val="6D7373"/>
@@ -28660,7 +28660,7 @@
                 <a:latin typeface="SRH Text"/>
                 <a:ea typeface="SRH"/>
               </a:rPr>
-              <a:t>2026-09-11</a:t>
+              <a:t>2026-09-12</a:t>
             </a:fld>
             <a:endParaRPr lang="en-US" sz="900" b="0" u="none" strike="noStrike">
               <a:solidFill>
@@ -28810,7 +28810,7 @@
                 <a:tab pos="0" algn="l"/>
               </a:tabLst>
             </a:pPr>
-            <a:fld id="{864FC42D-93CD-4DA2-A5FC-556E1FBA44C9}" type="slidenum">
+            <a:fld id="{46D0AE9C-C35D-4A99-8DC0-63D717C635C6}" type="slidenum">
               <a:rPr lang="de-DE" sz="1550" b="1" u="none" strike="noStrike">
                 <a:solidFill>
                   <a:srgbClr val="6D7373"/>
@@ -28820,7 +28820,7 @@
                 <a:latin typeface="SRH Text"/>
                 <a:ea typeface="SRH"/>
               </a:rPr>
-              <a:t>13</a:t>
+              <a:t>&lt;number&gt;</a:t>
             </a:fld>
             <a:endParaRPr lang="en-US" sz="1550" b="0" u="none" strike="noStrike">
               <a:solidFill>
@@ -29126,7 +29126,7 @@
                 <a:tab pos="0" algn="l"/>
               </a:tabLst>
             </a:pPr>
-            <a:fld id="{61B04632-2C4B-4DAD-A7F4-5285F03C2071}" type="datetime1">
+            <a:fld id="{B38CE9BF-2914-40DA-A570-BD8468791A47}" type="datetime1">
               <a:rPr lang="en-CA" sz="900" b="1" u="none" strike="noStrike">
                 <a:solidFill>
                   <a:srgbClr val="6D7373"/>
@@ -29136,7 +29136,7 @@
                 <a:latin typeface="SRH Text"/>
                 <a:ea typeface="SRH"/>
               </a:rPr>
-              <a:t>2026-09-11</a:t>
+              <a:t>2026-09-12</a:t>
             </a:fld>
             <a:endParaRPr lang="en-US" sz="900" b="0" u="none" strike="noStrike">
               <a:solidFill>
@@ -29286,7 +29286,7 @@
                 <a:tab pos="0" algn="l"/>
               </a:tabLst>
             </a:pPr>
-            <a:fld id="{66524C30-3746-448F-8043-70F750A89D5B}" type="slidenum">
+            <a:fld id="{9C525355-171E-4267-B46E-CFF43267703D}" type="slidenum">
               <a:rPr lang="de-DE" sz="1550" b="1" u="none" strike="noStrike">
                 <a:solidFill>
                   <a:srgbClr val="6D7373"/>
@@ -29296,7 +29296,7 @@
                 <a:latin typeface="SRH Text"/>
                 <a:ea typeface="SRH"/>
               </a:rPr>
-              <a:t>13</a:t>
+              <a:t>&lt;number&gt;</a:t>
             </a:fld>
             <a:endParaRPr lang="en-US" sz="1550" b="0" u="none" strike="noStrike">
               <a:solidFill>
@@ -29322,7 +29322,7 @@
         <p:spPr>
           <a:xfrm>
             <a:off x="457200" y="1600200"/>
-            <a:ext cx="8672760" cy="2566440"/>
+            <a:ext cx="8001000" cy="2367720"/>
           </a:xfrm>
           <a:prstGeom prst="rect">
             <a:avLst/>
@@ -29876,7 +29876,7 @@
                 <a:tab pos="0" algn="l"/>
               </a:tabLst>
             </a:pPr>
-            <a:fld id="{70F4A30F-F476-47AB-A2CD-E61AD95FBC56}" type="datetime1">
+            <a:fld id="{D3E2AA9D-CDC3-4496-AD7D-8431FA459901}" type="datetime1">
               <a:rPr lang="en-CA" sz="900" b="1" u="none" strike="noStrike">
                 <a:solidFill>
                   <a:srgbClr val="6D7373"/>
@@ -29886,7 +29886,7 @@
                 <a:latin typeface="SRH Text"/>
                 <a:ea typeface="SRH"/>
               </a:rPr>
-              <a:t>2026-09-11</a:t>
+              <a:t>2026-09-12</a:t>
             </a:fld>
             <a:endParaRPr lang="en-US" sz="900" b="0" u="none" strike="noStrike">
               <a:solidFill>
@@ -30036,7 +30036,7 @@
                 <a:tab pos="0" algn="l"/>
               </a:tabLst>
             </a:pPr>
-            <a:fld id="{6E23CB9B-6959-42A4-B1CB-7384EA9F87D2}" type="slidenum">
+            <a:fld id="{4816CEB6-323C-4779-831F-FB818317070A}" type="slidenum">
               <a:rPr lang="de-DE" sz="1550" b="1" u="none" strike="noStrike">
                 <a:solidFill>
                   <a:srgbClr val="6D7373"/>
@@ -30046,7 +30046,7 @@
                 <a:latin typeface="SRH Text"/>
                 <a:ea typeface="SRH"/>
               </a:rPr>
-              <a:t>13</a:t>
+              <a:t>&lt;number&gt;</a:t>
             </a:fld>
             <a:endParaRPr lang="en-US" sz="1550" b="0" u="none" strike="noStrike">
               <a:solidFill>
@@ -30260,7 +30260,7 @@
                 <a:tab pos="0" algn="l"/>
               </a:tabLst>
             </a:pPr>
-            <a:fld id="{997BA214-AD5E-4FBB-ADCC-C5EA7E2756DC}" type="datetime1">
+            <a:fld id="{254F2657-9548-4B56-A086-385BEF896DF0}" type="datetime1">
               <a:rPr lang="en-CA" sz="900" b="1" u="none" strike="noStrike">
                 <a:solidFill>
                   <a:srgbClr val="6D7373"/>
@@ -30270,7 +30270,7 @@
                 <a:latin typeface="SRH Text"/>
                 <a:ea typeface="SRH"/>
               </a:rPr>
-              <a:t>2026-09-11</a:t>
+              <a:t>2026-09-12</a:t>
             </a:fld>
             <a:endParaRPr lang="en-US" sz="900" b="0" u="none" strike="noStrike">
               <a:solidFill>
@@ -30420,7 +30420,7 @@
                 <a:tab pos="0" algn="l"/>
               </a:tabLst>
             </a:pPr>
-            <a:fld id="{74B453A0-B11A-4C51-9F27-8D6EB1DA0911}" type="slidenum">
+            <a:fld id="{9A0FAF05-58F4-400C-914A-D222A8889684}" type="slidenum">
               <a:rPr lang="de-DE" sz="1550" b="1" u="none" strike="noStrike">
                 <a:solidFill>
                   <a:srgbClr val="6D7373"/>
@@ -30430,7 +30430,7 @@
                 <a:latin typeface="SRH Text"/>
                 <a:ea typeface="SRH"/>
               </a:rPr>
-              <a:t>13</a:t>
+              <a:t>&lt;number&gt;</a:t>
             </a:fld>
             <a:endParaRPr lang="en-US" sz="1550" b="0" u="none" strike="noStrike">
               <a:solidFill>
@@ -30933,7 +30933,7 @@
                 <a:tab pos="0" algn="l"/>
               </a:tabLst>
             </a:pPr>
-            <a:fld id="{2A29ED95-EEE9-4144-8AFF-ED04A144D701}" type="datetime1">
+            <a:fld id="{29B74521-B701-420E-B709-3ACEDCC79084}" type="datetime1">
               <a:rPr lang="en-CA" sz="900" b="1" u="none" strike="noStrike">
                 <a:solidFill>
                   <a:srgbClr val="6D7373"/>
@@ -30943,7 +30943,7 @@
                 <a:latin typeface="SRH Text"/>
                 <a:ea typeface="SRH"/>
               </a:rPr>
-              <a:t>2026-09-11</a:t>
+              <a:t>2026-09-12</a:t>
             </a:fld>
             <a:endParaRPr lang="en-US" sz="900" b="0" u="none" strike="noStrike">
               <a:solidFill>
@@ -31093,7 +31093,7 @@
                 <a:tab pos="0" algn="l"/>
               </a:tabLst>
             </a:pPr>
-            <a:fld id="{3F026A29-8B78-4948-9F14-A5665EE50CC6}" type="slidenum">
+            <a:fld id="{1F434275-5011-4593-9B4F-D428EFCFDEB3}" type="slidenum">
               <a:rPr lang="de-DE" sz="1550" b="1" u="none" strike="noStrike">
                 <a:solidFill>
                   <a:srgbClr val="6D7373"/>
@@ -31103,7 +31103,7 @@
                 <a:latin typeface="SRH Text"/>
                 <a:ea typeface="SRH"/>
               </a:rPr>
-              <a:t>13</a:t>
+              <a:t>&lt;number&gt;</a:t>
             </a:fld>
             <a:endParaRPr lang="en-US" sz="1550" b="0" u="none" strike="noStrike">
               <a:solidFill>
@@ -31742,7 +31742,7 @@
                 <a:tab pos="0" algn="l"/>
               </a:tabLst>
             </a:pPr>
-            <a:fld id="{8B0200E0-6D72-4295-B664-9E6FEB7F0A03}" type="datetime1">
+            <a:fld id="{EA30C91B-0634-4F36-A33C-4A9A522B43CD}" type="datetime1">
               <a:rPr lang="en-CA" sz="900" b="1" u="none" strike="noStrike">
                 <a:solidFill>
                   <a:srgbClr val="6D7373"/>
@@ -31752,7 +31752,7 @@
                 <a:latin typeface="SRH Text"/>
                 <a:ea typeface="SRH"/>
               </a:rPr>
-              <a:t>2026-09-11</a:t>
+              <a:t>2026-09-12</a:t>
             </a:fld>
             <a:endParaRPr lang="en-US" sz="900" b="0" u="none" strike="noStrike">
               <a:solidFill>
@@ -31902,7 +31902,7 @@
                 <a:tab pos="0" algn="l"/>
               </a:tabLst>
             </a:pPr>
-            <a:fld id="{E3B3205E-44F3-4A9F-AE56-E32998805624}" type="slidenum">
+            <a:fld id="{CF3EC680-54EC-4983-A170-BBADFC17DC8A}" type="slidenum">
               <a:rPr lang="de-DE" sz="1550" b="1" u="none" strike="noStrike">
                 <a:solidFill>
                   <a:srgbClr val="6D7373"/>
@@ -31912,7 +31912,7 @@
                 <a:latin typeface="SRH Text"/>
                 <a:ea typeface="SRH"/>
               </a:rPr>
-              <a:t>13</a:t>
+              <a:t>&lt;number&gt;</a:t>
             </a:fld>
             <a:endParaRPr lang="en-US" sz="1550" b="0" u="none" strike="noStrike">
               <a:solidFill>
@@ -32436,7 +32436,7 @@
                 <a:tab pos="0" algn="l"/>
               </a:tabLst>
             </a:pPr>
-            <a:fld id="{4910C94A-6208-41FC-BC39-26EC86767136}" type="datetime1">
+            <a:fld id="{129931FC-12DD-4C77-9712-F29B322CCA3B}" type="datetime1">
               <a:rPr lang="en-CA" sz="900" b="1" u="none" strike="noStrike">
                 <a:solidFill>
                   <a:srgbClr val="6D7373"/>
@@ -32446,7 +32446,7 @@
                 <a:latin typeface="SRH Text"/>
                 <a:ea typeface="SRH"/>
               </a:rPr>
-              <a:t>2026-09-11</a:t>
+              <a:t>2026-09-12</a:t>
             </a:fld>
             <a:endParaRPr lang="en-US" sz="900" b="0" u="none" strike="noStrike">
               <a:solidFill>
@@ -32596,7 +32596,7 @@
                 <a:tab pos="0" algn="l"/>
               </a:tabLst>
             </a:pPr>
-            <a:fld id="{BDAA8496-E520-4093-83DE-4C3B7DA66A8B}" type="slidenum">
+            <a:fld id="{D426EBA0-A469-4F02-90AE-DD1C085D57CE}" type="slidenum">
               <a:rPr lang="de-DE" sz="1550" b="1" u="none" strike="noStrike">
                 <a:solidFill>
                   <a:srgbClr val="6D7373"/>
@@ -32606,7 +32606,7 @@
                 <a:latin typeface="SRH Text"/>
                 <a:ea typeface="SRH"/>
               </a:rPr>
-              <a:t>13</a:t>
+              <a:t>&lt;number&gt;</a:t>
             </a:fld>
             <a:endParaRPr lang="en-US" sz="1550" b="0" u="none" strike="noStrike">
               <a:solidFill>
@@ -33178,7 +33178,7 @@
                 <a:tab pos="0" algn="l"/>
               </a:tabLst>
             </a:pPr>
-            <a:fld id="{C9478CAC-D02E-4A8A-BAA1-6414C64C113C}" type="datetime1">
+            <a:fld id="{BDBF51B1-703C-4FFF-B5FC-533514C418A6}" type="datetime1">
               <a:rPr lang="en-CA" sz="900" b="1" u="none" strike="noStrike">
                 <a:solidFill>
                   <a:srgbClr val="6D7373"/>
@@ -33188,7 +33188,7 @@
                 <a:latin typeface="SRH Text"/>
                 <a:ea typeface="SRH"/>
               </a:rPr>
-              <a:t>2026-09-11</a:t>
+              <a:t>2026-09-12</a:t>
             </a:fld>
             <a:endParaRPr lang="en-US" sz="900" b="0" u="none" strike="noStrike">
               <a:solidFill>
@@ -33338,7 +33338,7 @@
                 <a:tab pos="0" algn="l"/>
               </a:tabLst>
             </a:pPr>
-            <a:fld id="{CB1971EA-24AA-445D-947C-DC3DDA73896A}" type="slidenum">
+            <a:fld id="{C70075A5-9A02-4E5C-B420-4E03B1A59925}" type="slidenum">
               <a:rPr lang="de-DE" sz="1550" b="1" u="none" strike="noStrike">
                 <a:solidFill>
                   <a:srgbClr val="6D7373"/>
@@ -33348,7 +33348,7 @@
                 <a:latin typeface="SRH Text"/>
                 <a:ea typeface="SRH"/>
               </a:rPr>
-              <a:t>13</a:t>
+              <a:t>&lt;number&gt;</a:t>
             </a:fld>
             <a:endParaRPr lang="en-US" sz="1550" b="0" u="none" strike="noStrike">
               <a:solidFill>
@@ -33556,7 +33556,7 @@
                 <a:tab pos="0" algn="l"/>
               </a:tabLst>
             </a:pPr>
-            <a:fld id="{A280F8F3-F20C-40C2-8569-C1234FE540C3}" type="datetime1">
+            <a:fld id="{9166E934-F4DA-41C4-AB9F-F289FE17EEAE}" type="datetime1">
               <a:rPr lang="en-CA" sz="900" b="1" u="none" strike="noStrike">
                 <a:solidFill>
                   <a:srgbClr val="6D7373"/>
@@ -33566,7 +33566,7 @@
                 <a:latin typeface="SRH Text"/>
                 <a:ea typeface="SRH"/>
               </a:rPr>
-              <a:t>2026-09-11</a:t>
+              <a:t>2026-09-12</a:t>
             </a:fld>
             <a:endParaRPr lang="en-US" sz="900" b="0" u="none" strike="noStrike">
               <a:solidFill>
@@ -33716,7 +33716,7 @@
                 <a:tab pos="0" algn="l"/>
               </a:tabLst>
             </a:pPr>
-            <a:fld id="{DA40C64F-97CB-489C-88C8-7920932D6457}" type="slidenum">
+            <a:fld id="{26365CBD-89D5-48A3-BD52-D5FA39A7DE8E}" type="slidenum">
               <a:rPr lang="de-DE" sz="1550" b="1" u="none" strike="noStrike">
                 <a:solidFill>
                   <a:srgbClr val="6D7373"/>
@@ -33726,7 +33726,7 @@
                 <a:latin typeface="SRH Text"/>
                 <a:ea typeface="SRH"/>
               </a:rPr>
-              <a:t>13</a:t>
+              <a:t>&lt;number&gt;</a:t>
             </a:fld>
             <a:endParaRPr lang="en-US" sz="1550" b="0" u="none" strike="noStrike">
               <a:solidFill>
@@ -34365,7 +34365,7 @@
                 <a:tab pos="0" algn="l"/>
               </a:tabLst>
             </a:pPr>
-            <a:fld id="{4AA828F4-606A-4991-90B4-106343FD6916}" type="datetime1">
+            <a:fld id="{D5260C9A-7635-4EB4-A9D0-9DA7776E2969}" type="datetime1">
               <a:rPr lang="en-CA" sz="900" b="1" u="none" strike="noStrike">
                 <a:solidFill>
                   <a:srgbClr val="6D7373"/>
@@ -34375,7 +34375,7 @@
                 <a:latin typeface="SRH Text"/>
                 <a:ea typeface="SRH"/>
               </a:rPr>
-              <a:t>2026-09-11</a:t>
+              <a:t>2026-09-12</a:t>
             </a:fld>
             <a:endParaRPr lang="en-US" sz="900" b="0" u="none" strike="noStrike">
               <a:solidFill>
@@ -34525,7 +34525,7 @@
                 <a:tab pos="0" algn="l"/>
               </a:tabLst>
             </a:pPr>
-            <a:fld id="{5B38A515-006F-4563-8D1C-ED38C66B17B3}" type="slidenum">
+            <a:fld id="{B00CEA61-30FA-468A-9366-931FE9158840}" type="slidenum">
               <a:rPr lang="de-DE" sz="1550" b="1" u="none" strike="noStrike">
                 <a:solidFill>
                   <a:srgbClr val="6D7373"/>
@@ -34535,7 +34535,7 @@
                 <a:latin typeface="SRH Text"/>
                 <a:ea typeface="SRH"/>
               </a:rPr>
-              <a:t>13</a:t>
+              <a:t>&lt;number&gt;</a:t>
             </a:fld>
             <a:endParaRPr lang="en-US" sz="1550" b="0" u="none" strike="noStrike">
               <a:solidFill>
@@ -34785,7 +34785,7 @@
                 <a:tab pos="0" algn="l"/>
               </a:tabLst>
             </a:pPr>
-            <a:fld id="{CD61FD7F-F5C6-44CD-B7B7-C52A9A2C0C59}" type="datetime1">
+            <a:fld id="{90442120-54CC-47DA-A25E-265FBDD54DB4}" type="datetime1">
               <a:rPr lang="en-CA" sz="900" b="1" u="none" strike="noStrike">
                 <a:solidFill>
                   <a:srgbClr val="6D7373"/>
@@ -34795,7 +34795,7 @@
                 <a:latin typeface="SRH Text"/>
                 <a:ea typeface="SRH"/>
               </a:rPr>
-              <a:t>2026-09-11</a:t>
+              <a:t>2026-09-12</a:t>
             </a:fld>
             <a:endParaRPr lang="en-US" sz="900" b="0" u="none" strike="noStrike">
               <a:solidFill>
@@ -34945,7 +34945,7 @@
                 <a:tab pos="0" algn="l"/>
               </a:tabLst>
             </a:pPr>
-            <a:fld id="{D345764F-9B56-451F-9530-73298ECE5229}" type="slidenum">
+            <a:fld id="{61B6CED7-2B2E-4C40-A022-BB56C5F26528}" type="slidenum">
               <a:rPr lang="de-DE" sz="1550" b="1" u="none" strike="noStrike">
                 <a:solidFill>
                   <a:srgbClr val="6D7373"/>
@@ -34955,7 +34955,7 @@
                 <a:latin typeface="SRH Text"/>
                 <a:ea typeface="SRH"/>
               </a:rPr>
-              <a:t>13</a:t>
+              <a:t>&lt;number&gt;</a:t>
             </a:fld>
             <a:endParaRPr lang="en-US" sz="1550" b="0" u="none" strike="noStrike">
               <a:solidFill>
@@ -35089,27 +35089,24 @@
                 <a:tab pos="0" algn="l"/>
               </a:tabLst>
             </a:pPr>
-            <a:br>
-              <a:rPr sz="1800"/>
-            </a:br>
             <a:r>
               <a:rPr lang="de-DE" sz="1800" b="1" u="none" strike="noStrike">
                 <a:solidFill>
-                  <a:srgbClr val="FF4000"/>
+                  <a:srgbClr val="FF0000"/>
                 </a:solidFill>
                 <a:effectLst/>
                 <a:uFillTx/>
                 <a:latin typeface="SRH Headline"/>
                 <a:ea typeface="SRH Headline"/>
               </a:rPr>
-              <a:t>Machine Learning Model Development &amp; Cost-Sensitive Optimization</a:t>
+              <a:t>Methods for Handling Class Imbalance</a:t>
             </a:r>
             <a:br>
               <a:rPr sz="1800"/>
             </a:br>
             <a:endParaRPr lang="de-DE" sz="1800" b="1" u="none" strike="noStrike">
               <a:solidFill>
-                <a:schemeClr val="dk1"/>
+                <a:srgbClr val="FF0000"/>
               </a:solidFill>
               <a:effectLst/>
               <a:uFillTx/>
@@ -35146,44 +35143,7 @@
             <a:noAutofit/>
           </a:bodyPr>
           <a:p>
-            <a:pPr marL="285840" indent="0" algn="l" defTabSz="914400">
-              <a:lnSpc>
-                <a:spcPct val="150000"/>
-              </a:lnSpc>
-              <a:spcBef>
-                <a:spcPts val="1191"/>
-              </a:spcBef>
-              <a:spcAft>
-                <a:spcPts val="992"/>
-              </a:spcAft>
-              <a:buNone/>
-              <a:tabLst>
-                <a:tab pos="0" algn="l"/>
-              </a:tabLst>
-            </a:pPr>
-            <a:r>
-              <a:rPr lang="en-US" sz="1400" b="0" u="none" strike="noStrike">
-                <a:solidFill>
-                  <a:srgbClr val="1C1C1C"/>
-                </a:solidFill>
-                <a:effectLst/>
-                <a:uFillTx/>
-                <a:latin typeface="SRH Text"/>
-                <a:ea typeface="SRH Text"/>
-              </a:rPr>
-              <a:t>Algorithm: XGBoost (Extreme Gradient Boosting) </a:t>
-            </a:r>
-            <a:endParaRPr lang="de-DE" sz="1400" b="0" u="none" strike="noStrike">
-              <a:solidFill>
-                <a:schemeClr val="dk1"/>
-              </a:solidFill>
-              <a:effectLst/>
-              <a:uFillTx/>
-              <a:latin typeface="SRH Text"/>
-            </a:endParaRPr>
-          </a:p>
-          <a:p>
-            <a:pPr marL="285840" indent="-285840" algn="l" defTabSz="914400">
+            <a:pPr marL="285840" algn="l" defTabSz="914400">
               <a:lnSpc>
                 <a:spcPct val="150000"/>
               </a:lnSpc>
@@ -35194,10 +35154,47 @@
                 <a:spcPts val="992"/>
               </a:spcAft>
               <a:buClr>
-                <a:srgbClr val="575756"/>
+                <a:srgbClr val="1C1C1C"/>
               </a:buClr>
-              <a:buFont typeface="Wingdings" charset="2"/>
-              <a:buChar char=""/>
+              <a:buFont typeface="Symbol" charset="2"/>
+              <a:buChar char=""/>
+              <a:tabLst>
+                <a:tab pos="0" algn="l"/>
+              </a:tabLst>
+            </a:pPr>
+            <a:r>
+              <a:rPr lang="en-US" sz="1400" b="1" u="none" strike="noStrike">
+                <a:solidFill>
+                  <a:srgbClr val="1C1C1C"/>
+                </a:solidFill>
+                <a:effectLst/>
+                <a:uFillTx/>
+                <a:latin typeface="SRH Text"/>
+                <a:ea typeface="SRH Text"/>
+              </a:rPr>
+              <a:t>Random Oversampling</a:t>
+            </a:r>
+            <a:endParaRPr lang="de-DE" sz="1400" b="0" u="none" strike="noStrike">
+              <a:solidFill>
+                <a:schemeClr val="dk1"/>
+              </a:solidFill>
+              <a:effectLst/>
+              <a:uFillTx/>
+              <a:latin typeface="SRH Text"/>
+            </a:endParaRPr>
+          </a:p>
+          <a:p>
+            <a:pPr marL="285840" indent="0" algn="l" defTabSz="914400">
+              <a:lnSpc>
+                <a:spcPct val="150000"/>
+              </a:lnSpc>
+              <a:spcBef>
+                <a:spcPts val="1191"/>
+              </a:spcBef>
+              <a:spcAft>
+                <a:spcPts val="992"/>
+              </a:spcAft>
+              <a:buNone/>
               <a:tabLst>
                 <a:tab pos="0" algn="l"/>
               </a:tabLst>
@@ -35212,19 +35209,7 @@
                 <a:latin typeface="SRH Text"/>
                 <a:ea typeface="SRH Text"/>
               </a:rPr>
-              <a:t>Data Split: </a:t>
-            </a:r>
-            <a:r>
-              <a:rPr lang="en-US" sz="1400" b="1" u="none" strike="noStrike">
-                <a:solidFill>
-                  <a:srgbClr val="1C1C1C"/>
-                </a:solidFill>
-                <a:effectLst/>
-                <a:uFillTx/>
-                <a:latin typeface="SRH Text"/>
-                <a:ea typeface="SRH Text"/>
-              </a:rPr>
-              <a:t>80% Training | 10% Validation | 10% Test </a:t>
+              <a:t>Duplicates minority-class samples to increase their representation. </a:t>
             </a:r>
             <a:endParaRPr lang="de-DE" sz="1400" b="0" u="none" strike="noStrike">
               <a:solidFill>
@@ -35236,7 +35221,7 @@
             </a:endParaRPr>
           </a:p>
           <a:p>
-            <a:pPr marL="285840" indent="-285840" algn="l" defTabSz="914400">
+            <a:pPr marL="285840" algn="l" defTabSz="914400">
               <a:lnSpc>
                 <a:spcPct val="150000"/>
               </a:lnSpc>
@@ -35247,10 +35232,47 @@
                 <a:spcPts val="992"/>
               </a:spcAft>
               <a:buClr>
-                <a:srgbClr val="575756"/>
+                <a:srgbClr val="1C1C1C"/>
               </a:buClr>
-              <a:buFont typeface="Wingdings" charset="2"/>
-              <a:buChar char=""/>
+              <a:buFont typeface="Symbol" charset="2"/>
+              <a:buChar char=""/>
+              <a:tabLst>
+                <a:tab pos="0" algn="l"/>
+              </a:tabLst>
+            </a:pPr>
+            <a:r>
+              <a:rPr lang="en-US" sz="1400" b="1" u="none" strike="noStrike">
+                <a:solidFill>
+                  <a:srgbClr val="1C1C1C"/>
+                </a:solidFill>
+                <a:effectLst/>
+                <a:uFillTx/>
+                <a:latin typeface="SRH Text"/>
+                <a:ea typeface="SRH Text"/>
+              </a:rPr>
+              <a:t>SMOTE </a:t>
+            </a:r>
+            <a:endParaRPr lang="de-DE" sz="1400" b="0" u="none" strike="noStrike">
+              <a:solidFill>
+                <a:schemeClr val="dk1"/>
+              </a:solidFill>
+              <a:effectLst/>
+              <a:uFillTx/>
+              <a:latin typeface="SRH Text"/>
+            </a:endParaRPr>
+          </a:p>
+          <a:p>
+            <a:pPr marL="285840" indent="0" algn="l" defTabSz="914400">
+              <a:lnSpc>
+                <a:spcPct val="150000"/>
+              </a:lnSpc>
+              <a:spcBef>
+                <a:spcPts val="1191"/>
+              </a:spcBef>
+              <a:spcAft>
+                <a:spcPts val="992"/>
+              </a:spcAft>
+              <a:buNone/>
               <a:tabLst>
                 <a:tab pos="0" algn="l"/>
               </a:tabLst>
@@ -35265,7 +35287,7 @@
                 <a:latin typeface="SRH Text"/>
                 <a:ea typeface="SRH Text"/>
               </a:rPr>
-              <a:t>Class Imbalance: Class weights applied during training </a:t>
+              <a:t>Generates synthetic minority-class samples instead of simply duplicating them. </a:t>
             </a:r>
             <a:endParaRPr lang="de-DE" sz="1400" b="0" u="none" strike="noStrike">
               <a:solidFill>
@@ -35277,7 +35299,7 @@
             </a:endParaRPr>
           </a:p>
           <a:p>
-            <a:pPr marL="285840" indent="-285840" algn="l" defTabSz="914400">
+            <a:pPr marL="285840" algn="l" defTabSz="914400">
               <a:lnSpc>
                 <a:spcPct val="150000"/>
               </a:lnSpc>
@@ -35288,16 +35310,16 @@
                 <a:spcPts val="992"/>
               </a:spcAft>
               <a:buClr>
-                <a:srgbClr val="575756"/>
+                <a:srgbClr val="1C1C1C"/>
               </a:buClr>
-              <a:buFont typeface="Wingdings" charset="2"/>
-              <a:buChar char=""/>
-              <a:tabLst>
-                <a:tab pos="0" algn="l"/>
-              </a:tabLst>
-            </a:pPr>
-            <a:r>
-              <a:rPr lang="en-US" sz="1400" b="0" u="none" strike="noStrike">
+              <a:buFont typeface="Symbol" charset="2"/>
+              <a:buChar char=""/>
+              <a:tabLst>
+                <a:tab pos="0" algn="l"/>
+              </a:tabLst>
+            </a:pPr>
+            <a:r>
+              <a:rPr lang="en-US" sz="1400" b="1" u="none" strike="noStrike">
                 <a:solidFill>
                   <a:srgbClr val="1C1C1C"/>
                 </a:solidFill>
@@ -35306,7 +35328,7 @@
                 <a:latin typeface="SRH Text"/>
                 <a:ea typeface="SRH Text"/>
               </a:rPr>
-              <a:t>Hyperparameter Optimization: Grid Search </a:t>
+              <a:t>Cost-Sensitive Learning (CSL) </a:t>
             </a:r>
             <a:endParaRPr lang="de-DE" sz="1400" b="0" u="none" strike="noStrike">
               <a:solidFill>
@@ -35318,7 +35340,7 @@
             </a:endParaRPr>
           </a:p>
           <a:p>
-            <a:pPr marL="285840" indent="-285840" algn="l" defTabSz="914400">
+            <a:pPr marL="285840" indent="0" algn="l" defTabSz="914400">
               <a:lnSpc>
                 <a:spcPct val="150000"/>
               </a:lnSpc>
@@ -35328,11 +35350,7 @@
               <a:spcAft>
                 <a:spcPts val="992"/>
               </a:spcAft>
-              <a:buClr>
-                <a:srgbClr val="575756"/>
-              </a:buClr>
-              <a:buFont typeface="Wingdings" charset="2"/>
-              <a:buChar char=""/>
+              <a:buNone/>
               <a:tabLst>
                 <a:tab pos="0" algn="l"/>
               </a:tabLst>
@@ -35347,167 +35365,7 @@
                 <a:latin typeface="SRH Text"/>
                 <a:ea typeface="SRH Text"/>
               </a:rPr>
-              <a:t>n_estimators: [200, 300, 400, 500,600,700] </a:t>
-            </a:r>
-            <a:endParaRPr lang="de-DE" sz="1400" b="0" u="none" strike="noStrike">
-              <a:solidFill>
-                <a:schemeClr val="dk1"/>
-              </a:solidFill>
-              <a:effectLst/>
-              <a:uFillTx/>
-              <a:latin typeface="SRH Text"/>
-            </a:endParaRPr>
-          </a:p>
-          <a:p>
-            <a:pPr marL="285840" indent="-285840" algn="l" defTabSz="914400">
-              <a:lnSpc>
-                <a:spcPct val="150000"/>
-              </a:lnSpc>
-              <a:spcBef>
-                <a:spcPts val="1191"/>
-              </a:spcBef>
-              <a:spcAft>
-                <a:spcPts val="992"/>
-              </a:spcAft>
-              <a:buClr>
-                <a:srgbClr val="575756"/>
-              </a:buClr>
-              <a:buFont typeface="Wingdings" charset="2"/>
-              <a:buChar char=""/>
-              <a:tabLst>
-                <a:tab pos="0" algn="l"/>
-              </a:tabLst>
-            </a:pPr>
-            <a:r>
-              <a:rPr lang="en-US" sz="1400" b="0" u="none" strike="noStrike">
-                <a:solidFill>
-                  <a:srgbClr val="1C1C1C"/>
-                </a:solidFill>
-                <a:effectLst/>
-                <a:uFillTx/>
-                <a:latin typeface="SRH Text"/>
-                <a:ea typeface="SRH Text"/>
-              </a:rPr>
-              <a:t>learning_rate: [0.03, 0.05, 0.07, 0.1 ,0.2, 0.3] </a:t>
-            </a:r>
-            <a:endParaRPr lang="de-DE" sz="1400" b="0" u="none" strike="noStrike">
-              <a:solidFill>
-                <a:schemeClr val="dk1"/>
-              </a:solidFill>
-              <a:effectLst/>
-              <a:uFillTx/>
-              <a:latin typeface="SRH Text"/>
-            </a:endParaRPr>
-          </a:p>
-          <a:p>
-            <a:pPr marL="285840" indent="-285840" algn="l" defTabSz="914400">
-              <a:lnSpc>
-                <a:spcPct val="150000"/>
-              </a:lnSpc>
-              <a:spcBef>
-                <a:spcPts val="1191"/>
-              </a:spcBef>
-              <a:spcAft>
-                <a:spcPts val="992"/>
-              </a:spcAft>
-              <a:buClr>
-                <a:srgbClr val="575756"/>
-              </a:buClr>
-              <a:buFont typeface="Wingdings" charset="2"/>
-              <a:buChar char=""/>
-              <a:tabLst>
-                <a:tab pos="0" algn="l"/>
-              </a:tabLst>
-            </a:pPr>
-            <a:r>
-              <a:rPr lang="en-US" sz="1400" b="0" u="none" strike="noStrike">
-                <a:solidFill>
-                  <a:srgbClr val="1C1C1C"/>
-                </a:solidFill>
-                <a:effectLst/>
-                <a:uFillTx/>
-                <a:latin typeface="SRH Text"/>
-                <a:ea typeface="SRH Text"/>
-              </a:rPr>
-              <a:t>max_depth: [3, 4, 5, 6,7,8] </a:t>
-            </a:r>
-            <a:endParaRPr lang="de-DE" sz="1400" b="0" u="none" strike="noStrike">
-              <a:solidFill>
-                <a:schemeClr val="dk1"/>
-              </a:solidFill>
-              <a:effectLst/>
-              <a:uFillTx/>
-              <a:latin typeface="SRH Text"/>
-            </a:endParaRPr>
-          </a:p>
-          <a:p>
-            <a:pPr marL="285840" indent="-285840" algn="l" defTabSz="914400">
-              <a:lnSpc>
-                <a:spcPct val="150000"/>
-              </a:lnSpc>
-              <a:spcBef>
-                <a:spcPts val="1191"/>
-              </a:spcBef>
-              <a:spcAft>
-                <a:spcPts val="992"/>
-              </a:spcAft>
-              <a:buClr>
-                <a:srgbClr val="575756"/>
-              </a:buClr>
-              <a:buFont typeface="Wingdings" charset="2"/>
-              <a:buChar char=""/>
-              <a:tabLst>
-                <a:tab pos="0" algn="l"/>
-              </a:tabLst>
-            </a:pPr>
-            <a:r>
-              <a:rPr lang="en-US" sz="1400" b="0" u="none" strike="noStrike">
-                <a:solidFill>
-                  <a:srgbClr val="1C1C1C"/>
-                </a:solidFill>
-                <a:effectLst/>
-                <a:uFillTx/>
-                <a:latin typeface="SRH Text"/>
-                <a:ea typeface="SRH Text"/>
-              </a:rPr>
-              <a:t>min_child_weight: [1, 3, 5, 7, 9] </a:t>
-            </a:r>
-            <a:endParaRPr lang="de-DE" sz="1400" b="0" u="none" strike="noStrike">
-              <a:solidFill>
-                <a:schemeClr val="dk1"/>
-              </a:solidFill>
-              <a:effectLst/>
-              <a:uFillTx/>
-              <a:latin typeface="SRH Text"/>
-            </a:endParaRPr>
-          </a:p>
-          <a:p>
-            <a:pPr marL="285840" indent="0" algn="l" defTabSz="914400">
-              <a:lnSpc>
-                <a:spcPct val="150000"/>
-              </a:lnSpc>
-              <a:spcBef>
-                <a:spcPts val="1191"/>
-              </a:spcBef>
-              <a:spcAft>
-                <a:spcPts val="992"/>
-              </a:spcAft>
-              <a:buNone/>
-              <a:tabLst>
-                <a:tab pos="0" algn="l"/>
-              </a:tabLst>
-            </a:pPr>
-            <a:r>
-              <a:rPr lang="en-US" sz="1400" b="0" u="none" strike="noStrike">
-                <a:solidFill>
-                  <a:srgbClr val="1C1C1C"/>
-                </a:solidFill>
-                <a:effectLst/>
-                <a:uFillTx/>
-                <a:latin typeface="SRH Text"/>
-                <a:ea typeface="SRH Text"/>
-              </a:rPr>
-              <a:t>Total: 1080 XGBoost configurations evaluated </a:t>
+              <a:t>Assigns higher importance/cost to minority-class errors during model training. </a:t>
             </a:r>
             <a:endParaRPr lang="de-DE" sz="1400" b="0" u="none" strike="noStrike">
               <a:solidFill>
@@ -35577,7 +35435,7 @@
                 <a:tab pos="0" algn="l"/>
               </a:tabLst>
             </a:pPr>
-            <a:fld id="{40396052-6B4A-48AA-9DD2-C883C243B537}" type="datetime1">
+            <a:fld id="{66A48DD6-F872-4A05-8979-9E746F28457E}" type="datetime1">
               <a:rPr lang="en-CA" sz="900" b="1" u="none" strike="noStrike">
                 <a:solidFill>
                   <a:srgbClr val="6D7373"/>
@@ -35587,7 +35445,7 @@
                 <a:latin typeface="SRH Text"/>
                 <a:ea typeface="SRH"/>
               </a:rPr>
-              <a:t>2026-09-11</a:t>
+              <a:t>2026-09-12</a:t>
             </a:fld>
             <a:endParaRPr lang="en-US" sz="900" b="0" u="none" strike="noStrike">
               <a:solidFill>
@@ -35737,7 +35595,7 @@
                 <a:tab pos="0" algn="l"/>
               </a:tabLst>
             </a:pPr>
-            <a:fld id="{8E62B596-C936-4361-BBE3-A27C23DAE77F}" type="slidenum">
+            <a:fld id="{20C04F37-E0B3-4D46-B1F1-B60B0BCFBDC9}" type="slidenum">
               <a:rPr lang="de-DE" sz="1550" b="1" u="none" strike="noStrike">
                 <a:solidFill>
                   <a:srgbClr val="6D7373"/>
@@ -35747,7 +35605,7 @@
                 <a:latin typeface="SRH Text"/>
                 <a:ea typeface="SRH"/>
               </a:rPr>
-              <a:t>13</a:t>
+              <a:t>&lt;number&gt;</a:t>
             </a:fld>
             <a:endParaRPr lang="en-US" sz="1550" b="0" u="none" strike="noStrike">
               <a:solidFill>
@@ -35802,8 +35660,8 @@
         </p:nvSpPr>
         <p:spPr>
           <a:xfrm>
-            <a:off x="191880" y="-147600"/>
-            <a:ext cx="9155160" cy="832320"/>
+            <a:off x="191880" y="228600"/>
+            <a:ext cx="9155160" cy="685080"/>
           </a:xfrm>
           <a:prstGeom prst="rect">
             <a:avLst/>
@@ -35819,12 +35677,39 @@
           </a:bodyPr>
           <a:p>
             <a:pPr indent="0" algn="l" defTabSz="914400">
-              <a:buNone/>
-              <a:tabLst>
-                <a:tab pos="0" algn="l"/>
-              </a:tabLst>
-            </a:pPr>
-            <a:endParaRPr lang="de-DE" sz="3000" b="1" u="none" strike="noStrike">
+              <a:lnSpc>
+                <a:spcPct val="100000"/>
+              </a:lnSpc>
+              <a:spcBef>
+                <a:spcPts val="1191"/>
+              </a:spcBef>
+              <a:spcAft>
+                <a:spcPts val="992"/>
+              </a:spcAft>
+              <a:buNone/>
+              <a:tabLst>
+                <a:tab pos="0" algn="l"/>
+              </a:tabLst>
+            </a:pPr>
+            <a:br>
+              <a:rPr sz="1800"/>
+            </a:br>
+            <a:r>
+              <a:rPr lang="de-DE" sz="1800" b="1" u="none" strike="noStrike">
+                <a:solidFill>
+                  <a:srgbClr val="FF4000"/>
+                </a:solidFill>
+                <a:effectLst/>
+                <a:uFillTx/>
+                <a:latin typeface="SRH Headline"/>
+                <a:ea typeface="SRH Headline"/>
+              </a:rPr>
+              <a:t>Machine Learning Model Development </a:t>
+            </a:r>
+            <a:br>
+              <a:rPr sz="1800"/>
+            </a:br>
+            <a:endParaRPr lang="de-DE" sz="1800" b="1" u="none" strike="noStrike">
               <a:solidFill>
                 <a:schemeClr val="dk1"/>
               </a:solidFill>
@@ -35847,8 +35732,8 @@
         </p:nvSpPr>
         <p:spPr>
           <a:xfrm>
-            <a:off x="228600" y="696600"/>
-            <a:ext cx="4570920" cy="5474880"/>
+            <a:off x="228600" y="914400"/>
+            <a:ext cx="11200320" cy="6856920"/>
           </a:xfrm>
           <a:prstGeom prst="rect">
             <a:avLst/>
@@ -35863,6 +35748,43 @@
             <a:noAutofit/>
           </a:bodyPr>
           <a:p>
+            <a:pPr marL="285840" indent="0" algn="l" defTabSz="914400">
+              <a:lnSpc>
+                <a:spcPct val="150000"/>
+              </a:lnSpc>
+              <a:spcBef>
+                <a:spcPts val="1191"/>
+              </a:spcBef>
+              <a:spcAft>
+                <a:spcPts val="992"/>
+              </a:spcAft>
+              <a:buNone/>
+              <a:tabLst>
+                <a:tab pos="0" algn="l"/>
+              </a:tabLst>
+            </a:pPr>
+            <a:r>
+              <a:rPr lang="en-US" sz="1400" b="0" u="none" strike="noStrike">
+                <a:solidFill>
+                  <a:srgbClr val="1C1C1C"/>
+                </a:solidFill>
+                <a:effectLst/>
+                <a:uFillTx/>
+                <a:latin typeface="SRH Text"/>
+                <a:ea typeface="SRH Text"/>
+              </a:rPr>
+              <a:t>Algorithm: XGBoost (Extreme Gradient Boosting) </a:t>
+            </a:r>
+            <a:endParaRPr lang="de-DE" sz="1400" b="0" u="none" strike="noStrike">
+              <a:solidFill>
+                <a:schemeClr val="dk1"/>
+              </a:solidFill>
+              <a:effectLst/>
+              <a:uFillTx/>
+              <a:latin typeface="SRH Text"/>
+            </a:endParaRPr>
+          </a:p>
+          <a:p>
             <a:pPr marL="285840" indent="-285840" algn="l" defTabSz="914400">
               <a:lnSpc>
                 <a:spcPct val="150000"/>
@@ -35883,18 +35805,30 @@
               </a:tabLst>
             </a:pPr>
             <a:r>
-              <a:rPr lang="en-US" sz="1500" b="1" u="none" strike="noStrike">
-                <a:solidFill>
-                  <a:srgbClr val="FF4000"/>
+              <a:rPr lang="en-US" sz="1400" b="0" u="none" strike="noStrike">
+                <a:solidFill>
+                  <a:srgbClr val="1C1C1C"/>
                 </a:solidFill>
                 <a:effectLst/>
                 <a:uFillTx/>
                 <a:latin typeface="SRH Text"/>
                 <a:ea typeface="SRH Text"/>
               </a:rPr>
-              <a:t>Find optimal threshold:</a:t>
-            </a:r>
-            <a:endParaRPr lang="de-DE" sz="1500" b="0" u="none" strike="noStrike">
+              <a:t>Data Split: </a:t>
+            </a:r>
+            <a:r>
+              <a:rPr lang="en-US" sz="1400" b="1" u="none" strike="noStrike">
+                <a:solidFill>
+                  <a:srgbClr val="1C1C1C"/>
+                </a:solidFill>
+                <a:effectLst/>
+                <a:uFillTx/>
+                <a:latin typeface="SRH Text"/>
+                <a:ea typeface="SRH Text"/>
+              </a:rPr>
+              <a:t>80% Training | 10% Validation | 10% Test </a:t>
+            </a:r>
+            <a:endParaRPr lang="de-DE" sz="1400" b="0" u="none" strike="noStrike">
               <a:solidFill>
                 <a:schemeClr val="dk1"/>
               </a:solidFill>
@@ -35924,18 +35858,18 @@
               </a:tabLst>
             </a:pPr>
             <a:r>
-              <a:rPr lang="en-US" sz="1300" b="0" u="none" strike="noStrike">
-                <a:solidFill>
-                  <a:srgbClr val="000000"/>
+              <a:rPr lang="en-US" sz="1400" b="0" u="none" strike="noStrike">
+                <a:solidFill>
+                  <a:srgbClr val="1C1C1C"/>
                 </a:solidFill>
                 <a:effectLst/>
                 <a:uFillTx/>
                 <a:latin typeface="SRH Text"/>
                 <a:ea typeface="SRH Text"/>
               </a:rPr>
-              <a:t>Standard approach → Fixed threshold = 0.50 </a:t>
-            </a:r>
-            <a:endParaRPr lang="de-DE" sz="1300" b="0" u="none" strike="noStrike">
+              <a:t>Class Imbalance: Class weights applied during training </a:t>
+            </a:r>
+            <a:endParaRPr lang="de-DE" sz="1400" b="0" u="none" strike="noStrike">
               <a:solidFill>
                 <a:schemeClr val="dk1"/>
               </a:solidFill>
@@ -35965,18 +35899,18 @@
               </a:tabLst>
             </a:pPr>
             <a:r>
-              <a:rPr lang="en-US" sz="1300" b="0" u="none" strike="noStrike">
-                <a:solidFill>
-                  <a:srgbClr val="000000"/>
+              <a:rPr lang="en-US" sz="1400" b="0" u="none" strike="noStrike">
+                <a:solidFill>
+                  <a:srgbClr val="1C1C1C"/>
                 </a:solidFill>
                 <a:effectLst/>
                 <a:uFillTx/>
                 <a:latin typeface="SRH Text"/>
                 <a:ea typeface="SRH Text"/>
               </a:rPr>
-              <a:t>Proposed approach → Optimize the decision threshold </a:t>
-            </a:r>
-            <a:endParaRPr lang="de-DE" sz="1300" b="0" u="none" strike="noStrike">
+              <a:t>Hyperparameter Optimization: Grid Search </a:t>
+            </a:r>
+            <a:endParaRPr lang="de-DE" sz="1400" b="0" u="none" strike="noStrike">
               <a:solidFill>
                 <a:schemeClr val="dk1"/>
               </a:solidFill>
@@ -36006,18 +35940,18 @@
               </a:tabLst>
             </a:pPr>
             <a:r>
-              <a:rPr lang="en-US" sz="1300" b="1" u="none" strike="noStrike">
-                <a:solidFill>
-                  <a:srgbClr val="000000"/>
+              <a:rPr lang="en-US" sz="1400" b="0" u="none" strike="noStrike">
+                <a:solidFill>
+                  <a:srgbClr val="1C1C1C"/>
                 </a:solidFill>
                 <a:effectLst/>
                 <a:uFillTx/>
                 <a:latin typeface="SRH Text"/>
                 <a:ea typeface="SRH Text"/>
               </a:rPr>
-              <a:t>Tested thresholds: (0.15, 0.6, 0.01)</a:t>
-            </a:r>
-            <a:endParaRPr lang="de-DE" sz="1300" b="0" u="none" strike="noStrike">
+              <a:t>n_estimators: [200, 300, 400, 500,600,700] </a:t>
+            </a:r>
+            <a:endParaRPr lang="de-DE" sz="1400" b="0" u="none" strike="noStrike">
               <a:solidFill>
                 <a:schemeClr val="dk1"/>
               </a:solidFill>
@@ -36047,18 +35981,18 @@
               </a:tabLst>
             </a:pPr>
             <a:r>
-              <a:rPr lang="en-US" sz="1300" b="0" u="none" strike="noStrike">
-                <a:solidFill>
-                  <a:srgbClr val="000000"/>
+              <a:rPr lang="en-US" sz="1400" b="0" u="none" strike="noStrike">
+                <a:solidFill>
+                  <a:srgbClr val="1C1C1C"/>
                 </a:solidFill>
                 <a:effectLst/>
                 <a:uFillTx/>
                 <a:latin typeface="SRH Text"/>
                 <a:ea typeface="SRH Text"/>
               </a:rPr>
-              <a:t>Business cost function: prioritize low FN, penalize FP </a:t>
-            </a:r>
-            <a:endParaRPr lang="de-DE" sz="1300" b="0" u="none" strike="noStrike">
+              <a:t>learning_rate: [0.03, 0.05, 0.07, 0.1 ,0.2, 0.3] </a:t>
+            </a:r>
+            <a:endParaRPr lang="de-DE" sz="1400" b="0" u="none" strike="noStrike">
               <a:solidFill>
                 <a:schemeClr val="dk1"/>
               </a:solidFill>
@@ -36088,18 +36022,18 @@
               </a:tabLst>
             </a:pPr>
             <a:r>
-              <a:rPr lang="en-US" sz="1300" b="1" u="none" strike="noStrike">
-                <a:solidFill>
-                  <a:srgbClr val="000000"/>
+              <a:rPr lang="en-US" sz="1400" b="0" u="none" strike="noStrike">
+                <a:solidFill>
+                  <a:srgbClr val="1C1C1C"/>
                 </a:solidFill>
                 <a:effectLst/>
                 <a:uFillTx/>
                 <a:latin typeface="SRH Text"/>
                 <a:ea typeface="SRH Text"/>
               </a:rPr>
-              <a:t>Cost = 2.5 × FN + FP</a:t>
-            </a:r>
-            <a:endParaRPr lang="de-DE" sz="1300" b="0" u="none" strike="noStrike">
+              <a:t>max_depth: [3, 4, 5, 6,7,8] </a:t>
+            </a:r>
+            <a:endParaRPr lang="de-DE" sz="1400" b="0" u="none" strike="noStrike">
               <a:solidFill>
                 <a:schemeClr val="dk1"/>
               </a:solidFill>
@@ -36129,18 +36063,18 @@
               </a:tabLst>
             </a:pPr>
             <a:r>
-              <a:rPr lang="en-US" sz="1300" b="1" u="none" strike="noStrike">
-                <a:solidFill>
-                  <a:srgbClr val="000000"/>
+              <a:rPr lang="en-US" sz="1400" b="0" u="none" strike="noStrike">
+                <a:solidFill>
+                  <a:srgbClr val="1C1C1C"/>
                 </a:solidFill>
                 <a:effectLst/>
                 <a:uFillTx/>
                 <a:latin typeface="SRH Text"/>
                 <a:ea typeface="SRH Text"/>
               </a:rPr>
-              <a:t>p(default)&lt; 0.50-→ Approved</a:t>
-            </a:r>
-            <a:endParaRPr lang="de-DE" sz="1300" b="0" u="none" strike="noStrike">
+              <a:t>min_child_weight: [1, 3, 5, 7, 9] </a:t>
+            </a:r>
+            <a:endParaRPr lang="de-DE" sz="1400" b="0" u="none" strike="noStrike">
               <a:solidFill>
                 <a:schemeClr val="dk1"/>
               </a:solidFill>
@@ -36150,7 +36084,7 @@
             </a:endParaRPr>
           </a:p>
           <a:p>
-            <a:pPr marL="285840" indent="-285840" algn="l" defTabSz="914400">
+            <a:pPr marL="285840" indent="0" algn="l" defTabSz="914400">
               <a:lnSpc>
                 <a:spcPct val="150000"/>
               </a:lnSpc>
@@ -36160,53 +36094,24 @@
               <a:spcAft>
                 <a:spcPts val="992"/>
               </a:spcAft>
-              <a:buClr>
-                <a:srgbClr val="575756"/>
-              </a:buClr>
-              <a:buFont typeface="Wingdings" charset="2"/>
-              <a:buChar char=""/>
-              <a:tabLst>
-                <a:tab pos="0" algn="l"/>
-              </a:tabLst>
-            </a:pPr>
-            <a:r>
-              <a:rPr lang="en-US" sz="1300" b="1" u="none" strike="noStrike">
-                <a:solidFill>
-                  <a:srgbClr val="000000"/>
+              <a:buNone/>
+              <a:tabLst>
+                <a:tab pos="0" algn="l"/>
+              </a:tabLst>
+            </a:pPr>
+            <a:r>
+              <a:rPr lang="en-US" sz="1400" b="0" u="none" strike="noStrike">
+                <a:solidFill>
+                  <a:srgbClr val="1C1C1C"/>
                 </a:solidFill>
                 <a:effectLst/>
                 <a:uFillTx/>
                 <a:latin typeface="SRH Text"/>
                 <a:ea typeface="SRH Text"/>
               </a:rPr>
-              <a:t>p(default)&gt; 0.50-→ Rejected</a:t>
-            </a:r>
-            <a:endParaRPr lang="de-DE" sz="1300" b="0" u="none" strike="noStrike">
-              <a:solidFill>
-                <a:schemeClr val="dk1"/>
-              </a:solidFill>
-              <a:effectLst/>
-              <a:uFillTx/>
-              <a:latin typeface="SRH Text"/>
-            </a:endParaRPr>
-          </a:p>
-          <a:p>
-            <a:pPr marL="285840" indent="0" algn="l" defTabSz="914400">
-              <a:lnSpc>
-                <a:spcPct val="150000"/>
-              </a:lnSpc>
-              <a:spcBef>
-                <a:spcPts val="1191"/>
-              </a:spcBef>
-              <a:spcAft>
-                <a:spcPts val="992"/>
-              </a:spcAft>
-              <a:buNone/>
-              <a:tabLst>
-                <a:tab pos="0" algn="l"/>
-              </a:tabLst>
-            </a:pPr>
-            <a:endParaRPr lang="de-DE" sz="1100" b="0" u="none" strike="noStrike">
+              <a:t>Total: 1080 XGBoost configurations evaluated </a:t>
+            </a:r>
+            <a:endParaRPr lang="de-DE" sz="1400" b="0" u="none" strike="noStrike">
               <a:solidFill>
                 <a:schemeClr val="dk1"/>
               </a:solidFill>
@@ -36274,7 +36179,7 @@
                 <a:tab pos="0" algn="l"/>
               </a:tabLst>
             </a:pPr>
-            <a:fld id="{7E72B093-4422-4F8A-9398-B4DFB154489E}" type="datetime1">
+            <a:fld id="{9633888E-BE1E-4E78-959C-E74E0ED18723}" type="datetime1">
               <a:rPr lang="en-CA" sz="900" b="1" u="none" strike="noStrike">
                 <a:solidFill>
                   <a:srgbClr val="6D7373"/>
@@ -36284,7 +36189,7 @@
                 <a:latin typeface="SRH Text"/>
                 <a:ea typeface="SRH"/>
               </a:rPr>
-              <a:t>2026-09-11</a:t>
+              <a:t>2026-09-12</a:t>
             </a:fld>
             <a:endParaRPr lang="en-US" sz="900" b="0" u="none" strike="noStrike">
               <a:solidFill>
@@ -36434,7 +36339,7 @@
                 <a:tab pos="0" algn="l"/>
               </a:tabLst>
             </a:pPr>
-            <a:fld id="{6887DDE1-A827-4A76-B99A-D2427651F2EB}" type="slidenum">
+            <a:fld id="{3C5A3986-AF2A-473E-AFE0-8E05187ABBB0}" type="slidenum">
               <a:rPr lang="de-DE" sz="1550" b="1" u="none" strike="noStrike">
                 <a:solidFill>
                   <a:srgbClr val="6D7373"/>
@@ -36444,7 +36349,7 @@
                 <a:latin typeface="SRH Text"/>
                 <a:ea typeface="SRH"/>
               </a:rPr>
-              <a:t>13</a:t>
+              <a:t>&lt;number&gt;</a:t>
             </a:fld>
             <a:endParaRPr lang="en-US" sz="1550" b="0" u="none" strike="noStrike">
               <a:solidFill>
@@ -36453,307 +36358,6 @@
               <a:effectLst/>
               <a:uFillTx/>
               <a:latin typeface="Times New Roman"/>
-            </a:endParaRPr>
-          </a:p>
-        </p:txBody>
-      </p:sp>
-      <p:pic>
-        <p:nvPicPr>
-          <p:cNvPr id="301" name=""/>
-          <p:cNvPicPr/>
-          <p:nvPr/>
-        </p:nvPicPr>
-        <p:blipFill>
-          <a:blip r:embed="rId1"/>
-          <a:stretch/>
-        </p:blipFill>
-        <p:spPr>
-          <a:xfrm>
-            <a:off x="8458200" y="1334160"/>
-            <a:ext cx="3016080" cy="3465720"/>
-          </a:xfrm>
-          <a:prstGeom prst="rect">
-            <a:avLst/>
-          </a:prstGeom>
-          <a:noFill/>
-          <a:ln w="0">
-            <a:noFill/>
-          </a:ln>
-        </p:spPr>
-      </p:pic>
-      <p:sp>
-        <p:nvSpPr>
-          <p:cNvPr id="302" name="PlaceHolder 6"/>
-          <p:cNvSpPr/>
-          <p:nvPr/>
-        </p:nvSpPr>
-        <p:spPr>
-          <a:xfrm>
-            <a:off x="4764960" y="624960"/>
-            <a:ext cx="3463920" cy="4860720"/>
-          </a:xfrm>
-          <a:prstGeom prst="rect">
-            <a:avLst/>
-          </a:prstGeom>
-          <a:noFill/>
-          <a:ln w="0">
-            <a:noFill/>
-          </a:ln>
-        </p:spPr>
-        <p:style>
-          <a:lnRef idx="0"/>
-          <a:fillRef idx="0"/>
-          <a:effectRef idx="0"/>
-          <a:fontRef idx="minor"/>
-        </p:style>
-        <p:txBody>
-          <a:bodyPr numCol="1" spcCol="216000" lIns="0" tIns="0" rIns="0" bIns="0" anchor="t">
-            <a:noAutofit/>
-          </a:bodyPr>
-          <a:p>
-            <a:pPr marL="285840" indent="-285840" defTabSz="914400">
-              <a:lnSpc>
-                <a:spcPct val="150000"/>
-              </a:lnSpc>
-              <a:spcBef>
-                <a:spcPts val="1191"/>
-              </a:spcBef>
-              <a:spcAft>
-                <a:spcPts val="992"/>
-              </a:spcAft>
-              <a:buClr>
-                <a:srgbClr val="575756"/>
-              </a:buClr>
-              <a:buFont typeface="Wingdings" charset="2"/>
-              <a:buChar char=""/>
-              <a:tabLst>
-                <a:tab pos="0" algn="l"/>
-              </a:tabLst>
-            </a:pPr>
-            <a:r>
-              <a:rPr lang="en-US" sz="1300" b="0" u="none" strike="noStrike">
-                <a:solidFill>
-                  <a:srgbClr val="1C1C1C"/>
-                </a:solidFill>
-                <a:effectLst/>
-                <a:uFillTx/>
-                <a:latin typeface="SRH Text"/>
-                <a:ea typeface="SRH Text"/>
-              </a:rPr>
-              <a:t>Each model was evaluated using: </a:t>
-            </a:r>
-            <a:endParaRPr lang="en-US" sz="1300" b="0" u="none" strike="noStrike">
-              <a:solidFill>
-                <a:srgbClr val="000000"/>
-              </a:solidFill>
-              <a:effectLst/>
-              <a:uFillTx/>
-              <a:latin typeface="Arial"/>
-            </a:endParaRPr>
-          </a:p>
-          <a:p>
-            <a:pPr marL="285840" indent="-285840" defTabSz="914400">
-              <a:lnSpc>
-                <a:spcPct val="150000"/>
-              </a:lnSpc>
-              <a:spcBef>
-                <a:spcPts val="1191"/>
-              </a:spcBef>
-              <a:spcAft>
-                <a:spcPts val="992"/>
-              </a:spcAft>
-              <a:buClr>
-                <a:srgbClr val="575756"/>
-              </a:buClr>
-              <a:buFont typeface="Wingdings" charset="2"/>
-              <a:buChar char=""/>
-              <a:tabLst>
-                <a:tab pos="0" algn="l"/>
-              </a:tabLst>
-            </a:pPr>
-            <a:r>
-              <a:rPr lang="en-US" sz="1300" b="0" u="none" strike="noStrike">
-                <a:solidFill>
-                  <a:srgbClr val="1C1C1C"/>
-                </a:solidFill>
-                <a:effectLst/>
-                <a:uFillTx/>
-                <a:latin typeface="SRH Text"/>
-                <a:ea typeface="SRH Text"/>
-              </a:rPr>
-              <a:t>AUC </a:t>
-            </a:r>
-            <a:endParaRPr lang="en-US" sz="1300" b="0" u="none" strike="noStrike">
-              <a:solidFill>
-                <a:srgbClr val="000000"/>
-              </a:solidFill>
-              <a:effectLst/>
-              <a:uFillTx/>
-              <a:latin typeface="Arial"/>
-            </a:endParaRPr>
-          </a:p>
-          <a:p>
-            <a:pPr marL="285840" indent="-285840" defTabSz="914400">
-              <a:lnSpc>
-                <a:spcPct val="150000"/>
-              </a:lnSpc>
-              <a:spcBef>
-                <a:spcPts val="1191"/>
-              </a:spcBef>
-              <a:spcAft>
-                <a:spcPts val="992"/>
-              </a:spcAft>
-              <a:buClr>
-                <a:srgbClr val="575756"/>
-              </a:buClr>
-              <a:buFont typeface="Wingdings" charset="2"/>
-              <a:buChar char=""/>
-              <a:tabLst>
-                <a:tab pos="0" algn="l"/>
-              </a:tabLst>
-            </a:pPr>
-            <a:r>
-              <a:rPr lang="en-US" sz="1300" b="0" u="none" strike="noStrike">
-                <a:solidFill>
-                  <a:srgbClr val="1C1C1C"/>
-                </a:solidFill>
-                <a:effectLst/>
-                <a:uFillTx/>
-                <a:latin typeface="SRH Text"/>
-                <a:ea typeface="SRH Text"/>
-              </a:rPr>
-              <a:t>False Negatives (FN) </a:t>
-            </a:r>
-            <a:endParaRPr lang="en-US" sz="1300" b="0" u="none" strike="noStrike">
-              <a:solidFill>
-                <a:srgbClr val="000000"/>
-              </a:solidFill>
-              <a:effectLst/>
-              <a:uFillTx/>
-              <a:latin typeface="Arial"/>
-            </a:endParaRPr>
-          </a:p>
-          <a:p>
-            <a:pPr marL="285840" indent="-285840" defTabSz="914400">
-              <a:lnSpc>
-                <a:spcPct val="150000"/>
-              </a:lnSpc>
-              <a:spcBef>
-                <a:spcPts val="1191"/>
-              </a:spcBef>
-              <a:spcAft>
-                <a:spcPts val="992"/>
-              </a:spcAft>
-              <a:buClr>
-                <a:srgbClr val="575756"/>
-              </a:buClr>
-              <a:buFont typeface="Wingdings" charset="2"/>
-              <a:buChar char=""/>
-              <a:tabLst>
-                <a:tab pos="0" algn="l"/>
-              </a:tabLst>
-            </a:pPr>
-            <a:r>
-              <a:rPr lang="en-US" sz="1300" b="0" u="none" strike="noStrike">
-                <a:solidFill>
-                  <a:srgbClr val="1C1C1C"/>
-                </a:solidFill>
-                <a:effectLst/>
-                <a:uFillTx/>
-                <a:latin typeface="SRH Text"/>
-                <a:ea typeface="SRH Text"/>
-              </a:rPr>
-              <a:t>False Positives (FP) </a:t>
-            </a:r>
-            <a:endParaRPr lang="en-US" sz="1300" b="0" u="none" strike="noStrike">
-              <a:solidFill>
-                <a:srgbClr val="000000"/>
-              </a:solidFill>
-              <a:effectLst/>
-              <a:uFillTx/>
-              <a:latin typeface="Arial"/>
-            </a:endParaRPr>
-          </a:p>
-          <a:p>
-            <a:pPr marL="285840" indent="-285840" defTabSz="914400">
-              <a:lnSpc>
-                <a:spcPct val="150000"/>
-              </a:lnSpc>
-              <a:spcBef>
-                <a:spcPts val="1191"/>
-              </a:spcBef>
-              <a:spcAft>
-                <a:spcPts val="992"/>
-              </a:spcAft>
-              <a:buClr>
-                <a:srgbClr val="575756"/>
-              </a:buClr>
-              <a:buFont typeface="Wingdings" charset="2"/>
-              <a:buChar char=""/>
-              <a:tabLst>
-                <a:tab pos="0" algn="l"/>
-              </a:tabLst>
-            </a:pPr>
-            <a:r>
-              <a:rPr lang="en-US" sz="1300" b="0" u="none" strike="noStrike">
-                <a:solidFill>
-                  <a:srgbClr val="1C1C1C"/>
-                </a:solidFill>
-                <a:effectLst/>
-                <a:uFillTx/>
-                <a:latin typeface="SRH Text"/>
-                <a:ea typeface="SRH Text"/>
-              </a:rPr>
-              <a:t>Error balance:FP/FN Ratio </a:t>
-            </a:r>
-            <a:endParaRPr lang="en-US" sz="1300" b="0" u="none" strike="noStrike">
-              <a:solidFill>
-                <a:srgbClr val="000000"/>
-              </a:solidFill>
-              <a:effectLst/>
-              <a:uFillTx/>
-              <a:latin typeface="Arial"/>
-            </a:endParaRPr>
-          </a:p>
-          <a:p>
-            <a:pPr marL="285840" indent="-285840" defTabSz="914400">
-              <a:lnSpc>
-                <a:spcPct val="150000"/>
-              </a:lnSpc>
-              <a:spcBef>
-                <a:spcPts val="1191"/>
-              </a:spcBef>
-              <a:spcAft>
-                <a:spcPts val="992"/>
-              </a:spcAft>
-              <a:buClr>
-                <a:srgbClr val="575756"/>
-              </a:buClr>
-              <a:buFont typeface="Wingdings" charset="2"/>
-              <a:buChar char=""/>
-              <a:tabLst>
-                <a:tab pos="0" algn="l"/>
-              </a:tabLst>
-            </a:pPr>
-            <a:r>
-              <a:rPr lang="en-US" sz="1300" b="0" u="none" strike="noStrike">
-                <a:solidFill>
-                  <a:srgbClr val="1C1C1C"/>
-                </a:solidFill>
-                <a:effectLst/>
-                <a:uFillTx/>
-                <a:latin typeface="SRH Text"/>
-                <a:ea typeface="SRH Text"/>
-              </a:rPr>
-              <a:t>Minimum Business Cost</a:t>
-            </a:r>
-            <a:endParaRPr lang="en-US" sz="1300" b="0" u="none" strike="noStrike">
-              <a:solidFill>
-                <a:srgbClr val="000000"/>
-              </a:solidFill>
-              <a:effectLst/>
-              <a:uFillTx/>
-              <a:latin typeface="Arial"/>
             </a:endParaRPr>
           </a:p>
         </p:txBody>
@@ -36790,7 +36394,7 @@
       </p:grpSpPr>
       <p:sp>
         <p:nvSpPr>
-          <p:cNvPr id="303" name="PlaceHolder 1"/>
+          <p:cNvPr id="301" name="PlaceHolder 1"/>
           <p:cNvSpPr>
             <a:spLocks noGrp="1"/>
           </p:cNvSpPr>
@@ -36833,20 +36437,20 @@
           </a:p>
         </p:txBody>
       </p:sp>
-      <p:pic>
-        <p:nvPicPr>
-          <p:cNvPr id="304" name=""/>
-          <p:cNvPicPr/>
-          <p:nvPr/>
-        </p:nvPicPr>
-        <p:blipFill>
-          <a:blip r:embed="rId1"/>
-          <a:stretch/>
-        </p:blipFill>
+      <p:sp>
+        <p:nvSpPr>
+          <p:cNvPr id="302" name="PlaceHolder 2"/>
+          <p:cNvSpPr>
+            <a:spLocks noGrp="1"/>
+          </p:cNvSpPr>
+          <p:nvPr>
+            <p:ph/>
+          </p:nvPr>
+        </p:nvSpPr>
         <p:spPr>
           <a:xfrm>
-            <a:off x="1618200" y="696240"/>
-            <a:ext cx="7524720" cy="5504760"/>
+            <a:off x="228600" y="696600"/>
+            <a:ext cx="4570920" cy="5474880"/>
           </a:xfrm>
           <a:prstGeom prst="rect">
             <a:avLst/>
@@ -36856,10 +36460,368 @@
             <a:noFill/>
           </a:ln>
         </p:spPr>
-      </p:pic>
+        <p:txBody>
+          <a:bodyPr numCol="1" spcCol="216000" lIns="0" tIns="0" rIns="0" bIns="0" anchor="t">
+            <a:noAutofit/>
+          </a:bodyPr>
+          <a:p>
+            <a:pPr marL="285840" indent="-285840" algn="l" defTabSz="914400">
+              <a:lnSpc>
+                <a:spcPct val="150000"/>
+              </a:lnSpc>
+              <a:spcBef>
+                <a:spcPts val="1191"/>
+              </a:spcBef>
+              <a:spcAft>
+                <a:spcPts val="992"/>
+              </a:spcAft>
+              <a:buClr>
+                <a:srgbClr val="575756"/>
+              </a:buClr>
+              <a:buFont typeface="Wingdings" charset="2"/>
+              <a:buChar char=""/>
+              <a:tabLst>
+                <a:tab pos="0" algn="l"/>
+              </a:tabLst>
+            </a:pPr>
+            <a:r>
+              <a:rPr lang="en-US" sz="1500" b="1" u="none" strike="noStrike">
+                <a:solidFill>
+                  <a:srgbClr val="FF4000"/>
+                </a:solidFill>
+                <a:effectLst/>
+                <a:uFillTx/>
+                <a:latin typeface="SRH Text"/>
+                <a:ea typeface="SRH Text"/>
+              </a:rPr>
+              <a:t>Find optimal threshold:</a:t>
+            </a:r>
+            <a:endParaRPr lang="de-DE" sz="1500" b="0" u="none" strike="noStrike">
+              <a:solidFill>
+                <a:schemeClr val="dk1"/>
+              </a:solidFill>
+              <a:effectLst/>
+              <a:uFillTx/>
+              <a:latin typeface="SRH Text"/>
+            </a:endParaRPr>
+          </a:p>
+          <a:p>
+            <a:pPr marL="285840" indent="-285840" algn="l" defTabSz="914400">
+              <a:lnSpc>
+                <a:spcPct val="150000"/>
+              </a:lnSpc>
+              <a:spcBef>
+                <a:spcPts val="1191"/>
+              </a:spcBef>
+              <a:spcAft>
+                <a:spcPts val="992"/>
+              </a:spcAft>
+              <a:buClr>
+                <a:srgbClr val="575756"/>
+              </a:buClr>
+              <a:buFont typeface="Wingdings" charset="2"/>
+              <a:buChar char=""/>
+              <a:tabLst>
+                <a:tab pos="0" algn="l"/>
+              </a:tabLst>
+            </a:pPr>
+            <a:r>
+              <a:rPr lang="en-US" sz="1300" b="0" u="none" strike="noStrike">
+                <a:solidFill>
+                  <a:srgbClr val="000000"/>
+                </a:solidFill>
+                <a:effectLst/>
+                <a:uFillTx/>
+                <a:latin typeface="SRH Text"/>
+                <a:ea typeface="SRH Text"/>
+              </a:rPr>
+              <a:t>Standard approach → Fixed threshold = 0.50 </a:t>
+            </a:r>
+            <a:endParaRPr lang="de-DE" sz="1300" b="0" u="none" strike="noStrike">
+              <a:solidFill>
+                <a:schemeClr val="dk1"/>
+              </a:solidFill>
+              <a:effectLst/>
+              <a:uFillTx/>
+              <a:latin typeface="SRH Text"/>
+            </a:endParaRPr>
+          </a:p>
+          <a:p>
+            <a:pPr marL="285840" indent="-285840" algn="l" defTabSz="914400">
+              <a:lnSpc>
+                <a:spcPct val="150000"/>
+              </a:lnSpc>
+              <a:spcBef>
+                <a:spcPts val="1191"/>
+              </a:spcBef>
+              <a:spcAft>
+                <a:spcPts val="992"/>
+              </a:spcAft>
+              <a:buClr>
+                <a:srgbClr val="575756"/>
+              </a:buClr>
+              <a:buFont typeface="Wingdings" charset="2"/>
+              <a:buChar char=""/>
+              <a:tabLst>
+                <a:tab pos="0" algn="l"/>
+              </a:tabLst>
+            </a:pPr>
+            <a:r>
+              <a:rPr lang="en-US" sz="1300" b="0" u="none" strike="noStrike">
+                <a:solidFill>
+                  <a:srgbClr val="000000"/>
+                </a:solidFill>
+                <a:effectLst/>
+                <a:uFillTx/>
+                <a:latin typeface="SRH Text"/>
+                <a:ea typeface="SRH Text"/>
+              </a:rPr>
+              <a:t>Proposed approach → Optimize the decision threshold </a:t>
+            </a:r>
+            <a:endParaRPr lang="de-DE" sz="1300" b="0" u="none" strike="noStrike">
+              <a:solidFill>
+                <a:schemeClr val="dk1"/>
+              </a:solidFill>
+              <a:effectLst/>
+              <a:uFillTx/>
+              <a:latin typeface="SRH Text"/>
+            </a:endParaRPr>
+          </a:p>
+          <a:p>
+            <a:pPr marL="285840" indent="-285840" algn="l" defTabSz="914400">
+              <a:lnSpc>
+                <a:spcPct val="150000"/>
+              </a:lnSpc>
+              <a:spcBef>
+                <a:spcPts val="1191"/>
+              </a:spcBef>
+              <a:spcAft>
+                <a:spcPts val="992"/>
+              </a:spcAft>
+              <a:buClr>
+                <a:srgbClr val="575756"/>
+              </a:buClr>
+              <a:buFont typeface="Wingdings" charset="2"/>
+              <a:buChar char=""/>
+              <a:tabLst>
+                <a:tab pos="0" algn="l"/>
+              </a:tabLst>
+            </a:pPr>
+            <a:r>
+              <a:rPr lang="en-US" sz="1300" b="1" u="none" strike="noStrike">
+                <a:solidFill>
+                  <a:srgbClr val="000000"/>
+                </a:solidFill>
+                <a:effectLst/>
+                <a:uFillTx/>
+                <a:latin typeface="SRH Text"/>
+                <a:ea typeface="SRH Text"/>
+              </a:rPr>
+              <a:t>Tested thresholds: (0.15, 0.6, 0.01)</a:t>
+            </a:r>
+            <a:endParaRPr lang="de-DE" sz="1300" b="0" u="none" strike="noStrike">
+              <a:solidFill>
+                <a:schemeClr val="dk1"/>
+              </a:solidFill>
+              <a:effectLst/>
+              <a:uFillTx/>
+              <a:latin typeface="SRH Text"/>
+            </a:endParaRPr>
+          </a:p>
+          <a:p>
+            <a:pPr marL="285840" indent="-285840" algn="l" defTabSz="914400">
+              <a:lnSpc>
+                <a:spcPct val="150000"/>
+              </a:lnSpc>
+              <a:spcBef>
+                <a:spcPts val="1191"/>
+              </a:spcBef>
+              <a:spcAft>
+                <a:spcPts val="992"/>
+              </a:spcAft>
+              <a:buClr>
+                <a:srgbClr val="575756"/>
+              </a:buClr>
+              <a:buFont typeface="Wingdings" charset="2"/>
+              <a:buChar char=""/>
+              <a:tabLst>
+                <a:tab pos="0" algn="l"/>
+              </a:tabLst>
+            </a:pPr>
+            <a:r>
+              <a:rPr lang="en-US" sz="1300" b="0" u="none" strike="noStrike">
+                <a:solidFill>
+                  <a:srgbClr val="000000"/>
+                </a:solidFill>
+                <a:effectLst/>
+                <a:uFillTx/>
+                <a:latin typeface="SRH Text"/>
+                <a:ea typeface="SRH Text"/>
+              </a:rPr>
+              <a:t>Business cost function: prioritize low FN, penalize FP </a:t>
+            </a:r>
+            <a:endParaRPr lang="de-DE" sz="1300" b="0" u="none" strike="noStrike">
+              <a:solidFill>
+                <a:schemeClr val="dk1"/>
+              </a:solidFill>
+              <a:effectLst/>
+              <a:uFillTx/>
+              <a:latin typeface="SRH Text"/>
+            </a:endParaRPr>
+          </a:p>
+          <a:p>
+            <a:pPr marL="285840" indent="-285840" algn="l" defTabSz="914400">
+              <a:lnSpc>
+                <a:spcPct val="150000"/>
+              </a:lnSpc>
+              <a:spcBef>
+                <a:spcPts val="1191"/>
+              </a:spcBef>
+              <a:spcAft>
+                <a:spcPts val="992"/>
+              </a:spcAft>
+              <a:buClr>
+                <a:srgbClr val="575756"/>
+              </a:buClr>
+              <a:buFont typeface="Wingdings" charset="2"/>
+              <a:buChar char=""/>
+              <a:tabLst>
+                <a:tab pos="0" algn="l"/>
+              </a:tabLst>
+            </a:pPr>
+            <a:r>
+              <a:rPr lang="en-US" sz="1300" b="1" u="none" strike="noStrike">
+                <a:solidFill>
+                  <a:srgbClr val="000000"/>
+                </a:solidFill>
+                <a:effectLst/>
+                <a:uFillTx/>
+                <a:latin typeface="SRH Text"/>
+                <a:ea typeface="SRH Text"/>
+              </a:rPr>
+              <a:t>Cost = 2.5 × FN + FP</a:t>
+            </a:r>
+            <a:endParaRPr lang="de-DE" sz="1300" b="0" u="none" strike="noStrike">
+              <a:solidFill>
+                <a:schemeClr val="dk1"/>
+              </a:solidFill>
+              <a:effectLst/>
+              <a:uFillTx/>
+              <a:latin typeface="SRH Text"/>
+            </a:endParaRPr>
+          </a:p>
+          <a:p>
+            <a:pPr marL="285840" indent="-285840" algn="l" defTabSz="914400">
+              <a:lnSpc>
+                <a:spcPct val="150000"/>
+              </a:lnSpc>
+              <a:spcBef>
+                <a:spcPts val="1191"/>
+              </a:spcBef>
+              <a:spcAft>
+                <a:spcPts val="992"/>
+              </a:spcAft>
+              <a:buClr>
+                <a:srgbClr val="575756"/>
+              </a:buClr>
+              <a:buFont typeface="Wingdings" charset="2"/>
+              <a:buChar char=""/>
+              <a:tabLst>
+                <a:tab pos="0" algn="l"/>
+              </a:tabLst>
+            </a:pPr>
+            <a:r>
+              <a:rPr lang="en-US" sz="1300" b="1" u="none" strike="noStrike">
+                <a:solidFill>
+                  <a:srgbClr val="000000"/>
+                </a:solidFill>
+                <a:effectLst/>
+                <a:uFillTx/>
+                <a:latin typeface="SRH Text"/>
+                <a:ea typeface="SRH Text"/>
+              </a:rPr>
+              <a:t>p(default)&lt; 0.50-→ Approved</a:t>
+            </a:r>
+            <a:endParaRPr lang="de-DE" sz="1300" b="0" u="none" strike="noStrike">
+              <a:solidFill>
+                <a:schemeClr val="dk1"/>
+              </a:solidFill>
+              <a:effectLst/>
+              <a:uFillTx/>
+              <a:latin typeface="SRH Text"/>
+            </a:endParaRPr>
+          </a:p>
+          <a:p>
+            <a:pPr marL="285840" indent="-285840" algn="l" defTabSz="914400">
+              <a:lnSpc>
+                <a:spcPct val="150000"/>
+              </a:lnSpc>
+              <a:spcBef>
+                <a:spcPts val="1191"/>
+              </a:spcBef>
+              <a:spcAft>
+                <a:spcPts val="992"/>
+              </a:spcAft>
+              <a:buClr>
+                <a:srgbClr val="575756"/>
+              </a:buClr>
+              <a:buFont typeface="Wingdings" charset="2"/>
+              <a:buChar char=""/>
+              <a:tabLst>
+                <a:tab pos="0" algn="l"/>
+              </a:tabLst>
+            </a:pPr>
+            <a:r>
+              <a:rPr lang="en-US" sz="1300" b="1" u="none" strike="noStrike">
+                <a:solidFill>
+                  <a:srgbClr val="000000"/>
+                </a:solidFill>
+                <a:effectLst/>
+                <a:uFillTx/>
+                <a:latin typeface="SRH Text"/>
+                <a:ea typeface="SRH Text"/>
+              </a:rPr>
+              <a:t>p(default)&gt; 0.50-→ Rejected</a:t>
+            </a:r>
+            <a:endParaRPr lang="de-DE" sz="1300" b="0" u="none" strike="noStrike">
+              <a:solidFill>
+                <a:schemeClr val="dk1"/>
+              </a:solidFill>
+              <a:effectLst/>
+              <a:uFillTx/>
+              <a:latin typeface="SRH Text"/>
+            </a:endParaRPr>
+          </a:p>
+          <a:p>
+            <a:pPr marL="285840" indent="0" algn="l" defTabSz="914400">
+              <a:lnSpc>
+                <a:spcPct val="150000"/>
+              </a:lnSpc>
+              <a:spcBef>
+                <a:spcPts val="1191"/>
+              </a:spcBef>
+              <a:spcAft>
+                <a:spcPts val="992"/>
+              </a:spcAft>
+              <a:buNone/>
+              <a:tabLst>
+                <a:tab pos="0" algn="l"/>
+              </a:tabLst>
+            </a:pPr>
+            <a:endParaRPr lang="de-DE" sz="1100" b="0" u="none" strike="noStrike">
+              <a:solidFill>
+                <a:schemeClr val="dk1"/>
+              </a:solidFill>
+              <a:effectLst/>
+              <a:uFillTx/>
+              <a:latin typeface="SRH Text"/>
+            </a:endParaRPr>
+          </a:p>
+        </p:txBody>
+      </p:sp>
       <p:sp>
         <p:nvSpPr>
-          <p:cNvPr id="305" name="PlaceHolder 2"/>
+          <p:cNvPr id="303" name="PlaceHolder 3"/>
           <p:cNvSpPr>
             <a:spLocks noGrp="1"/>
           </p:cNvSpPr>
@@ -36914,7 +36876,7 @@
                 <a:tab pos="0" algn="l"/>
               </a:tabLst>
             </a:pPr>
-            <a:fld id="{022ED447-1AAE-4DED-BB63-8531F024B14A}" type="datetime1">
+            <a:fld id="{B076F6F6-8B31-49D5-9450-39C2271C2449}" type="datetime1">
               <a:rPr lang="en-CA" sz="900" b="1" u="none" strike="noStrike">
                 <a:solidFill>
                   <a:srgbClr val="6D7373"/>
@@ -36924,7 +36886,7 @@
                 <a:latin typeface="SRH Text"/>
                 <a:ea typeface="SRH"/>
               </a:rPr>
-              <a:t>2026-09-11</a:t>
+              <a:t>2026-09-12</a:t>
             </a:fld>
             <a:endParaRPr lang="en-US" sz="900" b="0" u="none" strike="noStrike">
               <a:solidFill>
@@ -36939,7 +36901,7 @@
       </p:sp>
       <p:sp>
         <p:nvSpPr>
-          <p:cNvPr id="306" name="PlaceHolder 3"/>
+          <p:cNvPr id="304" name="PlaceHolder 4"/>
           <p:cNvSpPr>
             <a:spLocks noGrp="1"/>
           </p:cNvSpPr>
@@ -37019,7 +36981,7 @@
       </p:sp>
       <p:sp>
         <p:nvSpPr>
-          <p:cNvPr id="307" name="PlaceHolder 4"/>
+          <p:cNvPr id="305" name="PlaceHolder 5"/>
           <p:cNvSpPr>
             <a:spLocks noGrp="1"/>
           </p:cNvSpPr>
@@ -37074,7 +37036,7 @@
                 <a:tab pos="0" algn="l"/>
               </a:tabLst>
             </a:pPr>
-            <a:fld id="{EDF9D364-5249-4F04-B0F2-7C330F8F9E62}" type="slidenum">
+            <a:fld id="{F671AF7C-68CE-4BF7-A018-FE6CA4AF8CB7}" type="slidenum">
               <a:rPr lang="de-DE" sz="1550" b="1" u="none" strike="noStrike">
                 <a:solidFill>
                   <a:srgbClr val="6D7373"/>
@@ -37084,7 +37046,7 @@
                 <a:latin typeface="SRH Text"/>
                 <a:ea typeface="SRH"/>
               </a:rPr>
-              <a:t>13</a:t>
+              <a:t>&lt;number&gt;</a:t>
             </a:fld>
             <a:endParaRPr lang="en-US" sz="1550" b="0" u="none" strike="noStrike">
               <a:solidFill>
@@ -37093,6 +37055,307 @@
               <a:effectLst/>
               <a:uFillTx/>
               <a:latin typeface="Times New Roman"/>
+            </a:endParaRPr>
+          </a:p>
+        </p:txBody>
+      </p:sp>
+      <p:pic>
+        <p:nvPicPr>
+          <p:cNvPr id="306" name=""/>
+          <p:cNvPicPr/>
+          <p:nvPr/>
+        </p:nvPicPr>
+        <p:blipFill>
+          <a:blip r:embed="rId1"/>
+          <a:stretch/>
+        </p:blipFill>
+        <p:spPr>
+          <a:xfrm>
+            <a:off x="8458200" y="1334160"/>
+            <a:ext cx="3016080" cy="3465720"/>
+          </a:xfrm>
+          <a:prstGeom prst="rect">
+            <a:avLst/>
+          </a:prstGeom>
+          <a:noFill/>
+          <a:ln w="0">
+            <a:noFill/>
+          </a:ln>
+        </p:spPr>
+      </p:pic>
+      <p:sp>
+        <p:nvSpPr>
+          <p:cNvPr id="307" name="PlaceHolder 6"/>
+          <p:cNvSpPr/>
+          <p:nvPr/>
+        </p:nvSpPr>
+        <p:spPr>
+          <a:xfrm>
+            <a:off x="4764960" y="624960"/>
+            <a:ext cx="3463920" cy="4860720"/>
+          </a:xfrm>
+          <a:prstGeom prst="rect">
+            <a:avLst/>
+          </a:prstGeom>
+          <a:noFill/>
+          <a:ln w="0">
+            <a:noFill/>
+          </a:ln>
+        </p:spPr>
+        <p:style>
+          <a:lnRef idx="0"/>
+          <a:fillRef idx="0"/>
+          <a:effectRef idx="0"/>
+          <a:fontRef idx="minor"/>
+        </p:style>
+        <p:txBody>
+          <a:bodyPr numCol="1" spcCol="216000" lIns="0" tIns="0" rIns="0" bIns="0" anchor="t">
+            <a:noAutofit/>
+          </a:bodyPr>
+          <a:p>
+            <a:pPr marL="285840" indent="-285840" defTabSz="914400">
+              <a:lnSpc>
+                <a:spcPct val="150000"/>
+              </a:lnSpc>
+              <a:spcBef>
+                <a:spcPts val="1191"/>
+              </a:spcBef>
+              <a:spcAft>
+                <a:spcPts val="992"/>
+              </a:spcAft>
+              <a:buClr>
+                <a:srgbClr val="575756"/>
+              </a:buClr>
+              <a:buFont typeface="Wingdings" charset="2"/>
+              <a:buChar char=""/>
+              <a:tabLst>
+                <a:tab pos="0" algn="l"/>
+              </a:tabLst>
+            </a:pPr>
+            <a:r>
+              <a:rPr lang="en-US" sz="1300" b="0" u="none" strike="noStrike">
+                <a:solidFill>
+                  <a:srgbClr val="1C1C1C"/>
+                </a:solidFill>
+                <a:effectLst/>
+                <a:uFillTx/>
+                <a:latin typeface="SRH Text"/>
+                <a:ea typeface="SRH Text"/>
+              </a:rPr>
+              <a:t>Each model was evaluated using: </a:t>
+            </a:r>
+            <a:endParaRPr lang="en-US" sz="1300" b="0" u="none" strike="noStrike">
+              <a:solidFill>
+                <a:srgbClr val="000000"/>
+              </a:solidFill>
+              <a:effectLst/>
+              <a:uFillTx/>
+              <a:latin typeface="Arial"/>
+            </a:endParaRPr>
+          </a:p>
+          <a:p>
+            <a:pPr marL="285840" indent="-285840" defTabSz="914400">
+              <a:lnSpc>
+                <a:spcPct val="150000"/>
+              </a:lnSpc>
+              <a:spcBef>
+                <a:spcPts val="1191"/>
+              </a:spcBef>
+              <a:spcAft>
+                <a:spcPts val="992"/>
+              </a:spcAft>
+              <a:buClr>
+                <a:srgbClr val="575756"/>
+              </a:buClr>
+              <a:buFont typeface="Wingdings" charset="2"/>
+              <a:buChar char=""/>
+              <a:tabLst>
+                <a:tab pos="0" algn="l"/>
+              </a:tabLst>
+            </a:pPr>
+            <a:r>
+              <a:rPr lang="en-US" sz="1300" b="0" u="none" strike="noStrike">
+                <a:solidFill>
+                  <a:srgbClr val="1C1C1C"/>
+                </a:solidFill>
+                <a:effectLst/>
+                <a:uFillTx/>
+                <a:latin typeface="SRH Text"/>
+                <a:ea typeface="SRH Text"/>
+              </a:rPr>
+              <a:t>AUC </a:t>
+            </a:r>
+            <a:endParaRPr lang="en-US" sz="1300" b="0" u="none" strike="noStrike">
+              <a:solidFill>
+                <a:srgbClr val="000000"/>
+              </a:solidFill>
+              <a:effectLst/>
+              <a:uFillTx/>
+              <a:latin typeface="Arial"/>
+            </a:endParaRPr>
+          </a:p>
+          <a:p>
+            <a:pPr marL="285840" indent="-285840" defTabSz="914400">
+              <a:lnSpc>
+                <a:spcPct val="150000"/>
+              </a:lnSpc>
+              <a:spcBef>
+                <a:spcPts val="1191"/>
+              </a:spcBef>
+              <a:spcAft>
+                <a:spcPts val="992"/>
+              </a:spcAft>
+              <a:buClr>
+                <a:srgbClr val="575756"/>
+              </a:buClr>
+              <a:buFont typeface="Wingdings" charset="2"/>
+              <a:buChar char=""/>
+              <a:tabLst>
+                <a:tab pos="0" algn="l"/>
+              </a:tabLst>
+            </a:pPr>
+            <a:r>
+              <a:rPr lang="en-US" sz="1300" b="0" u="none" strike="noStrike">
+                <a:solidFill>
+                  <a:srgbClr val="1C1C1C"/>
+                </a:solidFill>
+                <a:effectLst/>
+                <a:uFillTx/>
+                <a:latin typeface="SRH Text"/>
+                <a:ea typeface="SRH Text"/>
+              </a:rPr>
+              <a:t>False Negatives (FN) </a:t>
+            </a:r>
+            <a:endParaRPr lang="en-US" sz="1300" b="0" u="none" strike="noStrike">
+              <a:solidFill>
+                <a:srgbClr val="000000"/>
+              </a:solidFill>
+              <a:effectLst/>
+              <a:uFillTx/>
+              <a:latin typeface="Arial"/>
+            </a:endParaRPr>
+          </a:p>
+          <a:p>
+            <a:pPr marL="285840" indent="-285840" defTabSz="914400">
+              <a:lnSpc>
+                <a:spcPct val="150000"/>
+              </a:lnSpc>
+              <a:spcBef>
+                <a:spcPts val="1191"/>
+              </a:spcBef>
+              <a:spcAft>
+                <a:spcPts val="992"/>
+              </a:spcAft>
+              <a:buClr>
+                <a:srgbClr val="575756"/>
+              </a:buClr>
+              <a:buFont typeface="Wingdings" charset="2"/>
+              <a:buChar char=""/>
+              <a:tabLst>
+                <a:tab pos="0" algn="l"/>
+              </a:tabLst>
+            </a:pPr>
+            <a:r>
+              <a:rPr lang="en-US" sz="1300" b="0" u="none" strike="noStrike">
+                <a:solidFill>
+                  <a:srgbClr val="1C1C1C"/>
+                </a:solidFill>
+                <a:effectLst/>
+                <a:uFillTx/>
+                <a:latin typeface="SRH Text"/>
+                <a:ea typeface="SRH Text"/>
+              </a:rPr>
+              <a:t>False Positives (FP) </a:t>
+            </a:r>
+            <a:endParaRPr lang="en-US" sz="1300" b="0" u="none" strike="noStrike">
+              <a:solidFill>
+                <a:srgbClr val="000000"/>
+              </a:solidFill>
+              <a:effectLst/>
+              <a:uFillTx/>
+              <a:latin typeface="Arial"/>
+            </a:endParaRPr>
+          </a:p>
+          <a:p>
+            <a:pPr marL="285840" indent="-285840" defTabSz="914400">
+              <a:lnSpc>
+                <a:spcPct val="150000"/>
+              </a:lnSpc>
+              <a:spcBef>
+                <a:spcPts val="1191"/>
+              </a:spcBef>
+              <a:spcAft>
+                <a:spcPts val="992"/>
+              </a:spcAft>
+              <a:buClr>
+                <a:srgbClr val="575756"/>
+              </a:buClr>
+              <a:buFont typeface="Wingdings" charset="2"/>
+              <a:buChar char=""/>
+              <a:tabLst>
+                <a:tab pos="0" algn="l"/>
+              </a:tabLst>
+            </a:pPr>
+            <a:r>
+              <a:rPr lang="en-US" sz="1300" b="0" u="none" strike="noStrike">
+                <a:solidFill>
+                  <a:srgbClr val="1C1C1C"/>
+                </a:solidFill>
+                <a:effectLst/>
+                <a:uFillTx/>
+                <a:latin typeface="SRH Text"/>
+                <a:ea typeface="SRH Text"/>
+              </a:rPr>
+              <a:t>Error balance:FP/FN Ratio </a:t>
+            </a:r>
+            <a:endParaRPr lang="en-US" sz="1300" b="0" u="none" strike="noStrike">
+              <a:solidFill>
+                <a:srgbClr val="000000"/>
+              </a:solidFill>
+              <a:effectLst/>
+              <a:uFillTx/>
+              <a:latin typeface="Arial"/>
+            </a:endParaRPr>
+          </a:p>
+          <a:p>
+            <a:pPr marL="285840" indent="-285840" defTabSz="914400">
+              <a:lnSpc>
+                <a:spcPct val="150000"/>
+              </a:lnSpc>
+              <a:spcBef>
+                <a:spcPts val="1191"/>
+              </a:spcBef>
+              <a:spcAft>
+                <a:spcPts val="992"/>
+              </a:spcAft>
+              <a:buClr>
+                <a:srgbClr val="575756"/>
+              </a:buClr>
+              <a:buFont typeface="Wingdings" charset="2"/>
+              <a:buChar char=""/>
+              <a:tabLst>
+                <a:tab pos="0" algn="l"/>
+              </a:tabLst>
+            </a:pPr>
+            <a:r>
+              <a:rPr lang="en-US" sz="1300" b="0" u="none" strike="noStrike">
+                <a:solidFill>
+                  <a:srgbClr val="1C1C1C"/>
+                </a:solidFill>
+                <a:effectLst/>
+                <a:uFillTx/>
+                <a:latin typeface="SRH Text"/>
+                <a:ea typeface="SRH Text"/>
+              </a:rPr>
+              <a:t>Minimum Business Cost</a:t>
+            </a:r>
+            <a:endParaRPr lang="en-US" sz="1300" b="0" u="none" strike="noStrike">
+              <a:solidFill>
+                <a:srgbClr val="000000"/>
+              </a:solidFill>
+              <a:effectLst/>
+              <a:uFillTx/>
+              <a:latin typeface="Arial"/>
             </a:endParaRPr>
           </a:p>
         </p:txBody>
@@ -37156,33 +37419,12 @@
           </a:bodyPr>
           <a:p>
             <a:pPr indent="0" algn="l" defTabSz="914400">
-              <a:lnSpc>
-                <a:spcPct val="100000"/>
-              </a:lnSpc>
-              <a:spcBef>
-                <a:spcPts val="1191"/>
-              </a:spcBef>
-              <a:spcAft>
-                <a:spcPts val="992"/>
-              </a:spcAft>
-              <a:buNone/>
-              <a:tabLst>
-                <a:tab pos="0" algn="l"/>
-              </a:tabLst>
-            </a:pPr>
-            <a:r>
-              <a:rPr lang="de-DE" sz="2000" b="1" u="none" strike="noStrike">
-                <a:solidFill>
-                  <a:srgbClr val="FF4000"/>
-                </a:solidFill>
-                <a:effectLst/>
-                <a:uFillTx/>
-                <a:latin typeface="SRH Headline"/>
-                <a:ea typeface="SRH Headline"/>
-              </a:rPr>
-              <a:t>Explainable AI: SHAP-Based Model Interpretation</a:t>
-            </a:r>
-            <a:endParaRPr lang="de-DE" sz="2000" b="1" u="none" strike="noStrike">
+              <a:buNone/>
+              <a:tabLst>
+                <a:tab pos="0" algn="l"/>
+              </a:tabLst>
+            </a:pPr>
+            <a:endParaRPr lang="de-DE" sz="3000" b="1" u="none" strike="noStrike">
               <a:solidFill>
                 <a:schemeClr val="dk1"/>
               </a:solidFill>
@@ -37193,20 +37435,20 @@
           </a:p>
         </p:txBody>
       </p:sp>
-      <p:sp>
-        <p:nvSpPr>
-          <p:cNvPr id="309" name="PlaceHolder 2"/>
-          <p:cNvSpPr>
-            <a:spLocks noGrp="1"/>
-          </p:cNvSpPr>
-          <p:nvPr>
-            <p:ph/>
-          </p:nvPr>
-        </p:nvSpPr>
+      <p:pic>
+        <p:nvPicPr>
+          <p:cNvPr id="309" name=""/>
+          <p:cNvPicPr/>
+          <p:nvPr/>
+        </p:nvPicPr>
+        <p:blipFill>
+          <a:blip r:embed="rId1"/>
+          <a:stretch/>
+        </p:blipFill>
         <p:spPr>
           <a:xfrm>
-            <a:off x="228600" y="912600"/>
-            <a:ext cx="5714280" cy="5186880"/>
+            <a:off x="1618200" y="696240"/>
+            <a:ext cx="7524720" cy="5504760"/>
           </a:xfrm>
           <a:prstGeom prst="rect">
             <a:avLst/>
@@ -37216,336 +37458,10 @@
             <a:noFill/>
           </a:ln>
         </p:spPr>
-        <p:txBody>
-          <a:bodyPr numCol="1" spcCol="216000" lIns="0" tIns="0" rIns="0" bIns="0" anchor="t">
-            <a:noAutofit/>
-          </a:bodyPr>
-          <a:p>
-            <a:pPr indent="0" algn="l" defTabSz="914400">
-              <a:lnSpc>
-                <a:spcPct val="110000"/>
-              </a:lnSpc>
-              <a:spcBef>
-                <a:spcPts val="1191"/>
-              </a:spcBef>
-              <a:spcAft>
-                <a:spcPts val="992"/>
-              </a:spcAft>
-              <a:buNone/>
-              <a:tabLst>
-                <a:tab pos="0" algn="l"/>
-              </a:tabLst>
-            </a:pPr>
-            <a:r>
-              <a:rPr lang="de-DE" sz="1300" b="1" u="none" strike="noStrike">
-                <a:solidFill>
-                  <a:schemeClr val="dk1"/>
-                </a:solidFill>
-                <a:effectLst/>
-                <a:uFillTx/>
-                <a:latin typeface="SRH Text"/>
-                <a:ea typeface="SRH Text"/>
-              </a:rPr>
-              <a:t>Objective:</a:t>
-            </a:r>
-            <a:endParaRPr lang="de-DE" sz="1300" b="0" u="none" strike="noStrike">
-              <a:solidFill>
-                <a:schemeClr val="dk1"/>
-              </a:solidFill>
-              <a:effectLst/>
-              <a:uFillTx/>
-              <a:latin typeface="SRH Text"/>
-            </a:endParaRPr>
-          </a:p>
-          <a:p>
-            <a:pPr indent="0" algn="l" defTabSz="914400">
-              <a:lnSpc>
-                <a:spcPct val="110000"/>
-              </a:lnSpc>
-              <a:spcBef>
-                <a:spcPts val="1191"/>
-              </a:spcBef>
-              <a:spcAft>
-                <a:spcPts val="992"/>
-              </a:spcAft>
-              <a:buNone/>
-              <a:tabLst>
-                <a:tab pos="0" algn="l"/>
-              </a:tabLst>
-            </a:pPr>
-            <a:r>
-              <a:rPr lang="de-DE" sz="1300" b="0" u="none" strike="noStrike">
-                <a:solidFill>
-                  <a:schemeClr val="dk1"/>
-                </a:solidFill>
-                <a:effectLst/>
-                <a:uFillTx/>
-                <a:latin typeface="SRH Text"/>
-                <a:ea typeface="SRH Text"/>
-              </a:rPr>
-              <a:t>Interpret how the XGBoost model makes credit-risk predictions and identify the features that drive its decisions.</a:t>
-            </a:r>
-            <a:endParaRPr lang="de-DE" sz="1300" b="0" u="none" strike="noStrike">
-              <a:solidFill>
-                <a:schemeClr val="dk1"/>
-              </a:solidFill>
-              <a:effectLst/>
-              <a:uFillTx/>
-              <a:latin typeface="SRH Text"/>
-            </a:endParaRPr>
-          </a:p>
-          <a:p>
-            <a:pPr indent="0" algn="l" defTabSz="914400">
-              <a:lnSpc>
-                <a:spcPct val="110000"/>
-              </a:lnSpc>
-              <a:spcBef>
-                <a:spcPts val="1191"/>
-              </a:spcBef>
-              <a:spcAft>
-                <a:spcPts val="992"/>
-              </a:spcAft>
-              <a:buNone/>
-              <a:tabLst>
-                <a:tab pos="0" algn="l"/>
-              </a:tabLst>
-            </a:pPr>
-            <a:r>
-              <a:rPr lang="de-DE" sz="1300" b="1" u="none" strike="noStrike">
-                <a:solidFill>
-                  <a:schemeClr val="dk1"/>
-                </a:solidFill>
-                <a:effectLst/>
-                <a:uFillTx/>
-                <a:latin typeface="SRH Text"/>
-                <a:ea typeface="SRH Text"/>
-              </a:rPr>
-              <a:t>SHAP Framework</a:t>
-            </a:r>
-            <a:endParaRPr lang="de-DE" sz="1300" b="0" u="none" strike="noStrike">
-              <a:solidFill>
-                <a:schemeClr val="dk1"/>
-              </a:solidFill>
-              <a:effectLst/>
-              <a:uFillTx/>
-              <a:latin typeface="SRH Text"/>
-            </a:endParaRPr>
-          </a:p>
-          <a:p>
-            <a:pPr indent="0" algn="l" defTabSz="914400">
-              <a:lnSpc>
-                <a:spcPct val="110000"/>
-              </a:lnSpc>
-              <a:spcBef>
-                <a:spcPts val="1191"/>
-              </a:spcBef>
-              <a:spcAft>
-                <a:spcPts val="992"/>
-              </a:spcAft>
-              <a:buNone/>
-              <a:tabLst>
-                <a:tab pos="0" algn="l"/>
-              </a:tabLst>
-            </a:pPr>
-            <a:r>
-              <a:rPr lang="de-DE" sz="1300" b="0" u="none" strike="noStrike">
-                <a:solidFill>
-                  <a:schemeClr val="dk1"/>
-                </a:solidFill>
-                <a:effectLst/>
-                <a:uFillTx/>
-                <a:latin typeface="SRH Text"/>
-                <a:ea typeface="SRH Text"/>
-              </a:rPr>
-              <a:t>TreeExplainer applied to the final XGBoost model</a:t>
-            </a:r>
-            <a:endParaRPr lang="de-DE" sz="1300" b="0" u="none" strike="noStrike">
-              <a:solidFill>
-                <a:schemeClr val="dk1"/>
-              </a:solidFill>
-              <a:effectLst/>
-              <a:uFillTx/>
-              <a:latin typeface="SRH Text"/>
-            </a:endParaRPr>
-          </a:p>
-          <a:p>
-            <a:pPr indent="0" algn="l" defTabSz="914400">
-              <a:lnSpc>
-                <a:spcPct val="110000"/>
-              </a:lnSpc>
-              <a:spcBef>
-                <a:spcPts val="1191"/>
-              </a:spcBef>
-              <a:spcAft>
-                <a:spcPts val="992"/>
-              </a:spcAft>
-              <a:buNone/>
-              <a:tabLst>
-                <a:tab pos="0" algn="l"/>
-              </a:tabLst>
-            </a:pPr>
-            <a:r>
-              <a:rPr lang="de-DE" sz="1300" b="0" u="none" strike="noStrike">
-                <a:solidFill>
-                  <a:schemeClr val="dk1"/>
-                </a:solidFill>
-                <a:effectLst/>
-                <a:uFillTx/>
-                <a:latin typeface="SRH Text"/>
-                <a:ea typeface="SRH Text"/>
-              </a:rPr>
-              <a:t>2,000 test observations analyzed</a:t>
-            </a:r>
-            <a:endParaRPr lang="de-DE" sz="1300" b="0" u="none" strike="noStrike">
-              <a:solidFill>
-                <a:schemeClr val="dk1"/>
-              </a:solidFill>
-              <a:effectLst/>
-              <a:uFillTx/>
-              <a:latin typeface="SRH Text"/>
-            </a:endParaRPr>
-          </a:p>
-          <a:p>
-            <a:pPr indent="0" algn="l" defTabSz="914400">
-              <a:lnSpc>
-                <a:spcPct val="110000"/>
-              </a:lnSpc>
-              <a:spcBef>
-                <a:spcPts val="1191"/>
-              </a:spcBef>
-              <a:spcAft>
-                <a:spcPts val="992"/>
-              </a:spcAft>
-              <a:buNone/>
-              <a:tabLst>
-                <a:tab pos="0" algn="l"/>
-              </a:tabLst>
-            </a:pPr>
-            <a:r>
-              <a:rPr lang="de-DE" sz="1300" b="0" u="none" strike="noStrike">
-                <a:solidFill>
-                  <a:schemeClr val="dk1"/>
-                </a:solidFill>
-                <a:effectLst/>
-                <a:uFillTx/>
-                <a:latin typeface="SRH Text"/>
-                <a:ea typeface="SRH Text"/>
-              </a:rPr>
-              <a:t>Global feature importance based on mean |SHAP value|</a:t>
-            </a:r>
-            <a:endParaRPr lang="de-DE" sz="1300" b="0" u="none" strike="noStrike">
-              <a:solidFill>
-                <a:schemeClr val="dk1"/>
-              </a:solidFill>
-              <a:effectLst/>
-              <a:uFillTx/>
-              <a:latin typeface="SRH Text"/>
-            </a:endParaRPr>
-          </a:p>
-          <a:p>
-            <a:pPr indent="0" algn="l" defTabSz="914400">
-              <a:lnSpc>
-                <a:spcPct val="110000"/>
-              </a:lnSpc>
-              <a:spcBef>
-                <a:spcPts val="1191"/>
-              </a:spcBef>
-              <a:spcAft>
-                <a:spcPts val="992"/>
-              </a:spcAft>
-              <a:buNone/>
-              <a:tabLst>
-                <a:tab pos="0" algn="l"/>
-              </a:tabLst>
-            </a:pPr>
-            <a:r>
-              <a:rPr lang="de-DE" sz="1300" b="0" u="none" strike="noStrike">
-                <a:solidFill>
-                  <a:schemeClr val="dk1"/>
-                </a:solidFill>
-                <a:effectLst/>
-                <a:uFillTx/>
-                <a:latin typeface="SRH Text"/>
-                <a:ea typeface="SRH Text"/>
-              </a:rPr>
-              <a:t>SHAP dependence plots used to examine feature effects</a:t>
-            </a:r>
-            <a:endParaRPr lang="de-DE" sz="1300" b="0" u="none" strike="noStrike">
-              <a:solidFill>
-                <a:schemeClr val="dk1"/>
-              </a:solidFill>
-              <a:effectLst/>
-              <a:uFillTx/>
-              <a:latin typeface="SRH Text"/>
-            </a:endParaRPr>
-          </a:p>
-          <a:p>
-            <a:pPr indent="0" algn="l" defTabSz="914400">
-              <a:lnSpc>
-                <a:spcPct val="110000"/>
-              </a:lnSpc>
-              <a:spcBef>
-                <a:spcPts val="1191"/>
-              </a:spcBef>
-              <a:spcAft>
-                <a:spcPts val="992"/>
-              </a:spcAft>
-              <a:buNone/>
-              <a:tabLst>
-                <a:tab pos="0" algn="l"/>
-              </a:tabLst>
-            </a:pPr>
-            <a:endParaRPr lang="de-DE" sz="1300" b="0" u="none" strike="noStrike">
-              <a:solidFill>
-                <a:schemeClr val="dk1"/>
-              </a:solidFill>
-              <a:effectLst/>
-              <a:uFillTx/>
-              <a:latin typeface="SRH Text"/>
-            </a:endParaRPr>
-          </a:p>
-          <a:p>
-            <a:pPr indent="0" algn="l" defTabSz="914400">
-              <a:lnSpc>
-                <a:spcPct val="110000"/>
-              </a:lnSpc>
-              <a:spcBef>
-                <a:spcPts val="1191"/>
-              </a:spcBef>
-              <a:spcAft>
-                <a:spcPts val="992"/>
-              </a:spcAft>
-              <a:buNone/>
-              <a:tabLst>
-                <a:tab pos="0" algn="l"/>
-              </a:tabLst>
-            </a:pPr>
-            <a:r>
-              <a:rPr lang="de-DE" sz="1300" b="0" u="none" strike="noStrike">
-                <a:solidFill>
-                  <a:schemeClr val="dk1"/>
-                </a:solidFill>
-                <a:effectLst/>
-                <a:uFillTx/>
-                <a:latin typeface="SRH Text"/>
-                <a:ea typeface="SRH Text"/>
-              </a:rPr>
-              <a:t> </a:t>
-            </a:r>
-            <a:endParaRPr lang="de-DE" sz="1300" b="0" u="none" strike="noStrike">
-              <a:solidFill>
-                <a:schemeClr val="dk1"/>
-              </a:solidFill>
-              <a:effectLst/>
-              <a:uFillTx/>
-              <a:latin typeface="SRH Text"/>
-            </a:endParaRPr>
-          </a:p>
-        </p:txBody>
-      </p:sp>
+      </p:pic>
       <p:sp>
         <p:nvSpPr>
-          <p:cNvPr id="310" name="PlaceHolder 3"/>
+          <p:cNvPr id="310" name="PlaceHolder 2"/>
           <p:cNvSpPr>
             <a:spLocks noGrp="1"/>
           </p:cNvSpPr>
@@ -37600,7 +37516,7 @@
                 <a:tab pos="0" algn="l"/>
               </a:tabLst>
             </a:pPr>
-            <a:fld id="{AD80EF0A-DC2D-4F90-B03A-B0C99A1B66B9}" type="datetime1">
+            <a:fld id="{9F2454C9-6D8B-46FC-BAF2-74AE8BAF4A47}" type="datetime1">
               <a:rPr lang="en-CA" sz="900" b="1" u="none" strike="noStrike">
                 <a:solidFill>
                   <a:srgbClr val="6D7373"/>
@@ -37610,7 +37526,7 @@
                 <a:latin typeface="SRH Text"/>
                 <a:ea typeface="SRH"/>
               </a:rPr>
-              <a:t>2026-09-11</a:t>
+              <a:t>2026-09-12</a:t>
             </a:fld>
             <a:endParaRPr lang="en-US" sz="900" b="0" u="none" strike="noStrike">
               <a:solidFill>
@@ -37625,7 +37541,7 @@
       </p:sp>
       <p:sp>
         <p:nvSpPr>
-          <p:cNvPr id="311" name="PlaceHolder 4"/>
+          <p:cNvPr id="311" name="PlaceHolder 3"/>
           <p:cNvSpPr>
             <a:spLocks noGrp="1"/>
           </p:cNvSpPr>
@@ -37705,7 +37621,7 @@
       </p:sp>
       <p:sp>
         <p:nvSpPr>
-          <p:cNvPr id="312" name="PlaceHolder 5"/>
+          <p:cNvPr id="312" name="PlaceHolder 4"/>
           <p:cNvSpPr>
             <a:spLocks noGrp="1"/>
           </p:cNvSpPr>
@@ -37760,7 +37676,7 @@
                 <a:tab pos="0" algn="l"/>
               </a:tabLst>
             </a:pPr>
-            <a:fld id="{B608A2DE-562B-4740-996A-42257D20A097}" type="slidenum">
+            <a:fld id="{C400BA4D-CBCB-4EA3-8CA8-CAE41A11941D}" type="slidenum">
               <a:rPr lang="de-DE" sz="1550" b="1" u="none" strike="noStrike">
                 <a:solidFill>
                   <a:srgbClr val="6D7373"/>
@@ -37770,7 +37686,7 @@
                 <a:latin typeface="SRH Text"/>
                 <a:ea typeface="SRH"/>
               </a:rPr>
-              <a:t>13</a:t>
+              <a:t>&lt;number&gt;</a:t>
             </a:fld>
             <a:endParaRPr lang="en-US" sz="1550" b="0" u="none" strike="noStrike">
               <a:solidFill>
@@ -37779,253 +37695,6 @@
               <a:effectLst/>
               <a:uFillTx/>
               <a:latin typeface="Times New Roman"/>
-            </a:endParaRPr>
-          </a:p>
-        </p:txBody>
-      </p:sp>
-      <p:sp>
-        <p:nvSpPr>
-          <p:cNvPr id="313" name="PlaceHolder 7"/>
-          <p:cNvSpPr/>
-          <p:nvPr/>
-        </p:nvSpPr>
-        <p:spPr>
-          <a:xfrm>
-            <a:off x="5988960" y="912600"/>
-            <a:ext cx="4983120" cy="5487480"/>
-          </a:xfrm>
-          <a:prstGeom prst="rect">
-            <a:avLst/>
-          </a:prstGeom>
-          <a:noFill/>
-          <a:ln w="0">
-            <a:noFill/>
-          </a:ln>
-        </p:spPr>
-        <p:style>
-          <a:lnRef idx="0"/>
-          <a:fillRef idx="0"/>
-          <a:effectRef idx="0"/>
-          <a:fontRef idx="minor"/>
-        </p:style>
-        <p:txBody>
-          <a:bodyPr numCol="1" spcCol="216000" lIns="0" tIns="0" rIns="0" bIns="0" anchor="t">
-            <a:noAutofit/>
-          </a:bodyPr>
-          <a:p>
-            <a:pPr defTabSz="914400">
-              <a:lnSpc>
-                <a:spcPct val="110000"/>
-              </a:lnSpc>
-              <a:spcBef>
-                <a:spcPts val="1191"/>
-              </a:spcBef>
-              <a:spcAft>
-                <a:spcPts val="992"/>
-              </a:spcAft>
-              <a:tabLst>
-                <a:tab pos="0" algn="l"/>
-              </a:tabLst>
-            </a:pPr>
-            <a:r>
-              <a:rPr lang="de-DE" sz="1300" b="1" u="none" strike="noStrike">
-                <a:solidFill>
-                  <a:schemeClr val="dk1"/>
-                </a:solidFill>
-                <a:effectLst/>
-                <a:uFillTx/>
-                <a:latin typeface="SRH Text"/>
-                <a:ea typeface="SRH Text"/>
-              </a:rPr>
-              <a:t>Key Findings:</a:t>
-            </a:r>
-            <a:endParaRPr lang="en-US" sz="1300" b="0" u="none" strike="noStrike">
-              <a:solidFill>
-                <a:srgbClr val="000000"/>
-              </a:solidFill>
-              <a:effectLst/>
-              <a:uFillTx/>
-              <a:latin typeface="Arial"/>
-            </a:endParaRPr>
-          </a:p>
-          <a:p>
-            <a:pPr defTabSz="914400">
-              <a:lnSpc>
-                <a:spcPct val="110000"/>
-              </a:lnSpc>
-              <a:spcBef>
-                <a:spcPts val="1191"/>
-              </a:spcBef>
-              <a:spcAft>
-                <a:spcPts val="992"/>
-              </a:spcAft>
-              <a:tabLst>
-                <a:tab pos="0" algn="l"/>
-              </a:tabLst>
-            </a:pPr>
-            <a:r>
-              <a:rPr lang="de-DE" sz="1300" b="0" u="none" strike="noStrike">
-                <a:solidFill>
-                  <a:schemeClr val="dk1"/>
-                </a:solidFill>
-                <a:effectLst/>
-                <a:uFillTx/>
-                <a:latin typeface="SRH Text"/>
-                <a:ea typeface="SRH Text"/>
-              </a:rPr>
-              <a:t>Credit Score: 19.42% of total SHAP importance</a:t>
-            </a:r>
-            <a:endParaRPr lang="en-US" sz="1300" b="0" u="none" strike="noStrike">
-              <a:solidFill>
-                <a:srgbClr val="000000"/>
-              </a:solidFill>
-              <a:effectLst/>
-              <a:uFillTx/>
-              <a:latin typeface="Arial"/>
-            </a:endParaRPr>
-          </a:p>
-          <a:p>
-            <a:pPr defTabSz="914400">
-              <a:lnSpc>
-                <a:spcPct val="110000"/>
-              </a:lnSpc>
-              <a:spcBef>
-                <a:spcPts val="1191"/>
-              </a:spcBef>
-              <a:spcAft>
-                <a:spcPts val="992"/>
-              </a:spcAft>
-              <a:tabLst>
-                <a:tab pos="0" algn="l"/>
-              </a:tabLst>
-            </a:pPr>
-            <a:r>
-              <a:rPr lang="de-DE" sz="1300" b="0" u="none" strike="noStrike">
-                <a:solidFill>
-                  <a:schemeClr val="dk1"/>
-                </a:solidFill>
-                <a:effectLst/>
-                <a:uFillTx/>
-                <a:latin typeface="SRH Text"/>
-                <a:ea typeface="SRH Text"/>
-              </a:rPr>
-              <a:t>Debt-to-Income Ratio: 15.95%</a:t>
-            </a:r>
-            <a:endParaRPr lang="en-US" sz="1300" b="0" u="none" strike="noStrike">
-              <a:solidFill>
-                <a:srgbClr val="000000"/>
-              </a:solidFill>
-              <a:effectLst/>
-              <a:uFillTx/>
-              <a:latin typeface="Arial"/>
-            </a:endParaRPr>
-          </a:p>
-          <a:p>
-            <a:pPr defTabSz="914400">
-              <a:lnSpc>
-                <a:spcPct val="110000"/>
-              </a:lnSpc>
-              <a:spcBef>
-                <a:spcPts val="1191"/>
-              </a:spcBef>
-              <a:spcAft>
-                <a:spcPts val="992"/>
-              </a:spcAft>
-              <a:tabLst>
-                <a:tab pos="0" algn="l"/>
-              </a:tabLst>
-            </a:pPr>
-            <a:r>
-              <a:rPr lang="de-DE" sz="1300" b="0" u="none" strike="noStrike">
-                <a:solidFill>
-                  <a:schemeClr val="dk1"/>
-                </a:solidFill>
-                <a:effectLst/>
-                <a:uFillTx/>
-                <a:latin typeface="SRH Text"/>
-                <a:ea typeface="SRH Text"/>
-              </a:rPr>
-              <a:t>Credit History: 9.65%</a:t>
-            </a:r>
-            <a:endParaRPr lang="en-US" sz="1300" b="0" u="none" strike="noStrike">
-              <a:solidFill>
-                <a:srgbClr val="000000"/>
-              </a:solidFill>
-              <a:effectLst/>
-              <a:uFillTx/>
-              <a:latin typeface="Arial"/>
-            </a:endParaRPr>
-          </a:p>
-          <a:p>
-            <a:pPr defTabSz="914400">
-              <a:lnSpc>
-                <a:spcPct val="110000"/>
-              </a:lnSpc>
-              <a:spcBef>
-                <a:spcPts val="1191"/>
-              </a:spcBef>
-              <a:spcAft>
-                <a:spcPts val="992"/>
-              </a:spcAft>
-              <a:tabLst>
-                <a:tab pos="0" algn="l"/>
-              </a:tabLst>
-            </a:pPr>
-            <a:r>
-              <a:rPr lang="de-DE" sz="1300" b="0" u="none" strike="noStrike">
-                <a:solidFill>
-                  <a:schemeClr val="dk1"/>
-                </a:solidFill>
-                <a:effectLst/>
-                <a:uFillTx/>
-                <a:latin typeface="SRH Text"/>
-                <a:ea typeface="SRH Text"/>
-              </a:rPr>
-              <a:t>Loan-to-Income Ratio: 8.42%</a:t>
-            </a:r>
-            <a:endParaRPr lang="en-US" sz="1300" b="0" u="none" strike="noStrike">
-              <a:solidFill>
-                <a:srgbClr val="000000"/>
-              </a:solidFill>
-              <a:effectLst/>
-              <a:uFillTx/>
-              <a:latin typeface="Arial"/>
-            </a:endParaRPr>
-          </a:p>
-          <a:p>
-            <a:pPr defTabSz="914400">
-              <a:lnSpc>
-                <a:spcPct val="110000"/>
-              </a:lnSpc>
-              <a:spcBef>
-                <a:spcPts val="1191"/>
-              </a:spcBef>
-              <a:spcAft>
-                <a:spcPts val="992"/>
-              </a:spcAft>
-              <a:tabLst>
-                <a:tab pos="0" algn="l"/>
-              </a:tabLst>
-            </a:pPr>
-            <a:r>
-              <a:rPr lang="de-DE" sz="1300" b="0" u="none" strike="noStrike">
-                <a:solidFill>
-                  <a:schemeClr val="dk1"/>
-                </a:solidFill>
-                <a:effectLst/>
-                <a:uFillTx/>
-                <a:latin typeface="SRH Text"/>
-                <a:ea typeface="SRH Text"/>
-              </a:rPr>
-              <a:t>Education Loan Intent: 8.15%</a:t>
-            </a:r>
-            <a:endParaRPr lang="en-US" sz="1300" b="0" u="none" strike="noStrike">
-              <a:solidFill>
-                <a:srgbClr val="000000"/>
-              </a:solidFill>
-              <a:effectLst/>
-              <a:uFillTx/>
-              <a:latin typeface="Arial"/>
             </a:endParaRPr>
           </a:p>
         </p:txBody>
@@ -38062,7 +37731,7 @@
       </p:grpSpPr>
       <p:sp>
         <p:nvSpPr>
-          <p:cNvPr id="314" name="PlaceHolder 1"/>
+          <p:cNvPr id="313" name="PlaceHolder 1"/>
           <p:cNvSpPr>
             <a:spLocks noGrp="1"/>
           </p:cNvSpPr>
@@ -38104,7 +37773,7 @@
               </a:tabLst>
             </a:pPr>
             <a:r>
-              <a:rPr lang="de-DE" sz="2600" b="1" u="none" strike="noStrike">
+              <a:rPr lang="de-DE" sz="2000" b="1" u="none" strike="noStrike">
                 <a:solidFill>
                   <a:srgbClr val="FF4000"/>
                 </a:solidFill>
@@ -38115,7 +37784,7 @@
               </a:rPr>
               <a:t>Explainable AI: SHAP-Based Model Interpretation</a:t>
             </a:r>
-            <a:endParaRPr lang="de-DE" sz="2600" b="1" u="none" strike="noStrike">
+            <a:endParaRPr lang="de-DE" sz="2000" b="1" u="none" strike="noStrike">
               <a:solidFill>
                 <a:schemeClr val="dk1"/>
               </a:solidFill>
@@ -38128,7 +37797,7 @@
       </p:sp>
       <p:sp>
         <p:nvSpPr>
-          <p:cNvPr id="315" name="PlaceHolder 2"/>
+          <p:cNvPr id="314" name="PlaceHolder 2"/>
           <p:cNvSpPr>
             <a:spLocks noGrp="1"/>
           </p:cNvSpPr>
@@ -38138,8 +37807,8 @@
         </p:nvSpPr>
         <p:spPr>
           <a:xfrm>
-            <a:off x="228600" y="1371600"/>
-            <a:ext cx="4799880" cy="4799880"/>
+            <a:off x="228600" y="1143000"/>
+            <a:ext cx="5714280" cy="4956480"/>
           </a:xfrm>
           <a:prstGeom prst="rect">
             <a:avLst/>
@@ -38159,26 +37828,29 @@
                 <a:spcPct val="110000"/>
               </a:lnSpc>
               <a:spcBef>
-                <a:spcPts val="1199"/>
-              </a:spcBef>
-              <a:buNone/>
-              <a:tabLst>
-                <a:tab pos="0" algn="l"/>
-              </a:tabLst>
-            </a:pPr>
-            <a:r>
-              <a:rPr lang="de-DE" sz="1400" b="0" u="none" strike="noStrike">
-                <a:solidFill>
-                  <a:srgbClr val="333333"/>
+                <a:spcPts val="1191"/>
+              </a:spcBef>
+              <a:spcAft>
+                <a:spcPts val="992"/>
+              </a:spcAft>
+              <a:buNone/>
+              <a:tabLst>
+                <a:tab pos="0" algn="l"/>
+              </a:tabLst>
+            </a:pPr>
+            <a:r>
+              <a:rPr lang="de-DE" sz="1300" b="1" u="none" strike="noStrike">
+                <a:solidFill>
+                  <a:schemeClr val="dk1"/>
                 </a:solidFill>
                 <a:effectLst/>
                 <a:uFillTx/>
                 <a:latin typeface="SRH Text"/>
                 <a:ea typeface="SRH Text"/>
               </a:rPr>
-              <a:t>Cumulative importance of top 10 features: 84.39% </a:t>
-            </a:r>
-            <a:endParaRPr lang="de-DE" sz="1400" b="0" u="none" strike="noStrike">
+              <a:t>Objective:</a:t>
+            </a:r>
+            <a:endParaRPr lang="de-DE" sz="1300" b="0" u="none" strike="noStrike">
               <a:solidFill>
                 <a:schemeClr val="dk1"/>
               </a:solidFill>
@@ -38193,26 +37865,276 @@
                 <a:spcPct val="110000"/>
               </a:lnSpc>
               <a:spcBef>
-                <a:spcPts val="1199"/>
-              </a:spcBef>
-              <a:buNone/>
-              <a:tabLst>
-                <a:tab pos="0" algn="l"/>
-              </a:tabLst>
-            </a:pPr>
-            <a:r>
-              <a:rPr lang="de-DE" sz="1400" b="0" u="none" strike="noStrike">
-                <a:solidFill>
-                  <a:srgbClr val="333333"/>
+                <a:spcPts val="1191"/>
+              </a:spcBef>
+              <a:spcAft>
+                <a:spcPts val="992"/>
+              </a:spcAft>
+              <a:buNone/>
+              <a:tabLst>
+                <a:tab pos="0" algn="l"/>
+              </a:tabLst>
+            </a:pPr>
+            <a:r>
+              <a:rPr lang="de-DE" sz="1300" b="0" u="none" strike="noStrike">
+                <a:solidFill>
+                  <a:schemeClr val="dk1"/>
                 </a:solidFill>
                 <a:effectLst/>
                 <a:uFillTx/>
                 <a:latin typeface="SRH Text"/>
                 <a:ea typeface="SRH Text"/>
               </a:rPr>
-              <a:t>Cumulative importance of top 20 features: 98.83% </a:t>
-            </a:r>
-            <a:endParaRPr lang="de-DE" sz="1400" b="0" u="none" strike="noStrike">
+              <a:t>Interpret how the XGBoost model makes credit-risk predictions and identify the features that drive its decisions.</a:t>
+            </a:r>
+            <a:endParaRPr lang="de-DE" sz="1300" b="0" u="none" strike="noStrike">
+              <a:solidFill>
+                <a:schemeClr val="dk1"/>
+              </a:solidFill>
+              <a:effectLst/>
+              <a:uFillTx/>
+              <a:latin typeface="SRH Text"/>
+            </a:endParaRPr>
+          </a:p>
+          <a:p>
+            <a:pPr indent="0" algn="l" defTabSz="914400">
+              <a:lnSpc>
+                <a:spcPct val="110000"/>
+              </a:lnSpc>
+              <a:spcBef>
+                <a:spcPts val="1191"/>
+              </a:spcBef>
+              <a:spcAft>
+                <a:spcPts val="992"/>
+              </a:spcAft>
+              <a:buNone/>
+              <a:tabLst>
+                <a:tab pos="0" algn="l"/>
+              </a:tabLst>
+            </a:pPr>
+            <a:r>
+              <a:rPr lang="de-DE" sz="1300" b="1" u="none" strike="noStrike">
+                <a:solidFill>
+                  <a:schemeClr val="dk1"/>
+                </a:solidFill>
+                <a:effectLst/>
+                <a:uFillTx/>
+                <a:latin typeface="SRH Text"/>
+                <a:ea typeface="SRH Text"/>
+              </a:rPr>
+              <a:t>SHAP Framework</a:t>
+            </a:r>
+            <a:endParaRPr lang="de-DE" sz="1300" b="0" u="none" strike="noStrike">
+              <a:solidFill>
+                <a:schemeClr val="dk1"/>
+              </a:solidFill>
+              <a:effectLst/>
+              <a:uFillTx/>
+              <a:latin typeface="SRH Text"/>
+            </a:endParaRPr>
+          </a:p>
+          <a:p>
+            <a:pPr indent="0" algn="l" defTabSz="914400">
+              <a:lnSpc>
+                <a:spcPct val="110000"/>
+              </a:lnSpc>
+              <a:spcBef>
+                <a:spcPts val="1191"/>
+              </a:spcBef>
+              <a:spcAft>
+                <a:spcPts val="992"/>
+              </a:spcAft>
+              <a:buNone/>
+              <a:tabLst>
+                <a:tab pos="0" algn="l"/>
+              </a:tabLst>
+            </a:pPr>
+            <a:r>
+              <a:rPr lang="de-DE" sz="1300" b="0" u="none" strike="noStrike">
+                <a:solidFill>
+                  <a:schemeClr val="dk1"/>
+                </a:solidFill>
+                <a:effectLst/>
+                <a:uFillTx/>
+                <a:latin typeface="SRH Text"/>
+                <a:ea typeface="SRH Text"/>
+              </a:rPr>
+              <a:t>TreeExplainer applied to the final XGBoost model</a:t>
+            </a:r>
+            <a:endParaRPr lang="de-DE" sz="1300" b="0" u="none" strike="noStrike">
+              <a:solidFill>
+                <a:schemeClr val="dk1"/>
+              </a:solidFill>
+              <a:effectLst/>
+              <a:uFillTx/>
+              <a:latin typeface="SRH Text"/>
+            </a:endParaRPr>
+          </a:p>
+          <a:p>
+            <a:pPr indent="0" algn="l" defTabSz="914400">
+              <a:lnSpc>
+                <a:spcPct val="110000"/>
+              </a:lnSpc>
+              <a:spcBef>
+                <a:spcPts val="1191"/>
+              </a:spcBef>
+              <a:spcAft>
+                <a:spcPts val="992"/>
+              </a:spcAft>
+              <a:buNone/>
+              <a:tabLst>
+                <a:tab pos="0" algn="l"/>
+              </a:tabLst>
+            </a:pPr>
+            <a:r>
+              <a:rPr lang="de-DE" sz="1300" b="0" u="none" strike="noStrike">
+                <a:solidFill>
+                  <a:schemeClr val="dk1"/>
+                </a:solidFill>
+                <a:effectLst/>
+                <a:uFillTx/>
+                <a:latin typeface="SRH Text"/>
+                <a:ea typeface="SRH Text"/>
+              </a:rPr>
+              <a:t>2,000 test observations analyzed</a:t>
+            </a:r>
+            <a:endParaRPr lang="de-DE" sz="1300" b="0" u="none" strike="noStrike">
+              <a:solidFill>
+                <a:schemeClr val="dk1"/>
+              </a:solidFill>
+              <a:effectLst/>
+              <a:uFillTx/>
+              <a:latin typeface="SRH Text"/>
+            </a:endParaRPr>
+          </a:p>
+          <a:p>
+            <a:pPr indent="0" algn="l" defTabSz="914400">
+              <a:lnSpc>
+                <a:spcPct val="110000"/>
+              </a:lnSpc>
+              <a:spcBef>
+                <a:spcPts val="1191"/>
+              </a:spcBef>
+              <a:spcAft>
+                <a:spcPts val="992"/>
+              </a:spcAft>
+              <a:buNone/>
+              <a:tabLst>
+                <a:tab pos="0" algn="l"/>
+              </a:tabLst>
+            </a:pPr>
+            <a:r>
+              <a:rPr lang="de-DE" sz="1300" b="0" u="none" strike="noStrike">
+                <a:solidFill>
+                  <a:schemeClr val="dk1"/>
+                </a:solidFill>
+                <a:effectLst/>
+                <a:uFillTx/>
+                <a:latin typeface="SRH Text"/>
+                <a:ea typeface="SRH Text"/>
+              </a:rPr>
+              <a:t>Global feature importance based on mean |SHAP value|</a:t>
+            </a:r>
+            <a:endParaRPr lang="de-DE" sz="1300" b="0" u="none" strike="noStrike">
+              <a:solidFill>
+                <a:schemeClr val="dk1"/>
+              </a:solidFill>
+              <a:effectLst/>
+              <a:uFillTx/>
+              <a:latin typeface="SRH Text"/>
+            </a:endParaRPr>
+          </a:p>
+          <a:p>
+            <a:pPr indent="0" algn="l" defTabSz="914400">
+              <a:lnSpc>
+                <a:spcPct val="110000"/>
+              </a:lnSpc>
+              <a:spcBef>
+                <a:spcPts val="1191"/>
+              </a:spcBef>
+              <a:spcAft>
+                <a:spcPts val="992"/>
+              </a:spcAft>
+              <a:buNone/>
+              <a:tabLst>
+                <a:tab pos="0" algn="l"/>
+              </a:tabLst>
+            </a:pPr>
+            <a:r>
+              <a:rPr lang="de-DE" sz="1300" b="0" u="none" strike="noStrike">
+                <a:solidFill>
+                  <a:schemeClr val="dk1"/>
+                </a:solidFill>
+                <a:effectLst/>
+                <a:uFillTx/>
+                <a:latin typeface="SRH Text"/>
+                <a:ea typeface="SRH Text"/>
+              </a:rPr>
+              <a:t>SHAP dependence plots used to examine feature effects</a:t>
+            </a:r>
+            <a:endParaRPr lang="de-DE" sz="1300" b="0" u="none" strike="noStrike">
+              <a:solidFill>
+                <a:schemeClr val="dk1"/>
+              </a:solidFill>
+              <a:effectLst/>
+              <a:uFillTx/>
+              <a:latin typeface="SRH Text"/>
+            </a:endParaRPr>
+          </a:p>
+          <a:p>
+            <a:pPr indent="0" algn="l" defTabSz="914400">
+              <a:lnSpc>
+                <a:spcPct val="110000"/>
+              </a:lnSpc>
+              <a:spcBef>
+                <a:spcPts val="1191"/>
+              </a:spcBef>
+              <a:spcAft>
+                <a:spcPts val="992"/>
+              </a:spcAft>
+              <a:buNone/>
+              <a:tabLst>
+                <a:tab pos="0" algn="l"/>
+              </a:tabLst>
+            </a:pPr>
+            <a:endParaRPr lang="de-DE" sz="1300" b="0" u="none" strike="noStrike">
+              <a:solidFill>
+                <a:schemeClr val="dk1"/>
+              </a:solidFill>
+              <a:effectLst/>
+              <a:uFillTx/>
+              <a:latin typeface="SRH Text"/>
+            </a:endParaRPr>
+          </a:p>
+          <a:p>
+            <a:pPr indent="0" algn="l" defTabSz="914400">
+              <a:lnSpc>
+                <a:spcPct val="110000"/>
+              </a:lnSpc>
+              <a:spcBef>
+                <a:spcPts val="1191"/>
+              </a:spcBef>
+              <a:spcAft>
+                <a:spcPts val="992"/>
+              </a:spcAft>
+              <a:buNone/>
+              <a:tabLst>
+                <a:tab pos="0" algn="l"/>
+              </a:tabLst>
+            </a:pPr>
+            <a:r>
+              <a:rPr lang="de-DE" sz="1300" b="0" u="none" strike="noStrike">
+                <a:solidFill>
+                  <a:schemeClr val="dk1"/>
+                </a:solidFill>
+                <a:effectLst/>
+                <a:uFillTx/>
+                <a:latin typeface="SRH Text"/>
+                <a:ea typeface="SRH Text"/>
+              </a:rPr>
+              <a:t> </a:t>
+            </a:r>
+            <a:endParaRPr lang="de-DE" sz="1300" b="0" u="none" strike="noStrike">
               <a:solidFill>
                 <a:schemeClr val="dk1"/>
               </a:solidFill>
@@ -38225,7 +38147,7 @@
       </p:sp>
       <p:sp>
         <p:nvSpPr>
-          <p:cNvPr id="316" name="PlaceHolder 3"/>
+          <p:cNvPr id="315" name="PlaceHolder 3"/>
           <p:cNvSpPr>
             <a:spLocks noGrp="1"/>
           </p:cNvSpPr>
@@ -38280,7 +38202,7 @@
                 <a:tab pos="0" algn="l"/>
               </a:tabLst>
             </a:pPr>
-            <a:fld id="{D876AF3D-6B44-4C8D-A7F6-3016F0453DED}" type="datetime1">
+            <a:fld id="{0005BA08-DAE3-4D3C-AA49-64EE6FA9E560}" type="datetime1">
               <a:rPr lang="en-CA" sz="900" b="1" u="none" strike="noStrike">
                 <a:solidFill>
                   <a:srgbClr val="6D7373"/>
@@ -38290,7 +38212,7 @@
                 <a:latin typeface="SRH Text"/>
                 <a:ea typeface="SRH"/>
               </a:rPr>
-              <a:t>2026-09-11</a:t>
+              <a:t>2026-09-12</a:t>
             </a:fld>
             <a:endParaRPr lang="en-US" sz="900" b="0" u="none" strike="noStrike">
               <a:solidFill>
@@ -38305,7 +38227,7 @@
       </p:sp>
       <p:sp>
         <p:nvSpPr>
-          <p:cNvPr id="317" name="PlaceHolder 4"/>
+          <p:cNvPr id="316" name="PlaceHolder 4"/>
           <p:cNvSpPr>
             <a:spLocks noGrp="1"/>
           </p:cNvSpPr>
@@ -38385,7 +38307,7 @@
       </p:sp>
       <p:sp>
         <p:nvSpPr>
-          <p:cNvPr id="318" name="PlaceHolder 5"/>
+          <p:cNvPr id="317" name="PlaceHolder 5"/>
           <p:cNvSpPr>
             <a:spLocks noGrp="1"/>
           </p:cNvSpPr>
@@ -38440,7 +38362,7 @@
                 <a:tab pos="0" algn="l"/>
               </a:tabLst>
             </a:pPr>
-            <a:fld id="{B2C89D3C-BA94-4B37-8172-C0BCA8F73015}" type="slidenum">
+            <a:fld id="{E5D5CFB1-9155-4FCF-84AE-6E1FBF3B81B2}" type="slidenum">
               <a:rPr lang="de-DE" sz="1550" b="1" u="none" strike="noStrike">
                 <a:solidFill>
                   <a:srgbClr val="6D7373"/>
@@ -38450,7 +38372,7 @@
                 <a:latin typeface="SRH Text"/>
                 <a:ea typeface="SRH"/>
               </a:rPr>
-              <a:t>13</a:t>
+              <a:t>&lt;number&gt;</a:t>
             </a:fld>
             <a:endParaRPr lang="en-US" sz="1550" b="0" u="none" strike="noStrike">
               <a:solidFill>
@@ -38463,20 +38385,16 @@
           </a:p>
         </p:txBody>
       </p:sp>
-      <p:pic>
-        <p:nvPicPr>
-          <p:cNvPr id="319" name=""/>
-          <p:cNvPicPr/>
+      <p:sp>
+        <p:nvSpPr>
+          <p:cNvPr id="318" name="PlaceHolder 7"/>
+          <p:cNvSpPr/>
           <p:nvPr/>
-        </p:nvPicPr>
-        <p:blipFill>
-          <a:blip r:embed="rId1"/>
-          <a:stretch/>
-        </p:blipFill>
+        </p:nvSpPr>
         <p:spPr>
           <a:xfrm>
-            <a:off x="5729400" y="1009800"/>
-            <a:ext cx="4941720" cy="5713920"/>
+            <a:off x="5988960" y="1143000"/>
+            <a:ext cx="4983120" cy="5257080"/>
           </a:xfrm>
           <a:prstGeom prst="rect">
             <a:avLst/>
@@ -38486,7 +38404,234 @@
             <a:noFill/>
           </a:ln>
         </p:spPr>
-      </p:pic>
+        <p:style>
+          <a:lnRef idx="0"/>
+          <a:fillRef idx="0"/>
+          <a:effectRef idx="0"/>
+          <a:fontRef idx="minor"/>
+        </p:style>
+        <p:txBody>
+          <a:bodyPr numCol="1" spcCol="216000" lIns="0" tIns="0" rIns="0" bIns="0" anchor="t">
+            <a:noAutofit/>
+          </a:bodyPr>
+          <a:p>
+            <a:pPr defTabSz="914400">
+              <a:lnSpc>
+                <a:spcPct val="110000"/>
+              </a:lnSpc>
+              <a:spcBef>
+                <a:spcPts val="1191"/>
+              </a:spcBef>
+              <a:spcAft>
+                <a:spcPts val="992"/>
+              </a:spcAft>
+              <a:tabLst>
+                <a:tab pos="0" algn="l"/>
+              </a:tabLst>
+            </a:pPr>
+            <a:r>
+              <a:rPr lang="de-DE" sz="1300" b="1" u="none" strike="noStrike">
+                <a:solidFill>
+                  <a:schemeClr val="dk1"/>
+                </a:solidFill>
+                <a:effectLst/>
+                <a:uFillTx/>
+                <a:latin typeface="SRH Text"/>
+                <a:ea typeface="SRH Text"/>
+              </a:rPr>
+              <a:t>Key Findings:</a:t>
+            </a:r>
+            <a:endParaRPr lang="en-US" sz="1300" b="0" u="none" strike="noStrike">
+              <a:solidFill>
+                <a:srgbClr val="000000"/>
+              </a:solidFill>
+              <a:effectLst/>
+              <a:uFillTx/>
+              <a:latin typeface="Arial"/>
+            </a:endParaRPr>
+          </a:p>
+          <a:p>
+            <a:pPr defTabSz="914400">
+              <a:lnSpc>
+                <a:spcPct val="110000"/>
+              </a:lnSpc>
+              <a:spcBef>
+                <a:spcPts val="1191"/>
+              </a:spcBef>
+              <a:spcAft>
+                <a:spcPts val="992"/>
+              </a:spcAft>
+              <a:tabLst>
+                <a:tab pos="0" algn="l"/>
+              </a:tabLst>
+            </a:pPr>
+            <a:r>
+              <a:rPr lang="de-DE" sz="1300" b="0" u="none" strike="noStrike">
+                <a:solidFill>
+                  <a:schemeClr val="dk1"/>
+                </a:solidFill>
+                <a:effectLst/>
+                <a:uFillTx/>
+                <a:latin typeface="SRH Text"/>
+                <a:ea typeface="SRH Text"/>
+              </a:rPr>
+              <a:t>Credit Score: 19.42% of total SHAP importance</a:t>
+            </a:r>
+            <a:endParaRPr lang="en-US" sz="1300" b="0" u="none" strike="noStrike">
+              <a:solidFill>
+                <a:srgbClr val="000000"/>
+              </a:solidFill>
+              <a:effectLst/>
+              <a:uFillTx/>
+              <a:latin typeface="Arial"/>
+            </a:endParaRPr>
+          </a:p>
+          <a:p>
+            <a:pPr defTabSz="914400">
+              <a:lnSpc>
+                <a:spcPct val="110000"/>
+              </a:lnSpc>
+              <a:spcBef>
+                <a:spcPts val="1191"/>
+              </a:spcBef>
+              <a:spcAft>
+                <a:spcPts val="992"/>
+              </a:spcAft>
+              <a:tabLst>
+                <a:tab pos="0" algn="l"/>
+              </a:tabLst>
+            </a:pPr>
+            <a:r>
+              <a:rPr lang="de-DE" sz="1300" b="0" u="none" strike="noStrike">
+                <a:solidFill>
+                  <a:schemeClr val="dk1"/>
+                </a:solidFill>
+                <a:effectLst/>
+                <a:uFillTx/>
+                <a:latin typeface="SRH Text"/>
+                <a:ea typeface="SRH Text"/>
+              </a:rPr>
+              <a:t>Debt-to-Income Ratio: 15.95%</a:t>
+            </a:r>
+            <a:endParaRPr lang="en-US" sz="1300" b="0" u="none" strike="noStrike">
+              <a:solidFill>
+                <a:srgbClr val="000000"/>
+              </a:solidFill>
+              <a:effectLst/>
+              <a:uFillTx/>
+              <a:latin typeface="Arial"/>
+            </a:endParaRPr>
+          </a:p>
+          <a:p>
+            <a:pPr defTabSz="914400">
+              <a:lnSpc>
+                <a:spcPct val="110000"/>
+              </a:lnSpc>
+              <a:spcBef>
+                <a:spcPts val="1191"/>
+              </a:spcBef>
+              <a:spcAft>
+                <a:spcPts val="992"/>
+              </a:spcAft>
+              <a:tabLst>
+                <a:tab pos="0" algn="l"/>
+              </a:tabLst>
+            </a:pPr>
+            <a:r>
+              <a:rPr lang="de-DE" sz="1300" b="0" u="none" strike="noStrike">
+                <a:solidFill>
+                  <a:schemeClr val="dk1"/>
+                </a:solidFill>
+                <a:effectLst/>
+                <a:uFillTx/>
+                <a:latin typeface="SRH Text"/>
+                <a:ea typeface="SRH Text"/>
+              </a:rPr>
+              <a:t>Credit History: 9.65%</a:t>
+            </a:r>
+            <a:endParaRPr lang="en-US" sz="1300" b="0" u="none" strike="noStrike">
+              <a:solidFill>
+                <a:srgbClr val="000000"/>
+              </a:solidFill>
+              <a:effectLst/>
+              <a:uFillTx/>
+              <a:latin typeface="Arial"/>
+            </a:endParaRPr>
+          </a:p>
+          <a:p>
+            <a:pPr defTabSz="914400">
+              <a:lnSpc>
+                <a:spcPct val="110000"/>
+              </a:lnSpc>
+              <a:spcBef>
+                <a:spcPts val="1191"/>
+              </a:spcBef>
+              <a:spcAft>
+                <a:spcPts val="992"/>
+              </a:spcAft>
+              <a:tabLst>
+                <a:tab pos="0" algn="l"/>
+              </a:tabLst>
+            </a:pPr>
+            <a:r>
+              <a:rPr lang="de-DE" sz="1300" b="0" u="none" strike="noStrike">
+                <a:solidFill>
+                  <a:schemeClr val="dk1"/>
+                </a:solidFill>
+                <a:effectLst/>
+                <a:uFillTx/>
+                <a:latin typeface="SRH Text"/>
+                <a:ea typeface="SRH Text"/>
+              </a:rPr>
+              <a:t>Loan-to-Income Ratio: 8.42%</a:t>
+            </a:r>
+            <a:endParaRPr lang="en-US" sz="1300" b="0" u="none" strike="noStrike">
+              <a:solidFill>
+                <a:srgbClr val="000000"/>
+              </a:solidFill>
+              <a:effectLst/>
+              <a:uFillTx/>
+              <a:latin typeface="Arial"/>
+            </a:endParaRPr>
+          </a:p>
+          <a:p>
+            <a:pPr defTabSz="914400">
+              <a:lnSpc>
+                <a:spcPct val="110000"/>
+              </a:lnSpc>
+              <a:spcBef>
+                <a:spcPts val="1191"/>
+              </a:spcBef>
+              <a:spcAft>
+                <a:spcPts val="992"/>
+              </a:spcAft>
+              <a:tabLst>
+                <a:tab pos="0" algn="l"/>
+              </a:tabLst>
+            </a:pPr>
+            <a:r>
+              <a:rPr lang="de-DE" sz="1300" b="0" u="none" strike="noStrike">
+                <a:solidFill>
+                  <a:schemeClr val="dk1"/>
+                </a:solidFill>
+                <a:effectLst/>
+                <a:uFillTx/>
+                <a:latin typeface="SRH Text"/>
+                <a:ea typeface="SRH Text"/>
+              </a:rPr>
+              <a:t>Education Loan Intent: 8.15%</a:t>
+            </a:r>
+            <a:endParaRPr lang="en-US" sz="1300" b="0" u="none" strike="noStrike">
+              <a:solidFill>
+                <a:srgbClr val="000000"/>
+              </a:solidFill>
+              <a:effectLst/>
+              <a:uFillTx/>
+              <a:latin typeface="Arial"/>
+            </a:endParaRPr>
+          </a:p>
+        </p:txBody>
+      </p:sp>
     </p:spTree>
   </p:cSld>
   <mc:AlternateContent>
@@ -38519,7 +38664,7 @@
       </p:grpSpPr>
       <p:sp>
         <p:nvSpPr>
-          <p:cNvPr id="320" name="PlaceHolder 1"/>
+          <p:cNvPr id="319" name="PlaceHolder 1"/>
           <p:cNvSpPr>
             <a:spLocks noGrp="1"/>
           </p:cNvSpPr>
@@ -38570,7 +38715,7 @@
                 <a:latin typeface="SRH Headline"/>
                 <a:ea typeface="SRH Headline"/>
               </a:rPr>
-              <a:t>Selective Prediction Framework</a:t>
+              <a:t>Explainable AI: SHAP-Based Model Interpretation</a:t>
             </a:r>
             <a:endParaRPr lang="de-DE" sz="2600" b="1" u="none" strike="noStrike">
               <a:solidFill>
@@ -38585,7 +38730,7 @@
       </p:sp>
       <p:sp>
         <p:nvSpPr>
-          <p:cNvPr id="321" name="PlaceHolder 2"/>
+          <p:cNvPr id="320" name="PlaceHolder 2"/>
           <p:cNvSpPr>
             <a:spLocks noGrp="1"/>
           </p:cNvSpPr>
@@ -38595,8 +38740,8 @@
         </p:nvSpPr>
         <p:spPr>
           <a:xfrm>
-            <a:off x="228600" y="914400"/>
-            <a:ext cx="11200320" cy="5814360"/>
+            <a:off x="228600" y="1371600"/>
+            <a:ext cx="4799880" cy="4799880"/>
           </a:xfrm>
           <a:prstGeom prst="rect">
             <a:avLst/>
@@ -38611,34 +38756,31 @@
             <a:noAutofit/>
           </a:bodyPr>
           <a:p>
-            <a:pPr marL="285840" indent="0" algn="l" defTabSz="914400">
-              <a:lnSpc>
-                <a:spcPct val="150000"/>
-              </a:lnSpc>
-              <a:spcBef>
-                <a:spcPts val="1191"/>
-              </a:spcBef>
-              <a:spcAft>
-                <a:spcPts val="992"/>
-              </a:spcAft>
-              <a:buNone/>
-              <a:tabLst>
-                <a:tab pos="0" algn="l"/>
-              </a:tabLst>
-            </a:pPr>
-            <a:r>
-              <a:rPr lang="en-US" sz="1300" b="0" u="none" strike="noStrike">
-                <a:solidFill>
-                  <a:srgbClr val="1C1C1C"/>
+            <a:pPr indent="0" algn="l" defTabSz="914400">
+              <a:lnSpc>
+                <a:spcPct val="110000"/>
+              </a:lnSpc>
+              <a:spcBef>
+                <a:spcPts val="1199"/>
+              </a:spcBef>
+              <a:buNone/>
+              <a:tabLst>
+                <a:tab pos="0" algn="l"/>
+              </a:tabLst>
+            </a:pPr>
+            <a:r>
+              <a:rPr lang="de-DE" sz="1400" b="0" u="none" strike="noStrike">
+                <a:solidFill>
+                  <a:srgbClr val="333333"/>
                 </a:solidFill>
                 <a:effectLst/>
                 <a:uFillTx/>
                 <a:latin typeface="SRH Text"/>
                 <a:ea typeface="SRH Text"/>
               </a:rPr>
-              <a:t>Traditional classification forces an automatic decision for every applicant.</a:t>
-            </a:r>
-            <a:endParaRPr lang="de-DE" sz="1300" b="0" u="none" strike="noStrike">
+              <a:t>Cumulative importance of top 10 features: 84.39% </a:t>
+            </a:r>
+            <a:endParaRPr lang="de-DE" sz="1400" b="0" u="none" strike="noStrike">
               <a:solidFill>
                 <a:schemeClr val="dk1"/>
               </a:solidFill>
@@ -38648,364 +38790,31 @@
             </a:endParaRPr>
           </a:p>
           <a:p>
-            <a:pPr marL="285840" indent="0" algn="l" defTabSz="914400">
-              <a:lnSpc>
-                <a:spcPct val="150000"/>
-              </a:lnSpc>
-              <a:spcBef>
-                <a:spcPts val="1191"/>
-              </a:spcBef>
-              <a:spcAft>
-                <a:spcPts val="992"/>
-              </a:spcAft>
-              <a:buNone/>
-              <a:tabLst>
-                <a:tab pos="0" algn="l"/>
-              </a:tabLst>
-            </a:pPr>
-            <a:r>
-              <a:rPr lang="en-US" sz="1300" b="0" u="none" strike="noStrike">
-                <a:solidFill>
-                  <a:srgbClr val="1C1C1C"/>
+            <a:pPr indent="0" algn="l" defTabSz="914400">
+              <a:lnSpc>
+                <a:spcPct val="110000"/>
+              </a:lnSpc>
+              <a:spcBef>
+                <a:spcPts val="1199"/>
+              </a:spcBef>
+              <a:buNone/>
+              <a:tabLst>
+                <a:tab pos="0" algn="l"/>
+              </a:tabLst>
+            </a:pPr>
+            <a:r>
+              <a:rPr lang="de-DE" sz="1400" b="0" u="none" strike="noStrike">
+                <a:solidFill>
+                  <a:srgbClr val="333333"/>
                 </a:solidFill>
                 <a:effectLst/>
                 <a:uFillTx/>
                 <a:latin typeface="SRH Text"/>
                 <a:ea typeface="SRH Text"/>
               </a:rPr>
-              <a:t>My approach: allow the model to abstain from uncertain cases and refer them to human loan officers.</a:t>
-            </a:r>
-            <a:endParaRPr lang="de-DE" sz="1300" b="0" u="none" strike="noStrike">
-              <a:solidFill>
-                <a:schemeClr val="dk1"/>
-              </a:solidFill>
-              <a:effectLst/>
-              <a:uFillTx/>
-              <a:latin typeface="SRH Text"/>
-            </a:endParaRPr>
-          </a:p>
-          <a:p>
-            <a:pPr marL="285840" indent="0" algn="l" defTabSz="914400">
-              <a:lnSpc>
-                <a:spcPct val="150000"/>
-              </a:lnSpc>
-              <a:spcBef>
-                <a:spcPts val="1191"/>
-              </a:spcBef>
-              <a:spcAft>
-                <a:spcPts val="992"/>
-              </a:spcAft>
-              <a:buNone/>
-              <a:tabLst>
-                <a:tab pos="0" algn="l"/>
-              </a:tabLst>
-            </a:pPr>
-            <a:r>
-              <a:rPr lang="en-US" sz="1300" b="0" u="none" strike="noStrike">
-                <a:solidFill>
-                  <a:srgbClr val="1C1C1C"/>
-                </a:solidFill>
-                <a:effectLst/>
-                <a:uFillTx/>
-                <a:latin typeface="SRH Text"/>
-                <a:ea typeface="SRH Text"/>
-              </a:rPr>
-              <a:t>Two-Threshold Decision Policy:</a:t>
-            </a:r>
-            <a:endParaRPr lang="de-DE" sz="1300" b="0" u="none" strike="noStrike">
-              <a:solidFill>
-                <a:schemeClr val="dk1"/>
-              </a:solidFill>
-              <a:effectLst/>
-              <a:uFillTx/>
-              <a:latin typeface="SRH Text"/>
-            </a:endParaRPr>
-          </a:p>
-          <a:p>
-            <a:pPr marL="285840" indent="0" algn="l" defTabSz="914400">
-              <a:lnSpc>
-                <a:spcPct val="150000"/>
-              </a:lnSpc>
-              <a:spcBef>
-                <a:spcPts val="1191"/>
-              </a:spcBef>
-              <a:spcAft>
-                <a:spcPts val="992"/>
-              </a:spcAft>
-              <a:buNone/>
-              <a:tabLst>
-                <a:tab pos="0" algn="l"/>
-              </a:tabLst>
-            </a:pPr>
-            <a:r>
-              <a:rPr lang="en-US" sz="1300" b="0" u="none" strike="noStrike">
-                <a:solidFill>
-                  <a:srgbClr val="1C1C1C"/>
-                </a:solidFill>
-                <a:effectLst/>
-                <a:uFillTx/>
-                <a:latin typeface="SRH Text"/>
-                <a:ea typeface="SRH Text"/>
-              </a:rPr>
-              <a:t> </a:t>
-            </a:r>
-            <a:r>
-              <a:rPr lang="en-US" sz="1300" b="1" u="none" strike="noStrike">
-                <a:solidFill>
-                  <a:srgbClr val="1C1C1C"/>
-                </a:solidFill>
-                <a:effectLst/>
-                <a:uFillTx/>
-                <a:latin typeface="SRH Text"/>
-                <a:ea typeface="SRH Text"/>
-              </a:rPr>
-              <a:t>Probability of Default &lt; thresholds t₁     </a:t>
-            </a:r>
-            <a:r>
-              <a:rPr lang="en-US" sz="1300" b="0" u="none" strike="noStrike">
-                <a:solidFill>
-                  <a:srgbClr val="1C1C1C"/>
-                </a:solidFill>
-                <a:effectLst/>
-                <a:uFillTx/>
-                <a:latin typeface="SRH Text"/>
-                <a:ea typeface="SRH Text"/>
-              </a:rPr>
-              <a:t>🟢 AUTO APPROVE</a:t>
-            </a:r>
-            <a:r>
-              <a:rPr lang="en-US" sz="1300" b="1" u="none" strike="noStrike">
-                <a:solidFill>
-                  <a:srgbClr val="1C1C1C"/>
-                </a:solidFill>
-                <a:effectLst/>
-                <a:uFillTx/>
-                <a:latin typeface="SRH Text"/>
-                <a:ea typeface="SRH Text"/>
-              </a:rPr>
-              <a:t>  (  low-risk  )                                </a:t>
-            </a:r>
-            <a:r>
-              <a:rPr lang="en-US" sz="1300" b="1" u="none" strike="noStrike">
-                <a:solidFill>
-                  <a:srgbClr val="FF4000"/>
-                </a:solidFill>
-                <a:effectLst/>
-                <a:uFillTx/>
-                <a:latin typeface="SRH Text"/>
-                <a:ea typeface="SRH Text"/>
-              </a:rPr>
-              <a:t>                                                                                                                                                   </a:t>
-            </a:r>
-            <a:endParaRPr lang="de-DE" sz="1300" b="0" u="none" strike="noStrike">
-              <a:solidFill>
-                <a:schemeClr val="dk1"/>
-              </a:solidFill>
-              <a:effectLst/>
-              <a:uFillTx/>
-              <a:latin typeface="SRH Text"/>
-            </a:endParaRPr>
-          </a:p>
-          <a:p>
-            <a:pPr marL="285840" indent="0" algn="l" defTabSz="914400">
-              <a:lnSpc>
-                <a:spcPct val="150000"/>
-              </a:lnSpc>
-              <a:spcBef>
-                <a:spcPts val="1191"/>
-              </a:spcBef>
-              <a:spcAft>
-                <a:spcPts val="992"/>
-              </a:spcAft>
-              <a:buNone/>
-              <a:tabLst>
-                <a:tab pos="0" algn="l"/>
-              </a:tabLst>
-            </a:pPr>
-            <a:r>
-              <a:rPr lang="en-US" sz="1300" b="1" u="none" strike="noStrike">
-                <a:solidFill>
-                  <a:srgbClr val="1C1C1C"/>
-                </a:solidFill>
-                <a:effectLst/>
-                <a:uFillTx/>
-                <a:latin typeface="SRH Text"/>
-                <a:ea typeface="SRH Text"/>
-              </a:rPr>
-              <a:t>thresholds t₁ ≤ Probability of Default ≤ thresholds t₂</a:t>
-            </a:r>
-            <a:r>
-              <a:rPr lang="en-US" sz="1300" b="1" u="none" strike="noStrike">
-                <a:solidFill>
-                  <a:srgbClr val="FF4000"/>
-                </a:solidFill>
-                <a:effectLst/>
-                <a:uFillTx/>
-                <a:latin typeface="SRH Text"/>
-                <a:ea typeface="SRH Text"/>
-              </a:rPr>
-              <a:t>     </a:t>
-            </a:r>
-            <a:r>
-              <a:rPr lang="en-US" sz="1300" b="0" u="none" strike="noStrike">
-                <a:solidFill>
-                  <a:srgbClr val="1C1C1C"/>
-                </a:solidFill>
-                <a:effectLst/>
-                <a:uFillTx/>
-                <a:latin typeface="SRH Text"/>
-                <a:ea typeface="SRH Text"/>
-              </a:rPr>
-              <a:t>🟠 MANUAL REVIEW </a:t>
-            </a:r>
-            <a:r>
-              <a:rPr lang="en-US" sz="1300" b="1" u="none" strike="noStrike">
-                <a:solidFill>
-                  <a:srgbClr val="1C1C1C"/>
-                </a:solidFill>
-                <a:effectLst/>
-                <a:uFillTx/>
-                <a:latin typeface="SRH Text"/>
-                <a:ea typeface="SRH Text"/>
-              </a:rPr>
-              <a:t>(  uncertain )</a:t>
-            </a:r>
-            <a:r>
-              <a:rPr lang="en-US" sz="1300" b="1" u="none" strike="noStrike">
-                <a:solidFill>
-                  <a:srgbClr val="FF4000"/>
-                </a:solidFill>
-                <a:effectLst/>
-                <a:uFillTx/>
-                <a:latin typeface="SRH Text"/>
-                <a:ea typeface="SRH Text"/>
-              </a:rPr>
-              <a:t>                                                                                                                                                                     </a:t>
-            </a:r>
-            <a:endParaRPr lang="de-DE" sz="1300" b="0" u="none" strike="noStrike">
-              <a:solidFill>
-                <a:schemeClr val="dk1"/>
-              </a:solidFill>
-              <a:effectLst/>
-              <a:uFillTx/>
-              <a:latin typeface="SRH Text"/>
-            </a:endParaRPr>
-          </a:p>
-          <a:p>
-            <a:pPr marL="285840" indent="0" algn="l" defTabSz="914400">
-              <a:lnSpc>
-                <a:spcPct val="150000"/>
-              </a:lnSpc>
-              <a:spcBef>
-                <a:spcPts val="1191"/>
-              </a:spcBef>
-              <a:spcAft>
-                <a:spcPts val="992"/>
-              </a:spcAft>
-              <a:buNone/>
-              <a:tabLst>
-                <a:tab pos="0" algn="l"/>
-              </a:tabLst>
-            </a:pPr>
-            <a:r>
-              <a:rPr lang="en-US" sz="1300" b="0" u="none" strike="noStrike">
-                <a:solidFill>
-                  <a:srgbClr val="1C1C1C"/>
-                </a:solidFill>
-                <a:effectLst/>
-                <a:uFillTx/>
-                <a:latin typeface="SRH Text"/>
-                <a:ea typeface="SRH Text"/>
-              </a:rPr>
-              <a:t> </a:t>
-            </a:r>
-            <a:r>
-              <a:rPr lang="en-US" sz="1300" b="1" u="none" strike="noStrike">
-                <a:solidFill>
-                  <a:srgbClr val="1C1C1C"/>
-                </a:solidFill>
-                <a:effectLst/>
-                <a:uFillTx/>
-                <a:latin typeface="SRH Text"/>
-                <a:ea typeface="SRH Text"/>
-              </a:rPr>
-              <a:t>Probability of Default &gt; thresholds t₂     </a:t>
-            </a:r>
-            <a:r>
-              <a:rPr lang="en-US" sz="1300" b="0" u="none" strike="noStrike">
-                <a:solidFill>
-                  <a:srgbClr val="1C1C1C"/>
-                </a:solidFill>
-                <a:effectLst/>
-                <a:uFillTx/>
-                <a:latin typeface="SRH Text"/>
-                <a:ea typeface="SRH Text"/>
-              </a:rPr>
-              <a:t>🔴 AUTO REJECT</a:t>
-            </a:r>
-            <a:r>
-              <a:rPr lang="en-US" sz="1300" b="1" u="none" strike="noStrike">
-                <a:solidFill>
-                  <a:srgbClr val="1C1C1C"/>
-                </a:solidFill>
-                <a:effectLst/>
-                <a:uFillTx/>
-                <a:latin typeface="SRH Text"/>
-                <a:ea typeface="SRH Text"/>
-              </a:rPr>
-              <a:t>(  high-risk  )                                  </a:t>
-            </a:r>
-            <a:endParaRPr lang="de-DE" sz="1300" b="0" u="none" strike="noStrike">
-              <a:solidFill>
-                <a:schemeClr val="dk1"/>
-              </a:solidFill>
-              <a:effectLst/>
-              <a:uFillTx/>
-              <a:latin typeface="SRH Text"/>
-            </a:endParaRPr>
-          </a:p>
-          <a:p>
-            <a:pPr marL="285840" indent="0" algn="l" defTabSz="914400">
-              <a:lnSpc>
-                <a:spcPct val="150000"/>
-              </a:lnSpc>
-              <a:spcBef>
-                <a:spcPts val="1191"/>
-              </a:spcBef>
-              <a:spcAft>
-                <a:spcPts val="992"/>
-              </a:spcAft>
-              <a:buNone/>
-              <a:tabLst>
-                <a:tab pos="0" algn="l"/>
-              </a:tabLst>
-            </a:pPr>
-            <a:endParaRPr lang="de-DE" sz="1300" b="0" u="none" strike="noStrike">
-              <a:solidFill>
-                <a:schemeClr val="dk1"/>
-              </a:solidFill>
-              <a:effectLst/>
-              <a:uFillTx/>
-              <a:latin typeface="SRH Text"/>
-            </a:endParaRPr>
-          </a:p>
-          <a:p>
-            <a:pPr marL="285840" indent="0" algn="l" defTabSz="914400">
-              <a:lnSpc>
-                <a:spcPct val="150000"/>
-              </a:lnSpc>
-              <a:spcBef>
-                <a:spcPts val="1191"/>
-              </a:spcBef>
-              <a:spcAft>
-                <a:spcPts val="992"/>
-              </a:spcAft>
-              <a:buNone/>
-              <a:tabLst>
-                <a:tab pos="0" algn="l"/>
-              </a:tabLst>
-            </a:pPr>
-            <a:endParaRPr lang="de-DE" sz="1300" b="0" u="none" strike="noStrike">
+              <a:t>Cumulative importance of top 20 features: 98.83% </a:t>
+            </a:r>
+            <a:endParaRPr lang="de-DE" sz="1400" b="0" u="none" strike="noStrike">
               <a:solidFill>
                 <a:schemeClr val="dk1"/>
               </a:solidFill>
@@ -39018,7 +38827,7 @@
       </p:sp>
       <p:sp>
         <p:nvSpPr>
-          <p:cNvPr id="322" name="PlaceHolder 3"/>
+          <p:cNvPr id="321" name="PlaceHolder 3"/>
           <p:cNvSpPr>
             <a:spLocks noGrp="1"/>
           </p:cNvSpPr>
@@ -39073,7 +38882,7 @@
                 <a:tab pos="0" algn="l"/>
               </a:tabLst>
             </a:pPr>
-            <a:fld id="{DDA89A3F-6740-40B5-9015-12464FB3E8A7}" type="datetime1">
+            <a:fld id="{2598994B-B4AC-489D-ACEA-8D4A10EF2496}" type="datetime1">
               <a:rPr lang="en-CA" sz="900" b="1" u="none" strike="noStrike">
                 <a:solidFill>
                   <a:srgbClr val="6D7373"/>
@@ -39083,7 +38892,7 @@
                 <a:latin typeface="SRH Text"/>
                 <a:ea typeface="SRH"/>
               </a:rPr>
-              <a:t>2026-09-11</a:t>
+              <a:t>2026-09-12</a:t>
             </a:fld>
             <a:endParaRPr lang="en-US" sz="900" b="0" u="none" strike="noStrike">
               <a:solidFill>
@@ -39098,7 +38907,7 @@
       </p:sp>
       <p:sp>
         <p:nvSpPr>
-          <p:cNvPr id="323" name="PlaceHolder 4"/>
+          <p:cNvPr id="322" name="PlaceHolder 4"/>
           <p:cNvSpPr>
             <a:spLocks noGrp="1"/>
           </p:cNvSpPr>
@@ -39178,7 +38987,7 @@
       </p:sp>
       <p:sp>
         <p:nvSpPr>
-          <p:cNvPr id="324" name="PlaceHolder 5"/>
+          <p:cNvPr id="323" name="PlaceHolder 5"/>
           <p:cNvSpPr>
             <a:spLocks noGrp="1"/>
           </p:cNvSpPr>
@@ -39233,7 +39042,7 @@
                 <a:tab pos="0" algn="l"/>
               </a:tabLst>
             </a:pPr>
-            <a:fld id="{17E299BC-C000-4C3E-B18E-AED58F4ADCD4}" type="slidenum">
+            <a:fld id="{305BF4AB-4B1A-44C8-BE22-B92ACAEA5758}" type="slidenum">
               <a:rPr lang="de-DE" sz="1550" b="1" u="none" strike="noStrike">
                 <a:solidFill>
                   <a:srgbClr val="6D7373"/>
@@ -39243,7 +39052,7 @@
                 <a:latin typeface="SRH Text"/>
                 <a:ea typeface="SRH"/>
               </a:rPr>
-              <a:t>13</a:t>
+              <a:t>&lt;number&gt;</a:t>
             </a:fld>
             <a:endParaRPr lang="en-US" sz="1550" b="0" u="none" strike="noStrike">
               <a:solidFill>
@@ -39258,7 +39067,7 @@
       </p:sp>
       <p:pic>
         <p:nvPicPr>
-          <p:cNvPr id="325" name=""/>
+          <p:cNvPr id="324" name=""/>
           <p:cNvPicPr/>
           <p:nvPr/>
         </p:nvPicPr>
@@ -39268,8 +39077,8 @@
         </p:blipFill>
         <p:spPr>
           <a:xfrm>
-            <a:off x="2857680" y="5014440"/>
-            <a:ext cx="4914720" cy="1386360"/>
+            <a:off x="5729400" y="1009800"/>
+            <a:ext cx="4941720" cy="5713920"/>
           </a:xfrm>
           <a:prstGeom prst="rect">
             <a:avLst/>
@@ -39312,7 +39121,7 @@
       </p:grpSpPr>
       <p:sp>
         <p:nvSpPr>
-          <p:cNvPr id="326" name="PlaceHolder 1"/>
+          <p:cNvPr id="325" name="PlaceHolder 1"/>
           <p:cNvSpPr>
             <a:spLocks noGrp="1"/>
           </p:cNvSpPr>
@@ -39338,9 +39147,9 @@
             <a:noAutofit/>
           </a:bodyPr>
           <a:p>
-            <a:pPr marL="285840" indent="0" algn="l" defTabSz="914400">
-              <a:lnSpc>
-                <a:spcPct val="150000"/>
+            <a:pPr indent="0" algn="l" defTabSz="914400">
+              <a:lnSpc>
+                <a:spcPct val="100000"/>
               </a:lnSpc>
               <a:spcBef>
                 <a:spcPts val="1191"/>
@@ -39354,16 +39163,16 @@
               </a:tabLst>
             </a:pPr>
             <a:r>
-              <a:rPr lang="en-US" sz="2600" b="1" u="none" strike="noStrike">
+              <a:rPr lang="de-DE" sz="2600" b="1" u="none" strike="noStrike">
                 <a:solidFill>
                   <a:srgbClr val="FF4000"/>
                 </a:solidFill>
                 <a:effectLst/>
                 <a:uFillTx/>
-                <a:latin typeface="SRH Text"/>
-                <a:ea typeface="SRH Text"/>
-              </a:rPr>
-              <a:t>Selective Prediction — Test Set Results </a:t>
+                <a:latin typeface="SRH Headline"/>
+                <a:ea typeface="SRH Headline"/>
+              </a:rPr>
+              <a:t>Selective Prediction Framework</a:t>
             </a:r>
             <a:endParaRPr lang="de-DE" sz="2600" b="1" u="none" strike="noStrike">
               <a:solidFill>
@@ -39378,7 +39187,7 @@
       </p:sp>
       <p:sp>
         <p:nvSpPr>
-          <p:cNvPr id="327" name="PlaceHolder 2"/>
+          <p:cNvPr id="326" name="PlaceHolder 2"/>
           <p:cNvSpPr>
             <a:spLocks noGrp="1"/>
           </p:cNvSpPr>
@@ -39388,8 +39197,8 @@
         </p:nvSpPr>
         <p:spPr>
           <a:xfrm>
-            <a:off x="228600" y="696600"/>
-            <a:ext cx="3656520" cy="5245920"/>
+            <a:off x="228600" y="914400"/>
+            <a:ext cx="11200320" cy="5814360"/>
           </a:xfrm>
           <a:prstGeom prst="rect">
             <a:avLst/>
@@ -39404,31 +39213,9 @@
             <a:noAutofit/>
           </a:bodyPr>
           <a:p>
-            <a:pPr indent="0" algn="l" defTabSz="914400">
-              <a:lnSpc>
-                <a:spcPct val="110000"/>
-              </a:lnSpc>
-              <a:spcBef>
-                <a:spcPts val="1199"/>
-              </a:spcBef>
-              <a:buNone/>
-              <a:tabLst>
-                <a:tab pos="0" algn="l"/>
-              </a:tabLst>
-            </a:pPr>
-            <a:endParaRPr lang="de-DE" sz="1300" b="0" u="none" strike="noStrike">
-              <a:solidFill>
-                <a:schemeClr val="dk1"/>
-              </a:solidFill>
-              <a:effectLst/>
-              <a:uFillTx/>
-              <a:latin typeface="SRH Text"/>
-            </a:endParaRPr>
-          </a:p>
-          <a:p>
-            <a:pPr indent="0" algn="l" defTabSz="914400">
-              <a:lnSpc>
-                <a:spcPct val="110000"/>
+            <a:pPr marL="285840" indent="0" algn="l" defTabSz="914400">
+              <a:lnSpc>
+                <a:spcPct val="150000"/>
               </a:lnSpc>
               <a:spcBef>
                 <a:spcPts val="1191"/>
@@ -39442,16 +39229,16 @@
               </a:tabLst>
             </a:pPr>
             <a:r>
-              <a:rPr lang="de-DE" sz="1300" b="1" u="none" strike="noStrike">
-                <a:solidFill>
-                  <a:schemeClr val="dk1"/>
+              <a:rPr lang="en-US" sz="1300" b="0" u="none" strike="noStrike">
+                <a:solidFill>
+                  <a:srgbClr val="1C1C1C"/>
                 </a:solidFill>
                 <a:effectLst/>
                 <a:uFillTx/>
                 <a:latin typeface="SRH Text"/>
                 <a:ea typeface="SRH Text"/>
               </a:rPr>
-              <a:t>Test-Set Decision Distribution</a:t>
+              <a:t>Traditional classification forces an automatic decision for every applicant.</a:t>
             </a:r>
             <a:endParaRPr lang="de-DE" sz="1300" b="0" u="none" strike="noStrike">
               <a:solidFill>
@@ -39463,9 +39250,9 @@
             </a:endParaRPr>
           </a:p>
           <a:p>
-            <a:pPr indent="0" algn="l" defTabSz="914400">
-              <a:lnSpc>
-                <a:spcPct val="110000"/>
+            <a:pPr marL="285840" indent="0" algn="l" defTabSz="914400">
+              <a:lnSpc>
+                <a:spcPct val="150000"/>
               </a:lnSpc>
               <a:spcBef>
                 <a:spcPts val="1191"/>
@@ -39479,16 +39266,16 @@
               </a:tabLst>
             </a:pPr>
             <a:r>
-              <a:rPr lang="de-DE" sz="1300" b="0" u="none" strike="noStrike">
-                <a:solidFill>
-                  <a:schemeClr val="dk1"/>
+              <a:rPr lang="en-US" sz="1300" b="0" u="none" strike="noStrike">
+                <a:solidFill>
+                  <a:srgbClr val="1C1C1C"/>
                 </a:solidFill>
                 <a:effectLst/>
                 <a:uFillTx/>
                 <a:latin typeface="SRH Text"/>
                 <a:ea typeface="SRH Text"/>
               </a:rPr>
-              <a:t>Auto Accept: 1,780 (35.60%)</a:t>
+              <a:t>My approach: allow the model to abstain from uncertain cases and refer them to human loan officers.</a:t>
             </a:r>
             <a:endParaRPr lang="de-DE" sz="1300" b="0" u="none" strike="noStrike">
               <a:solidFill>
@@ -39500,9 +39287,9 @@
             </a:endParaRPr>
           </a:p>
           <a:p>
-            <a:pPr indent="0" algn="l" defTabSz="914400">
-              <a:lnSpc>
-                <a:spcPct val="110000"/>
+            <a:pPr marL="285840" indent="0" algn="l" defTabSz="914400">
+              <a:lnSpc>
+                <a:spcPct val="150000"/>
               </a:lnSpc>
               <a:spcBef>
                 <a:spcPts val="1191"/>
@@ -39516,16 +39303,16 @@
               </a:tabLst>
             </a:pPr>
             <a:r>
-              <a:rPr lang="de-DE" sz="1300" b="0" u="none" strike="noStrike">
-                <a:solidFill>
-                  <a:schemeClr val="dk1"/>
+              <a:rPr lang="en-US" sz="1300" b="0" u="none" strike="noStrike">
+                <a:solidFill>
+                  <a:srgbClr val="1C1C1C"/>
                 </a:solidFill>
                 <a:effectLst/>
                 <a:uFillTx/>
                 <a:latin typeface="SRH Text"/>
                 <a:ea typeface="SRH Text"/>
               </a:rPr>
-              <a:t>Auto Reject: 2,604 (52.08%)</a:t>
+              <a:t>Two-Threshold Decision Policy:</a:t>
             </a:r>
             <a:endParaRPr lang="de-DE" sz="1300" b="0" u="none" strike="noStrike">
               <a:solidFill>
@@ -39537,9 +39324,9 @@
             </a:endParaRPr>
           </a:p>
           <a:p>
-            <a:pPr indent="0" algn="l" defTabSz="914400">
-              <a:lnSpc>
-                <a:spcPct val="110000"/>
+            <a:pPr marL="285840" indent="0" algn="l" defTabSz="914400">
+              <a:lnSpc>
+                <a:spcPct val="150000"/>
               </a:lnSpc>
               <a:spcBef>
                 <a:spcPts val="1191"/>
@@ -39553,16 +39340,64 @@
               </a:tabLst>
             </a:pPr>
             <a:r>
-              <a:rPr lang="de-DE" sz="1300" b="0" u="none" strike="noStrike">
-                <a:solidFill>
-                  <a:schemeClr val="dk1"/>
+              <a:rPr lang="en-US" sz="1300" b="0" u="none" strike="noStrike">
+                <a:solidFill>
+                  <a:srgbClr val="1C1C1C"/>
                 </a:solidFill>
                 <a:effectLst/>
                 <a:uFillTx/>
                 <a:latin typeface="SRH Text"/>
                 <a:ea typeface="SRH Text"/>
               </a:rPr>
-              <a:t>Manual Review: 616 (12.32%)</a:t>
+              <a:t> </a:t>
+            </a:r>
+            <a:r>
+              <a:rPr lang="en-US" sz="1300" b="1" u="none" strike="noStrike">
+                <a:solidFill>
+                  <a:srgbClr val="1C1C1C"/>
+                </a:solidFill>
+                <a:effectLst/>
+                <a:uFillTx/>
+                <a:latin typeface="SRH Text"/>
+                <a:ea typeface="SRH Text"/>
+              </a:rPr>
+              <a:t>Probability of Default &lt; thresholds t₁     </a:t>
+            </a:r>
+            <a:r>
+              <a:rPr lang="en-US" sz="1300" b="0" u="none" strike="noStrike">
+                <a:solidFill>
+                  <a:srgbClr val="1C1C1C"/>
+                </a:solidFill>
+                <a:effectLst/>
+                <a:uFillTx/>
+                <a:latin typeface="SRH Text"/>
+                <a:ea typeface="SRH Text"/>
+              </a:rPr>
+              <a:t>🟢 AUTO APPROVE</a:t>
+            </a:r>
+            <a:r>
+              <a:rPr lang="en-US" sz="1300" b="1" u="none" strike="noStrike">
+                <a:solidFill>
+                  <a:srgbClr val="1C1C1C"/>
+                </a:solidFill>
+                <a:effectLst/>
+                <a:uFillTx/>
+                <a:latin typeface="SRH Text"/>
+                <a:ea typeface="SRH Text"/>
+              </a:rPr>
+              <a:t>  (  low-risk  )                                </a:t>
+            </a:r>
+            <a:r>
+              <a:rPr lang="en-US" sz="1300" b="1" u="none" strike="noStrike">
+                <a:solidFill>
+                  <a:srgbClr val="FF4000"/>
+                </a:solidFill>
+                <a:effectLst/>
+                <a:uFillTx/>
+                <a:latin typeface="SRH Text"/>
+                <a:ea typeface="SRH Text"/>
+              </a:rPr>
+              <a:t>                                                                                                                                                   </a:t>
             </a:r>
             <a:endParaRPr lang="de-DE" sz="1300" b="0" u="none" strike="noStrike">
               <a:solidFill>
@@ -39574,141 +39409,9 @@
             </a:endParaRPr>
           </a:p>
           <a:p>
-            <a:pPr indent="0" algn="l" defTabSz="914400">
-              <a:lnSpc>
-                <a:spcPct val="110000"/>
-              </a:lnSpc>
-              <a:spcBef>
-                <a:spcPts val="1199"/>
-              </a:spcBef>
-              <a:buNone/>
-              <a:tabLst>
-                <a:tab pos="0" algn="l"/>
-              </a:tabLst>
-            </a:pPr>
-            <a:endParaRPr lang="de-DE" sz="1300" b="0" u="none" strike="noStrike">
-              <a:solidFill>
-                <a:schemeClr val="dk1"/>
-              </a:solidFill>
-              <a:effectLst/>
-              <a:uFillTx/>
-              <a:latin typeface="SRH Text"/>
-            </a:endParaRPr>
-          </a:p>
-          <a:p>
-            <a:pPr indent="0" algn="l" defTabSz="914400">
-              <a:lnSpc>
-                <a:spcPct val="110000"/>
-              </a:lnSpc>
-              <a:spcBef>
-                <a:spcPts val="1199"/>
-              </a:spcBef>
-              <a:buNone/>
-              <a:tabLst>
-                <a:tab pos="0" algn="l"/>
-              </a:tabLst>
-            </a:pPr>
-            <a:endParaRPr lang="de-DE" sz="1300" b="0" u="none" strike="noStrike">
-              <a:solidFill>
-                <a:schemeClr val="dk1"/>
-              </a:solidFill>
-              <a:effectLst/>
-              <a:uFillTx/>
-              <a:latin typeface="SRH Text"/>
-            </a:endParaRPr>
-          </a:p>
-          <a:p>
-            <a:pPr indent="0" algn="l" defTabSz="914400">
-              <a:lnSpc>
-                <a:spcPct val="110000"/>
-              </a:lnSpc>
-              <a:spcBef>
-                <a:spcPts val="1199"/>
-              </a:spcBef>
-              <a:buNone/>
-              <a:tabLst>
-                <a:tab pos="0" algn="l"/>
-              </a:tabLst>
-            </a:pPr>
-            <a:endParaRPr lang="de-DE" sz="1300" b="0" u="none" strike="noStrike">
-              <a:solidFill>
-                <a:schemeClr val="dk1"/>
-              </a:solidFill>
-              <a:effectLst/>
-              <a:uFillTx/>
-              <a:latin typeface="SRH Text"/>
-            </a:endParaRPr>
-          </a:p>
-          <a:p>
-            <a:pPr indent="0" algn="l" defTabSz="914400">
-              <a:lnSpc>
-                <a:spcPct val="110000"/>
-              </a:lnSpc>
-              <a:spcBef>
-                <a:spcPts val="1199"/>
-              </a:spcBef>
-              <a:buNone/>
-              <a:tabLst>
-                <a:tab pos="0" algn="l"/>
-              </a:tabLst>
-            </a:pPr>
-            <a:endParaRPr lang="de-DE" sz="1300" b="0" u="none" strike="noStrike">
-              <a:solidFill>
-                <a:schemeClr val="dk1"/>
-              </a:solidFill>
-              <a:effectLst/>
-              <a:uFillTx/>
-              <a:latin typeface="SRH Text"/>
-            </a:endParaRPr>
-          </a:p>
-          <a:p>
-            <a:pPr indent="0" algn="l" defTabSz="914400">
-              <a:lnSpc>
-                <a:spcPct val="110000"/>
-              </a:lnSpc>
-              <a:spcBef>
-                <a:spcPts val="1199"/>
-              </a:spcBef>
-              <a:buNone/>
-              <a:tabLst>
-                <a:tab pos="0" algn="l"/>
-              </a:tabLst>
-            </a:pPr>
-            <a:endParaRPr lang="de-DE" sz="1300" b="0" u="none" strike="noStrike">
-              <a:solidFill>
-                <a:schemeClr val="dk1"/>
-              </a:solidFill>
-              <a:effectLst/>
-              <a:uFillTx/>
-              <a:latin typeface="SRH Text"/>
-            </a:endParaRPr>
-          </a:p>
-          <a:p>
-            <a:pPr indent="0" algn="l" defTabSz="914400">
-              <a:lnSpc>
-                <a:spcPct val="110000"/>
-              </a:lnSpc>
-              <a:spcBef>
-                <a:spcPts val="1199"/>
-              </a:spcBef>
-              <a:buNone/>
-              <a:tabLst>
-                <a:tab pos="0" algn="l"/>
-              </a:tabLst>
-            </a:pPr>
-            <a:endParaRPr lang="de-DE" sz="1300" b="0" u="none" strike="noStrike">
-              <a:solidFill>
-                <a:schemeClr val="dk1"/>
-              </a:solidFill>
-              <a:effectLst/>
-              <a:uFillTx/>
-              <a:latin typeface="SRH Text"/>
-            </a:endParaRPr>
-          </a:p>
-          <a:p>
-            <a:pPr indent="0" algn="l" defTabSz="914400">
-              <a:lnSpc>
-                <a:spcPct val="110000"/>
+            <a:pPr marL="285840" indent="0" algn="l" defTabSz="914400">
+              <a:lnSpc>
+                <a:spcPct val="150000"/>
               </a:lnSpc>
               <a:spcBef>
                 <a:spcPts val="1191"/>
@@ -39721,6 +39424,66 @@
                 <a:tab pos="0" algn="l"/>
               </a:tabLst>
             </a:pPr>
+            <a:r>
+              <a:rPr lang="en-US" sz="1300" b="1" u="none" strike="noStrike">
+                <a:solidFill>
+                  <a:srgbClr val="1C1C1C"/>
+                </a:solidFill>
+                <a:effectLst/>
+                <a:uFillTx/>
+                <a:latin typeface="SRH Text"/>
+                <a:ea typeface="SRH Text"/>
+              </a:rPr>
+              <a:t>thresholds t₁ ≤ Probability of Default ≤ thresholds t₂</a:t>
+            </a:r>
+            <a:r>
+              <a:rPr lang="en-US" sz="1300" b="1" u="none" strike="noStrike">
+                <a:solidFill>
+                  <a:srgbClr val="FF4000"/>
+                </a:solidFill>
+                <a:effectLst/>
+                <a:uFillTx/>
+                <a:latin typeface="SRH Text"/>
+                <a:ea typeface="SRH Text"/>
+              </a:rPr>
+              <a:t>     </a:t>
+            </a:r>
+            <a:r>
+              <a:rPr lang="en-US" sz="1300" b="0" u="none" strike="noStrike">
+                <a:solidFill>
+                  <a:srgbClr val="1C1C1C"/>
+                </a:solidFill>
+                <a:effectLst/>
+                <a:uFillTx/>
+                <a:latin typeface="SRH Text"/>
+                <a:ea typeface="SRH Text"/>
+              </a:rPr>
+              <a:t>🟠 MANUAL REVIEW </a:t>
+            </a:r>
+            <a:r>
+              <a:rPr lang="en-US" sz="1300" b="1" u="none" strike="noStrike">
+                <a:solidFill>
+                  <a:srgbClr val="1C1C1C"/>
+                </a:solidFill>
+                <a:effectLst/>
+                <a:uFillTx/>
+                <a:latin typeface="SRH Text"/>
+                <a:ea typeface="SRH Text"/>
+              </a:rPr>
+              <a:t>(  uncertain )</a:t>
+            </a:r>
+            <a:r>
+              <a:rPr lang="en-US" sz="1300" b="1" u="none" strike="noStrike">
+                <a:solidFill>
+                  <a:srgbClr val="FF4000"/>
+                </a:solidFill>
+                <a:effectLst/>
+                <a:uFillTx/>
+                <a:latin typeface="SRH Text"/>
+                <a:ea typeface="SRH Text"/>
+              </a:rPr>
+              <a:t>                                                                                                                                                                     </a:t>
+            </a:r>
             <a:endParaRPr lang="de-DE" sz="1300" b="0" u="none" strike="noStrike">
               <a:solidFill>
                 <a:schemeClr val="dk1"/>
@@ -39731,9 +39494,9 @@
             </a:endParaRPr>
           </a:p>
           <a:p>
-            <a:pPr indent="0" algn="l" defTabSz="914400">
-              <a:lnSpc>
-                <a:spcPct val="110000"/>
+            <a:pPr marL="285840" indent="0" algn="l" defTabSz="914400">
+              <a:lnSpc>
+                <a:spcPct val="150000"/>
               </a:lnSpc>
               <a:spcBef>
                 <a:spcPts val="1191"/>
@@ -39746,6 +39509,54 @@
                 <a:tab pos="0" algn="l"/>
               </a:tabLst>
             </a:pPr>
+            <a:r>
+              <a:rPr lang="en-US" sz="1300" b="0" u="none" strike="noStrike">
+                <a:solidFill>
+                  <a:srgbClr val="1C1C1C"/>
+                </a:solidFill>
+                <a:effectLst/>
+                <a:uFillTx/>
+                <a:latin typeface="SRH Text"/>
+                <a:ea typeface="SRH Text"/>
+              </a:rPr>
+              <a:t> </a:t>
+            </a:r>
+            <a:r>
+              <a:rPr lang="en-US" sz="1300" b="1" u="none" strike="noStrike">
+                <a:solidFill>
+                  <a:srgbClr val="1C1C1C"/>
+                </a:solidFill>
+                <a:effectLst/>
+                <a:uFillTx/>
+                <a:latin typeface="SRH Text"/>
+                <a:ea typeface="SRH Text"/>
+              </a:rPr>
+              <a:t>Probability of Default &gt; thresholds t₂     </a:t>
+            </a:r>
+            <a:r>
+              <a:rPr lang="en-US" sz="1300" b="0" u="none" strike="noStrike">
+                <a:solidFill>
+                  <a:srgbClr val="1C1C1C"/>
+                </a:solidFill>
+                <a:effectLst/>
+                <a:uFillTx/>
+                <a:latin typeface="SRH Text"/>
+                <a:ea typeface="SRH Text"/>
+              </a:rPr>
+              <a:t>🔴 AUTO REJECT</a:t>
+            </a:r>
+            <a:r>
+              <a:rPr lang="en-US" sz="1300" b="1" u="none" strike="noStrike">
+                <a:solidFill>
+                  <a:srgbClr val="1C1C1C"/>
+                </a:solidFill>
+                <a:effectLst/>
+                <a:uFillTx/>
+                <a:latin typeface="SRH Text"/>
+                <a:ea typeface="SRH Text"/>
+              </a:rPr>
+              <a:t>(  high-risk  )                                  </a:t>
+            </a:r>
             <a:endParaRPr lang="de-DE" sz="1300" b="0" u="none" strike="noStrike">
               <a:solidFill>
                 <a:schemeClr val="dk1"/>
@@ -39756,9 +39567,34 @@
             </a:endParaRPr>
           </a:p>
           <a:p>
-            <a:pPr indent="0" algn="l" defTabSz="914400">
-              <a:lnSpc>
-                <a:spcPct val="110000"/>
+            <a:pPr marL="285840" indent="0" algn="l" defTabSz="914400">
+              <a:lnSpc>
+                <a:spcPct val="150000"/>
+              </a:lnSpc>
+              <a:spcBef>
+                <a:spcPts val="1191"/>
+              </a:spcBef>
+              <a:spcAft>
+                <a:spcPts val="992"/>
+              </a:spcAft>
+              <a:buNone/>
+              <a:tabLst>
+                <a:tab pos="0" algn="l"/>
+              </a:tabLst>
+            </a:pPr>
+            <a:endParaRPr lang="de-DE" sz="1300" b="0" u="none" strike="noStrike">
+              <a:solidFill>
+                <a:schemeClr val="dk1"/>
+              </a:solidFill>
+              <a:effectLst/>
+              <a:uFillTx/>
+              <a:latin typeface="SRH Text"/>
+            </a:endParaRPr>
+          </a:p>
+          <a:p>
+            <a:pPr marL="285840" indent="0" algn="l" defTabSz="914400">
+              <a:lnSpc>
+                <a:spcPct val="150000"/>
               </a:lnSpc>
               <a:spcBef>
                 <a:spcPts val="1191"/>
@@ -39784,7 +39620,7 @@
       </p:sp>
       <p:sp>
         <p:nvSpPr>
-          <p:cNvPr id="328" name="PlaceHolder 3"/>
+          <p:cNvPr id="327" name="PlaceHolder 3"/>
           <p:cNvSpPr>
             <a:spLocks noGrp="1"/>
           </p:cNvSpPr>
@@ -39839,7 +39675,7 @@
                 <a:tab pos="0" algn="l"/>
               </a:tabLst>
             </a:pPr>
-            <a:fld id="{121EDE80-9009-4DDD-B918-020A4CA74655}" type="datetime1">
+            <a:fld id="{23532F78-89C6-44DD-857A-3DF71E9A0173}" type="datetime1">
               <a:rPr lang="en-CA" sz="900" b="1" u="none" strike="noStrike">
                 <a:solidFill>
                   <a:srgbClr val="6D7373"/>
@@ -39849,7 +39685,7 @@
                 <a:latin typeface="SRH Text"/>
                 <a:ea typeface="SRH"/>
               </a:rPr>
-              <a:t>2026-09-11</a:t>
+              <a:t>2026-09-12</a:t>
             </a:fld>
             <a:endParaRPr lang="en-US" sz="900" b="0" u="none" strike="noStrike">
               <a:solidFill>
@@ -39864,7 +39700,7 @@
       </p:sp>
       <p:sp>
         <p:nvSpPr>
-          <p:cNvPr id="329" name="PlaceHolder 4"/>
+          <p:cNvPr id="328" name="PlaceHolder 4"/>
           <p:cNvSpPr>
             <a:spLocks noGrp="1"/>
           </p:cNvSpPr>
@@ -39944,7 +39780,7 @@
       </p:sp>
       <p:sp>
         <p:nvSpPr>
-          <p:cNvPr id="330" name="PlaceHolder 5"/>
+          <p:cNvPr id="329" name="PlaceHolder 5"/>
           <p:cNvSpPr>
             <a:spLocks noGrp="1"/>
           </p:cNvSpPr>
@@ -39999,7 +39835,7 @@
                 <a:tab pos="0" algn="l"/>
               </a:tabLst>
             </a:pPr>
-            <a:fld id="{41B89B64-F15D-4455-95B1-314BD56E3AD0}" type="slidenum">
+            <a:fld id="{031A8103-AE6C-4D37-AAE7-0100ED223D48}" type="slidenum">
               <a:rPr lang="de-DE" sz="1550" b="1" u="none" strike="noStrike">
                 <a:solidFill>
                   <a:srgbClr val="6D7373"/>
@@ -40009,7 +39845,7 @@
                 <a:latin typeface="SRH Text"/>
                 <a:ea typeface="SRH"/>
               </a:rPr>
-              <a:t>13</a:t>
+              <a:t>&lt;number&gt;</a:t>
             </a:fld>
             <a:endParaRPr lang="en-US" sz="1550" b="0" u="none" strike="noStrike">
               <a:solidFill>
@@ -40024,7 +39860,7 @@
       </p:sp>
       <p:pic>
         <p:nvPicPr>
-          <p:cNvPr id="331" name=""/>
+          <p:cNvPr id="330" name=""/>
           <p:cNvPicPr/>
           <p:nvPr/>
         </p:nvPicPr>
@@ -40034,8 +39870,8 @@
         </p:blipFill>
         <p:spPr>
           <a:xfrm>
-            <a:off x="4212000" y="1143000"/>
-            <a:ext cx="6988320" cy="5256720"/>
+            <a:off x="2857680" y="5014440"/>
+            <a:ext cx="4914720" cy="1386360"/>
           </a:xfrm>
           <a:prstGeom prst="rect">
             <a:avLst/>
@@ -40078,7 +39914,7 @@
       </p:grpSpPr>
       <p:sp>
         <p:nvSpPr>
-          <p:cNvPr id="332" name="PlaceHolder 1"/>
+          <p:cNvPr id="331" name="PlaceHolder 1"/>
           <p:cNvSpPr>
             <a:spLocks noGrp="1"/>
           </p:cNvSpPr>
@@ -40144,7 +39980,413 @@
       </p:sp>
       <p:sp>
         <p:nvSpPr>
-          <p:cNvPr id="333" name="PlaceHolder 2"/>
+          <p:cNvPr id="332" name="PlaceHolder 2"/>
+          <p:cNvSpPr>
+            <a:spLocks noGrp="1"/>
+          </p:cNvSpPr>
+          <p:nvPr>
+            <p:ph/>
+          </p:nvPr>
+        </p:nvSpPr>
+        <p:spPr>
+          <a:xfrm>
+            <a:off x="228600" y="696600"/>
+            <a:ext cx="3656520" cy="5245920"/>
+          </a:xfrm>
+          <a:prstGeom prst="rect">
+            <a:avLst/>
+          </a:prstGeom>
+          <a:noFill/>
+          <a:ln w="0">
+            <a:noFill/>
+          </a:ln>
+        </p:spPr>
+        <p:txBody>
+          <a:bodyPr numCol="1" spcCol="216000" lIns="0" tIns="0" rIns="0" bIns="0" anchor="t">
+            <a:noAutofit/>
+          </a:bodyPr>
+          <a:p>
+            <a:pPr indent="0" algn="l" defTabSz="914400">
+              <a:lnSpc>
+                <a:spcPct val="110000"/>
+              </a:lnSpc>
+              <a:spcBef>
+                <a:spcPts val="1199"/>
+              </a:spcBef>
+              <a:buNone/>
+              <a:tabLst>
+                <a:tab pos="0" algn="l"/>
+              </a:tabLst>
+            </a:pPr>
+            <a:endParaRPr lang="de-DE" sz="1300" b="0" u="none" strike="noStrike">
+              <a:solidFill>
+                <a:schemeClr val="dk1"/>
+              </a:solidFill>
+              <a:effectLst/>
+              <a:uFillTx/>
+              <a:latin typeface="SRH Text"/>
+            </a:endParaRPr>
+          </a:p>
+          <a:p>
+            <a:pPr indent="0" algn="l" defTabSz="914400">
+              <a:lnSpc>
+                <a:spcPct val="110000"/>
+              </a:lnSpc>
+              <a:spcBef>
+                <a:spcPts val="1191"/>
+              </a:spcBef>
+              <a:spcAft>
+                <a:spcPts val="992"/>
+              </a:spcAft>
+              <a:buNone/>
+              <a:tabLst>
+                <a:tab pos="0" algn="l"/>
+              </a:tabLst>
+            </a:pPr>
+            <a:r>
+              <a:rPr lang="de-DE" sz="1300" b="1" u="none" strike="noStrike">
+                <a:solidFill>
+                  <a:schemeClr val="dk1"/>
+                </a:solidFill>
+                <a:effectLst/>
+                <a:uFillTx/>
+                <a:latin typeface="SRH Text"/>
+                <a:ea typeface="SRH Text"/>
+              </a:rPr>
+              <a:t>Test-Set Decision Distribution</a:t>
+            </a:r>
+            <a:endParaRPr lang="de-DE" sz="1300" b="0" u="none" strike="noStrike">
+              <a:solidFill>
+                <a:schemeClr val="dk1"/>
+              </a:solidFill>
+              <a:effectLst/>
+              <a:uFillTx/>
+              <a:latin typeface="SRH Text"/>
+            </a:endParaRPr>
+          </a:p>
+          <a:p>
+            <a:pPr indent="0" algn="l" defTabSz="914400">
+              <a:lnSpc>
+                <a:spcPct val="110000"/>
+              </a:lnSpc>
+              <a:spcBef>
+                <a:spcPts val="1191"/>
+              </a:spcBef>
+              <a:spcAft>
+                <a:spcPts val="992"/>
+              </a:spcAft>
+              <a:buNone/>
+              <a:tabLst>
+                <a:tab pos="0" algn="l"/>
+              </a:tabLst>
+            </a:pPr>
+            <a:r>
+              <a:rPr lang="de-DE" sz="1300" b="0" u="none" strike="noStrike">
+                <a:solidFill>
+                  <a:schemeClr val="dk1"/>
+                </a:solidFill>
+                <a:effectLst/>
+                <a:uFillTx/>
+                <a:latin typeface="SRH Text"/>
+                <a:ea typeface="SRH Text"/>
+              </a:rPr>
+              <a:t>Auto Accept: 1,780 (35.60%)</a:t>
+            </a:r>
+            <a:endParaRPr lang="de-DE" sz="1300" b="0" u="none" strike="noStrike">
+              <a:solidFill>
+                <a:schemeClr val="dk1"/>
+              </a:solidFill>
+              <a:effectLst/>
+              <a:uFillTx/>
+              <a:latin typeface="SRH Text"/>
+            </a:endParaRPr>
+          </a:p>
+          <a:p>
+            <a:pPr indent="0" algn="l" defTabSz="914400">
+              <a:lnSpc>
+                <a:spcPct val="110000"/>
+              </a:lnSpc>
+              <a:spcBef>
+                <a:spcPts val="1191"/>
+              </a:spcBef>
+              <a:spcAft>
+                <a:spcPts val="992"/>
+              </a:spcAft>
+              <a:buNone/>
+              <a:tabLst>
+                <a:tab pos="0" algn="l"/>
+              </a:tabLst>
+            </a:pPr>
+            <a:r>
+              <a:rPr lang="de-DE" sz="1300" b="0" u="none" strike="noStrike">
+                <a:solidFill>
+                  <a:schemeClr val="dk1"/>
+                </a:solidFill>
+                <a:effectLst/>
+                <a:uFillTx/>
+                <a:latin typeface="SRH Text"/>
+                <a:ea typeface="SRH Text"/>
+              </a:rPr>
+              <a:t>Auto Reject: 2,604 (52.08%)</a:t>
+            </a:r>
+            <a:endParaRPr lang="de-DE" sz="1300" b="0" u="none" strike="noStrike">
+              <a:solidFill>
+                <a:schemeClr val="dk1"/>
+              </a:solidFill>
+              <a:effectLst/>
+              <a:uFillTx/>
+              <a:latin typeface="SRH Text"/>
+            </a:endParaRPr>
+          </a:p>
+          <a:p>
+            <a:pPr indent="0" algn="l" defTabSz="914400">
+              <a:lnSpc>
+                <a:spcPct val="110000"/>
+              </a:lnSpc>
+              <a:spcBef>
+                <a:spcPts val="1191"/>
+              </a:spcBef>
+              <a:spcAft>
+                <a:spcPts val="992"/>
+              </a:spcAft>
+              <a:buNone/>
+              <a:tabLst>
+                <a:tab pos="0" algn="l"/>
+              </a:tabLst>
+            </a:pPr>
+            <a:r>
+              <a:rPr lang="de-DE" sz="1300" b="0" u="none" strike="noStrike">
+                <a:solidFill>
+                  <a:schemeClr val="dk1"/>
+                </a:solidFill>
+                <a:effectLst/>
+                <a:uFillTx/>
+                <a:latin typeface="SRH Text"/>
+                <a:ea typeface="SRH Text"/>
+              </a:rPr>
+              <a:t>Manual Review: 616 (12.32%)</a:t>
+            </a:r>
+            <a:endParaRPr lang="de-DE" sz="1300" b="0" u="none" strike="noStrike">
+              <a:solidFill>
+                <a:schemeClr val="dk1"/>
+              </a:solidFill>
+              <a:effectLst/>
+              <a:uFillTx/>
+              <a:latin typeface="SRH Text"/>
+            </a:endParaRPr>
+          </a:p>
+          <a:p>
+            <a:pPr indent="0" algn="l" defTabSz="914400">
+              <a:lnSpc>
+                <a:spcPct val="110000"/>
+              </a:lnSpc>
+              <a:spcBef>
+                <a:spcPts val="1199"/>
+              </a:spcBef>
+              <a:buNone/>
+              <a:tabLst>
+                <a:tab pos="0" algn="l"/>
+              </a:tabLst>
+            </a:pPr>
+            <a:endParaRPr lang="de-DE" sz="1300" b="0" u="none" strike="noStrike">
+              <a:solidFill>
+                <a:schemeClr val="dk1"/>
+              </a:solidFill>
+              <a:effectLst/>
+              <a:uFillTx/>
+              <a:latin typeface="SRH Text"/>
+            </a:endParaRPr>
+          </a:p>
+          <a:p>
+            <a:pPr indent="0" algn="l" defTabSz="914400">
+              <a:lnSpc>
+                <a:spcPct val="110000"/>
+              </a:lnSpc>
+              <a:spcBef>
+                <a:spcPts val="1199"/>
+              </a:spcBef>
+              <a:buNone/>
+              <a:tabLst>
+                <a:tab pos="0" algn="l"/>
+              </a:tabLst>
+            </a:pPr>
+            <a:endParaRPr lang="de-DE" sz="1300" b="0" u="none" strike="noStrike">
+              <a:solidFill>
+                <a:schemeClr val="dk1"/>
+              </a:solidFill>
+              <a:effectLst/>
+              <a:uFillTx/>
+              <a:latin typeface="SRH Text"/>
+            </a:endParaRPr>
+          </a:p>
+          <a:p>
+            <a:pPr indent="0" algn="l" defTabSz="914400">
+              <a:lnSpc>
+                <a:spcPct val="110000"/>
+              </a:lnSpc>
+              <a:spcBef>
+                <a:spcPts val="1199"/>
+              </a:spcBef>
+              <a:buNone/>
+              <a:tabLst>
+                <a:tab pos="0" algn="l"/>
+              </a:tabLst>
+            </a:pPr>
+            <a:endParaRPr lang="de-DE" sz="1300" b="0" u="none" strike="noStrike">
+              <a:solidFill>
+                <a:schemeClr val="dk1"/>
+              </a:solidFill>
+              <a:effectLst/>
+              <a:uFillTx/>
+              <a:latin typeface="SRH Text"/>
+            </a:endParaRPr>
+          </a:p>
+          <a:p>
+            <a:pPr indent="0" algn="l" defTabSz="914400">
+              <a:lnSpc>
+                <a:spcPct val="110000"/>
+              </a:lnSpc>
+              <a:spcBef>
+                <a:spcPts val="1199"/>
+              </a:spcBef>
+              <a:buNone/>
+              <a:tabLst>
+                <a:tab pos="0" algn="l"/>
+              </a:tabLst>
+            </a:pPr>
+            <a:endParaRPr lang="de-DE" sz="1300" b="0" u="none" strike="noStrike">
+              <a:solidFill>
+                <a:schemeClr val="dk1"/>
+              </a:solidFill>
+              <a:effectLst/>
+              <a:uFillTx/>
+              <a:latin typeface="SRH Text"/>
+            </a:endParaRPr>
+          </a:p>
+          <a:p>
+            <a:pPr indent="0" algn="l" defTabSz="914400">
+              <a:lnSpc>
+                <a:spcPct val="110000"/>
+              </a:lnSpc>
+              <a:spcBef>
+                <a:spcPts val="1199"/>
+              </a:spcBef>
+              <a:buNone/>
+              <a:tabLst>
+                <a:tab pos="0" algn="l"/>
+              </a:tabLst>
+            </a:pPr>
+            <a:endParaRPr lang="de-DE" sz="1300" b="0" u="none" strike="noStrike">
+              <a:solidFill>
+                <a:schemeClr val="dk1"/>
+              </a:solidFill>
+              <a:effectLst/>
+              <a:uFillTx/>
+              <a:latin typeface="SRH Text"/>
+            </a:endParaRPr>
+          </a:p>
+          <a:p>
+            <a:pPr indent="0" algn="l" defTabSz="914400">
+              <a:lnSpc>
+                <a:spcPct val="110000"/>
+              </a:lnSpc>
+              <a:spcBef>
+                <a:spcPts val="1199"/>
+              </a:spcBef>
+              <a:buNone/>
+              <a:tabLst>
+                <a:tab pos="0" algn="l"/>
+              </a:tabLst>
+            </a:pPr>
+            <a:endParaRPr lang="de-DE" sz="1300" b="0" u="none" strike="noStrike">
+              <a:solidFill>
+                <a:schemeClr val="dk1"/>
+              </a:solidFill>
+              <a:effectLst/>
+              <a:uFillTx/>
+              <a:latin typeface="SRH Text"/>
+            </a:endParaRPr>
+          </a:p>
+          <a:p>
+            <a:pPr indent="0" algn="l" defTabSz="914400">
+              <a:lnSpc>
+                <a:spcPct val="110000"/>
+              </a:lnSpc>
+              <a:spcBef>
+                <a:spcPts val="1191"/>
+              </a:spcBef>
+              <a:spcAft>
+                <a:spcPts val="992"/>
+              </a:spcAft>
+              <a:buNone/>
+              <a:tabLst>
+                <a:tab pos="0" algn="l"/>
+              </a:tabLst>
+            </a:pPr>
+            <a:endParaRPr lang="de-DE" sz="1300" b="0" u="none" strike="noStrike">
+              <a:solidFill>
+                <a:schemeClr val="dk1"/>
+              </a:solidFill>
+              <a:effectLst/>
+              <a:uFillTx/>
+              <a:latin typeface="SRH Text"/>
+            </a:endParaRPr>
+          </a:p>
+          <a:p>
+            <a:pPr indent="0" algn="l" defTabSz="914400">
+              <a:lnSpc>
+                <a:spcPct val="110000"/>
+              </a:lnSpc>
+              <a:spcBef>
+                <a:spcPts val="1191"/>
+              </a:spcBef>
+              <a:spcAft>
+                <a:spcPts val="992"/>
+              </a:spcAft>
+              <a:buNone/>
+              <a:tabLst>
+                <a:tab pos="0" algn="l"/>
+              </a:tabLst>
+            </a:pPr>
+            <a:endParaRPr lang="de-DE" sz="1300" b="0" u="none" strike="noStrike">
+              <a:solidFill>
+                <a:schemeClr val="dk1"/>
+              </a:solidFill>
+              <a:effectLst/>
+              <a:uFillTx/>
+              <a:latin typeface="SRH Text"/>
+            </a:endParaRPr>
+          </a:p>
+          <a:p>
+            <a:pPr indent="0" algn="l" defTabSz="914400">
+              <a:lnSpc>
+                <a:spcPct val="110000"/>
+              </a:lnSpc>
+              <a:spcBef>
+                <a:spcPts val="1191"/>
+              </a:spcBef>
+              <a:spcAft>
+                <a:spcPts val="992"/>
+              </a:spcAft>
+              <a:buNone/>
+              <a:tabLst>
+                <a:tab pos="0" algn="l"/>
+              </a:tabLst>
+            </a:pPr>
+            <a:endParaRPr lang="de-DE" sz="1300" b="0" u="none" strike="noStrike">
+              <a:solidFill>
+                <a:schemeClr val="dk1"/>
+              </a:solidFill>
+              <a:effectLst/>
+              <a:uFillTx/>
+              <a:latin typeface="SRH Text"/>
+            </a:endParaRPr>
+          </a:p>
+        </p:txBody>
+      </p:sp>
+      <p:sp>
+        <p:nvSpPr>
+          <p:cNvPr id="333" name="PlaceHolder 3"/>
           <p:cNvSpPr>
             <a:spLocks noGrp="1"/>
           </p:cNvSpPr>
@@ -40199,7 +40441,7 @@
                 <a:tab pos="0" algn="l"/>
               </a:tabLst>
             </a:pPr>
-            <a:fld id="{30F557C3-CD87-4348-8C75-E45927E1E69F}" type="datetime1">
+            <a:fld id="{784ED92F-9D54-4258-B495-AA0BFF84EFC0}" type="datetime1">
               <a:rPr lang="en-CA" sz="900" b="1" u="none" strike="noStrike">
                 <a:solidFill>
                   <a:srgbClr val="6D7373"/>
@@ -40209,7 +40451,7 @@
                 <a:latin typeface="SRH Text"/>
                 <a:ea typeface="SRH"/>
               </a:rPr>
-              <a:t>2026-09-11</a:t>
+              <a:t>2026-09-12</a:t>
             </a:fld>
             <a:endParaRPr lang="en-US" sz="900" b="0" u="none" strike="noStrike">
               <a:solidFill>
@@ -40224,7 +40466,7 @@
       </p:sp>
       <p:sp>
         <p:nvSpPr>
-          <p:cNvPr id="334" name="PlaceHolder 3"/>
+          <p:cNvPr id="334" name="PlaceHolder 4"/>
           <p:cNvSpPr>
             <a:spLocks noGrp="1"/>
           </p:cNvSpPr>
@@ -40304,7 +40546,7 @@
       </p:sp>
       <p:sp>
         <p:nvSpPr>
-          <p:cNvPr id="335" name="PlaceHolder 4"/>
+          <p:cNvPr id="335" name="PlaceHolder 5"/>
           <p:cNvSpPr>
             <a:spLocks noGrp="1"/>
           </p:cNvSpPr>
@@ -40359,7 +40601,7 @@
                 <a:tab pos="0" algn="l"/>
               </a:tabLst>
             </a:pPr>
-            <a:fld id="{0FD8CD7D-8126-46F5-8EDF-0C5870E1BC36}" type="slidenum">
+            <a:fld id="{3061E4BB-E342-496D-8F72-86CAA145B35A}" type="slidenum">
               <a:rPr lang="de-DE" sz="1550" b="1" u="none" strike="noStrike">
                 <a:solidFill>
                   <a:srgbClr val="6D7373"/>
@@ -40369,7 +40611,7 @@
                 <a:latin typeface="SRH Text"/>
                 <a:ea typeface="SRH"/>
               </a:rPr>
-              <a:t>13</a:t>
+              <a:t>&lt;number&gt;</a:t>
             </a:fld>
             <a:endParaRPr lang="en-US" sz="1550" b="0" u="none" strike="noStrike">
               <a:solidFill>
@@ -40394,8 +40636,8 @@
         </p:blipFill>
         <p:spPr>
           <a:xfrm>
-            <a:off x="479520" y="1242360"/>
-            <a:ext cx="10720800" cy="4471560"/>
+            <a:off x="4212000" y="1143000"/>
+            <a:ext cx="6685920" cy="5029200"/>
           </a:xfrm>
           <a:prstGeom prst="rect">
             <a:avLst/>
@@ -40464,9 +40706,9 @@
             <a:noAutofit/>
           </a:bodyPr>
           <a:p>
-            <a:pPr indent="0" algn="l" defTabSz="914400">
-              <a:lnSpc>
-                <a:spcPct val="100000"/>
+            <a:pPr marL="285840" indent="0" algn="l" defTabSz="914400">
+              <a:lnSpc>
+                <a:spcPct val="150000"/>
               </a:lnSpc>
               <a:spcBef>
                 <a:spcPts val="1191"/>
@@ -40480,16 +40722,16 @@
               </a:tabLst>
             </a:pPr>
             <a:r>
-              <a:rPr lang="de-DE" sz="2600" b="1" u="none" strike="noStrike">
+              <a:rPr lang="en-US" sz="2600" b="1" u="none" strike="noStrike">
                 <a:solidFill>
                   <a:srgbClr val="FF4000"/>
                 </a:solidFill>
                 <a:effectLst/>
                 <a:uFillTx/>
-                <a:latin typeface="SRH Headline"/>
-                <a:ea typeface="SRH Headline"/>
-              </a:rPr>
-              <a:t>Reliability Monitoring Framework</a:t>
+                <a:latin typeface="SRH Text"/>
+                <a:ea typeface="SRH Text"/>
+              </a:rPr>
+              <a:t>Selective Prediction — Test Set Results </a:t>
             </a:r>
             <a:endParaRPr lang="de-DE" sz="2600" b="1" u="none" strike="noStrike">
               <a:solidFill>
@@ -40505,332 +40747,6 @@
       <p:sp>
         <p:nvSpPr>
           <p:cNvPr id="338" name="PlaceHolder 2"/>
-          <p:cNvSpPr>
-            <a:spLocks noGrp="1"/>
-          </p:cNvSpPr>
-          <p:nvPr>
-            <p:ph/>
-          </p:nvPr>
-        </p:nvSpPr>
-        <p:spPr>
-          <a:xfrm>
-            <a:off x="228600" y="696600"/>
-            <a:ext cx="5256720" cy="6032160"/>
-          </a:xfrm>
-          <a:prstGeom prst="rect">
-            <a:avLst/>
-          </a:prstGeom>
-          <a:noFill/>
-          <a:ln w="0">
-            <a:noFill/>
-          </a:ln>
-        </p:spPr>
-        <p:txBody>
-          <a:bodyPr numCol="1" spcCol="216000" lIns="0" tIns="0" rIns="0" bIns="0" anchor="t">
-            <a:noAutofit/>
-          </a:bodyPr>
-          <a:p>
-            <a:pPr marL="285840" indent="0" algn="l" defTabSz="914400">
-              <a:lnSpc>
-                <a:spcPct val="150000"/>
-              </a:lnSpc>
-              <a:spcBef>
-                <a:spcPts val="1191"/>
-              </a:spcBef>
-              <a:spcAft>
-                <a:spcPts val="992"/>
-              </a:spcAft>
-              <a:buNone/>
-              <a:tabLst>
-                <a:tab pos="0" algn="l"/>
-              </a:tabLst>
-            </a:pPr>
-            <a:r>
-              <a:rPr lang="en-US" sz="1300" b="0" u="none" strike="noStrike">
-                <a:solidFill>
-                  <a:srgbClr val="1C1C1C"/>
-                </a:solidFill>
-                <a:effectLst/>
-                <a:uFillTx/>
-                <a:latin typeface="SRH Text"/>
-                <a:ea typeface="SRH Text"/>
-              </a:rPr>
-              <a:t>Ensure that the credit-risk model remains reliable after deployment when customer populations and data distributions change.</a:t>
-            </a:r>
-            <a:endParaRPr lang="de-DE" sz="1300" b="0" u="none" strike="noStrike">
-              <a:solidFill>
-                <a:schemeClr val="dk1"/>
-              </a:solidFill>
-              <a:effectLst/>
-              <a:uFillTx/>
-              <a:latin typeface="SRH Text"/>
-            </a:endParaRPr>
-          </a:p>
-          <a:p>
-            <a:pPr marL="285840" indent="0" algn="l" defTabSz="914400">
-              <a:lnSpc>
-                <a:spcPct val="150000"/>
-              </a:lnSpc>
-              <a:spcBef>
-                <a:spcPts val="1191"/>
-              </a:spcBef>
-              <a:spcAft>
-                <a:spcPts val="992"/>
-              </a:spcAft>
-              <a:buNone/>
-              <a:tabLst>
-                <a:tab pos="0" algn="l"/>
-              </a:tabLst>
-            </a:pPr>
-            <a:r>
-              <a:rPr lang="en-US" sz="1300" b="0" u="none" strike="noStrike">
-                <a:solidFill>
-                  <a:srgbClr val="1C1C1C"/>
-                </a:solidFill>
-                <a:effectLst/>
-                <a:uFillTx/>
-                <a:latin typeface="SRH Text"/>
-                <a:ea typeface="SRH Text"/>
-              </a:rPr>
-              <a:t>Automated Monitoring Pipeline</a:t>
-            </a:r>
-            <a:endParaRPr lang="de-DE" sz="1300" b="0" u="none" strike="noStrike">
-              <a:solidFill>
-                <a:schemeClr val="dk1"/>
-              </a:solidFill>
-              <a:effectLst/>
-              <a:uFillTx/>
-              <a:latin typeface="SRH Text"/>
-            </a:endParaRPr>
-          </a:p>
-          <a:p>
-            <a:pPr marL="285840" indent="0" algn="l" defTabSz="914400">
-              <a:lnSpc>
-                <a:spcPct val="150000"/>
-              </a:lnSpc>
-              <a:spcBef>
-                <a:spcPts val="1191"/>
-              </a:spcBef>
-              <a:spcAft>
-                <a:spcPts val="992"/>
-              </a:spcAft>
-              <a:buNone/>
-              <a:tabLst>
-                <a:tab pos="0" algn="l"/>
-              </a:tabLst>
-            </a:pPr>
-            <a:r>
-              <a:rPr lang="en-US" sz="1300" b="1" u="none" strike="noStrike">
-                <a:solidFill>
-                  <a:srgbClr val="FF4000"/>
-                </a:solidFill>
-                <a:effectLst/>
-                <a:uFillTx/>
-                <a:latin typeface="SRH Text"/>
-                <a:ea typeface="SRH Text"/>
-              </a:rPr>
-              <a:t>1. DATA DRIFT</a:t>
-            </a:r>
-            <a:endParaRPr lang="de-DE" sz="1300" b="0" u="none" strike="noStrike">
-              <a:solidFill>
-                <a:schemeClr val="dk1"/>
-              </a:solidFill>
-              <a:effectLst/>
-              <a:uFillTx/>
-              <a:latin typeface="SRH Text"/>
-            </a:endParaRPr>
-          </a:p>
-          <a:p>
-            <a:pPr marL="285840" indent="0" algn="l" defTabSz="914400">
-              <a:lnSpc>
-                <a:spcPct val="150000"/>
-              </a:lnSpc>
-              <a:spcBef>
-                <a:spcPts val="1191"/>
-              </a:spcBef>
-              <a:spcAft>
-                <a:spcPts val="992"/>
-              </a:spcAft>
-              <a:buNone/>
-              <a:tabLst>
-                <a:tab pos="0" algn="l"/>
-              </a:tabLst>
-            </a:pPr>
-            <a:r>
-              <a:rPr lang="en-US" sz="1300" b="0" u="none" strike="noStrike">
-                <a:solidFill>
-                  <a:srgbClr val="1C1C1C"/>
-                </a:solidFill>
-                <a:effectLst/>
-                <a:uFillTx/>
-                <a:latin typeface="SRH Text"/>
-                <a:ea typeface="SRH Text"/>
-              </a:rPr>
-              <a:t>Monitor changes in customer characteristics</a:t>
-            </a:r>
-            <a:endParaRPr lang="de-DE" sz="1300" b="0" u="none" strike="noStrike">
-              <a:solidFill>
-                <a:schemeClr val="dk1"/>
-              </a:solidFill>
-              <a:effectLst/>
-              <a:uFillTx/>
-              <a:latin typeface="SRH Text"/>
-            </a:endParaRPr>
-          </a:p>
-          <a:p>
-            <a:pPr marL="285840" indent="0" algn="l" defTabSz="914400">
-              <a:lnSpc>
-                <a:spcPct val="150000"/>
-              </a:lnSpc>
-              <a:spcBef>
-                <a:spcPts val="1191"/>
-              </a:spcBef>
-              <a:spcAft>
-                <a:spcPts val="992"/>
-              </a:spcAft>
-              <a:buNone/>
-              <a:tabLst>
-                <a:tab pos="0" algn="l"/>
-              </a:tabLst>
-            </a:pPr>
-            <a:r>
-              <a:rPr lang="en-US" sz="1300" b="0" u="none" strike="noStrike">
-                <a:solidFill>
-                  <a:srgbClr val="1C1C1C"/>
-                </a:solidFill>
-                <a:effectLst/>
-                <a:uFillTx/>
-                <a:latin typeface="SRH Text"/>
-                <a:ea typeface="SRH Text"/>
-              </a:rPr>
-              <a:t>PSI → measures changes in feature distributions</a:t>
-            </a:r>
-            <a:endParaRPr lang="de-DE" sz="1300" b="0" u="none" strike="noStrike">
-              <a:solidFill>
-                <a:schemeClr val="dk1"/>
-              </a:solidFill>
-              <a:effectLst/>
-              <a:uFillTx/>
-              <a:latin typeface="SRH Text"/>
-            </a:endParaRPr>
-          </a:p>
-          <a:p>
-            <a:pPr marL="285840" indent="0" algn="l" defTabSz="914400">
-              <a:lnSpc>
-                <a:spcPct val="150000"/>
-              </a:lnSpc>
-              <a:spcBef>
-                <a:spcPts val="1191"/>
-              </a:spcBef>
-              <a:spcAft>
-                <a:spcPts val="992"/>
-              </a:spcAft>
-              <a:buNone/>
-              <a:tabLst>
-                <a:tab pos="0" algn="l"/>
-              </a:tabLst>
-            </a:pPr>
-            <a:r>
-              <a:rPr lang="en-US" sz="1300" b="0" u="none" strike="noStrike">
-                <a:solidFill>
-                  <a:srgbClr val="1C1C1C"/>
-                </a:solidFill>
-                <a:effectLst/>
-                <a:uFillTx/>
-                <a:latin typeface="SRH Text"/>
-                <a:ea typeface="SRH Text"/>
-              </a:rPr>
-              <a:t>PSI Interpretation:</a:t>
-            </a:r>
-            <a:endParaRPr lang="de-DE" sz="1300" b="0" u="none" strike="noStrike">
-              <a:solidFill>
-                <a:schemeClr val="dk1"/>
-              </a:solidFill>
-              <a:effectLst/>
-              <a:uFillTx/>
-              <a:latin typeface="SRH Text"/>
-            </a:endParaRPr>
-          </a:p>
-          <a:p>
-            <a:pPr marL="285840" indent="0" algn="l" defTabSz="914400">
-              <a:lnSpc>
-                <a:spcPct val="150000"/>
-              </a:lnSpc>
-              <a:spcBef>
-                <a:spcPts val="1191"/>
-              </a:spcBef>
-              <a:spcAft>
-                <a:spcPts val="992"/>
-              </a:spcAft>
-              <a:buNone/>
-              <a:tabLst>
-                <a:tab pos="0" algn="l"/>
-              </a:tabLst>
-            </a:pPr>
-            <a:endParaRPr lang="de-DE" sz="1300" b="0" u="none" strike="noStrike">
-              <a:solidFill>
-                <a:schemeClr val="dk1"/>
-              </a:solidFill>
-              <a:effectLst/>
-              <a:uFillTx/>
-              <a:latin typeface="SRH Text"/>
-            </a:endParaRPr>
-          </a:p>
-          <a:p>
-            <a:pPr marL="285840" indent="0" algn="l" defTabSz="914400">
-              <a:lnSpc>
-                <a:spcPct val="150000"/>
-              </a:lnSpc>
-              <a:spcBef>
-                <a:spcPts val="1191"/>
-              </a:spcBef>
-              <a:spcAft>
-                <a:spcPts val="992"/>
-              </a:spcAft>
-              <a:buNone/>
-              <a:tabLst>
-                <a:tab pos="0" algn="l"/>
-              </a:tabLst>
-            </a:pPr>
-            <a:endParaRPr lang="de-DE" sz="1300" b="0" u="none" strike="noStrike">
-              <a:solidFill>
-                <a:schemeClr val="dk1"/>
-              </a:solidFill>
-              <a:effectLst/>
-              <a:uFillTx/>
-              <a:latin typeface="SRH Text"/>
-            </a:endParaRPr>
-          </a:p>
-          <a:p>
-            <a:pPr marL="285840" indent="0" algn="l" defTabSz="914400">
-              <a:lnSpc>
-                <a:spcPct val="150000"/>
-              </a:lnSpc>
-              <a:spcBef>
-                <a:spcPts val="1191"/>
-              </a:spcBef>
-              <a:spcAft>
-                <a:spcPts val="992"/>
-              </a:spcAft>
-              <a:buNone/>
-              <a:tabLst>
-                <a:tab pos="0" algn="l"/>
-              </a:tabLst>
-            </a:pPr>
-            <a:endParaRPr lang="de-DE" sz="1300" b="0" u="none" strike="noStrike">
-              <a:solidFill>
-                <a:schemeClr val="dk1"/>
-              </a:solidFill>
-              <a:effectLst/>
-              <a:uFillTx/>
-              <a:latin typeface="SRH Text"/>
-            </a:endParaRPr>
-          </a:p>
-        </p:txBody>
-      </p:sp>
-      <p:sp>
-        <p:nvSpPr>
-          <p:cNvPr id="339" name="PlaceHolder 3"/>
           <p:cNvSpPr>
             <a:spLocks noGrp="1"/>
           </p:cNvSpPr>
@@ -40885,7 +40801,7 @@
                 <a:tab pos="0" algn="l"/>
               </a:tabLst>
             </a:pPr>
-            <a:fld id="{BDF17C17-A4C7-43FE-A06C-ED0FBD0574CA}" type="datetime1">
+            <a:fld id="{B1AB974F-C5A1-4BDF-BEC5-90145F318F5E}" type="datetime1">
               <a:rPr lang="en-CA" sz="900" b="1" u="none" strike="noStrike">
                 <a:solidFill>
                   <a:srgbClr val="6D7373"/>
@@ -40895,7 +40811,7 @@
                 <a:latin typeface="SRH Text"/>
                 <a:ea typeface="SRH"/>
               </a:rPr>
-              <a:t>2026-09-11</a:t>
+              <a:t>2026-09-12</a:t>
             </a:fld>
             <a:endParaRPr lang="en-US" sz="900" b="0" u="none" strike="noStrike">
               <a:solidFill>
@@ -40910,7 +40826,7 @@
       </p:sp>
       <p:sp>
         <p:nvSpPr>
-          <p:cNvPr id="340" name="PlaceHolder 4"/>
+          <p:cNvPr id="339" name="PlaceHolder 3"/>
           <p:cNvSpPr>
             <a:spLocks noGrp="1"/>
           </p:cNvSpPr>
@@ -40990,7 +40906,7 @@
       </p:sp>
       <p:sp>
         <p:nvSpPr>
-          <p:cNvPr id="341" name="PlaceHolder 5"/>
+          <p:cNvPr id="340" name="PlaceHolder 4"/>
           <p:cNvSpPr>
             <a:spLocks noGrp="1"/>
           </p:cNvSpPr>
@@ -41045,7 +40961,7 @@
                 <a:tab pos="0" algn="l"/>
               </a:tabLst>
             </a:pPr>
-            <a:fld id="{C3695EA1-367E-4DC4-ADAF-8A07B90109B9}" type="slidenum">
+            <a:fld id="{931D545A-8B97-4B02-A8C7-90611AE0FB0D}" type="slidenum">
               <a:rPr lang="de-DE" sz="1550" b="1" u="none" strike="noStrike">
                 <a:solidFill>
                   <a:srgbClr val="6D7373"/>
@@ -41055,7 +40971,7 @@
                 <a:latin typeface="SRH Text"/>
                 <a:ea typeface="SRH"/>
               </a:rPr>
-              <a:t>13</a:t>
+              <a:t>&lt;number&gt;</a:t>
             </a:fld>
             <a:endParaRPr lang="en-US" sz="1550" b="0" u="none" strike="noStrike">
               <a:solidFill>
@@ -41064,420 +40980,13 @@
               <a:effectLst/>
               <a:uFillTx/>
               <a:latin typeface="Times New Roman"/>
-            </a:endParaRPr>
-          </a:p>
-        </p:txBody>
-      </p:sp>
-      <p:sp>
-        <p:nvSpPr>
-          <p:cNvPr id="342" name="PlaceHolder 114"/>
-          <p:cNvSpPr/>
-          <p:nvPr/>
-        </p:nvSpPr>
-        <p:spPr>
-          <a:xfrm>
-            <a:off x="6172200" y="685800"/>
-            <a:ext cx="5256720" cy="6032160"/>
-          </a:xfrm>
-          <a:prstGeom prst="rect">
-            <a:avLst/>
-          </a:prstGeom>
-          <a:noFill/>
-          <a:ln w="0">
-            <a:noFill/>
-          </a:ln>
-        </p:spPr>
-        <p:style>
-          <a:lnRef idx="0"/>
-          <a:fillRef idx="0"/>
-          <a:effectRef idx="0"/>
-          <a:fontRef idx="minor"/>
-        </p:style>
-        <p:txBody>
-          <a:bodyPr numCol="1" spcCol="216000" lIns="0" tIns="0" rIns="0" bIns="0" anchor="t">
-            <a:noAutofit/>
-          </a:bodyPr>
-          <a:p>
-            <a:pPr marL="285840" indent="-285840" defTabSz="914400">
-              <a:lnSpc>
-                <a:spcPct val="150000"/>
-              </a:lnSpc>
-              <a:spcBef>
-                <a:spcPts val="1191"/>
-              </a:spcBef>
-              <a:spcAft>
-                <a:spcPts val="992"/>
-              </a:spcAft>
-              <a:buClr>
-                <a:srgbClr val="575756"/>
-              </a:buClr>
-              <a:buFont typeface="Wingdings" charset="2"/>
-              <a:buChar char=""/>
-              <a:tabLst>
-                <a:tab pos="0" algn="l"/>
-              </a:tabLst>
-            </a:pPr>
-            <a:r>
-              <a:rPr lang="en-US" sz="1300" b="0" u="none" strike="noStrike">
-                <a:solidFill>
-                  <a:srgbClr val="1C1C1C"/>
-                </a:solidFill>
-                <a:effectLst/>
-                <a:uFillTx/>
-                <a:latin typeface="SRH Text"/>
-                <a:ea typeface="SRH Text"/>
-              </a:rPr>
-              <a:t>KS Test → compares reference and new distributions</a:t>
-            </a:r>
-            <a:endParaRPr lang="en-US" sz="1300" b="0" u="none" strike="noStrike">
-              <a:solidFill>
-                <a:srgbClr val="000000"/>
-              </a:solidFill>
-              <a:effectLst/>
-              <a:uFillTx/>
-              <a:latin typeface="Arial"/>
-            </a:endParaRPr>
-          </a:p>
-          <a:p>
-            <a:pPr marL="285840" indent="-285840" defTabSz="914400">
-              <a:lnSpc>
-                <a:spcPct val="150000"/>
-              </a:lnSpc>
-              <a:spcBef>
-                <a:spcPts val="1191"/>
-              </a:spcBef>
-              <a:spcAft>
-                <a:spcPts val="992"/>
-              </a:spcAft>
-              <a:buClr>
-                <a:srgbClr val="575756"/>
-              </a:buClr>
-              <a:buFont typeface="Wingdings" charset="2"/>
-              <a:buChar char=""/>
-              <a:tabLst>
-                <a:tab pos="0" algn="l"/>
-              </a:tabLst>
-            </a:pPr>
-            <a:r>
-              <a:rPr lang="en-US" sz="1300" b="0" u="none" strike="noStrike">
-                <a:solidFill>
-                  <a:srgbClr val="1C1C1C"/>
-                </a:solidFill>
-                <a:effectLst/>
-                <a:uFillTx/>
-                <a:latin typeface="SRH Text"/>
-                <a:ea typeface="SRH Text"/>
-              </a:rPr>
-              <a:t>KS Interpretation:</a:t>
-            </a:r>
-            <a:endParaRPr lang="en-US" sz="1300" b="0" u="none" strike="noStrike">
-              <a:solidFill>
-                <a:srgbClr val="000000"/>
-              </a:solidFill>
-              <a:effectLst/>
-              <a:uFillTx/>
-              <a:latin typeface="Arial"/>
-            </a:endParaRPr>
-          </a:p>
-          <a:p>
-            <a:pPr defTabSz="914400">
-              <a:lnSpc>
-                <a:spcPct val="150000"/>
-              </a:lnSpc>
-              <a:spcBef>
-                <a:spcPts val="1191"/>
-              </a:spcBef>
-              <a:spcAft>
-                <a:spcPts val="992"/>
-              </a:spcAft>
-              <a:tabLst>
-                <a:tab pos="0" algn="l"/>
-              </a:tabLst>
-            </a:pPr>
-            <a:endParaRPr lang="en-US" sz="1300" b="0" u="none" strike="noStrike">
-              <a:solidFill>
-                <a:srgbClr val="000000"/>
-              </a:solidFill>
-              <a:effectLst/>
-              <a:uFillTx/>
-              <a:latin typeface="Arial"/>
-            </a:endParaRPr>
-          </a:p>
-          <a:p>
-            <a:pPr defTabSz="914400">
-              <a:lnSpc>
-                <a:spcPct val="150000"/>
-              </a:lnSpc>
-              <a:spcBef>
-                <a:spcPts val="1191"/>
-              </a:spcBef>
-              <a:spcAft>
-                <a:spcPts val="992"/>
-              </a:spcAft>
-              <a:tabLst>
-                <a:tab pos="0" algn="l"/>
-              </a:tabLst>
-            </a:pPr>
-            <a:endParaRPr lang="en-US" sz="1300" b="0" u="none" strike="noStrike">
-              <a:solidFill>
-                <a:srgbClr val="000000"/>
-              </a:solidFill>
-              <a:effectLst/>
-              <a:uFillTx/>
-              <a:latin typeface="Arial"/>
-            </a:endParaRPr>
-          </a:p>
-          <a:p>
-            <a:pPr marL="285840" indent="-285840" defTabSz="914400">
-              <a:lnSpc>
-                <a:spcPct val="150000"/>
-              </a:lnSpc>
-              <a:spcBef>
-                <a:spcPts val="1191"/>
-              </a:spcBef>
-              <a:spcAft>
-                <a:spcPts val="992"/>
-              </a:spcAft>
-              <a:buClr>
-                <a:srgbClr val="575756"/>
-              </a:buClr>
-              <a:buFont typeface="Wingdings" charset="2"/>
-              <a:buChar char=""/>
-              <a:tabLst>
-                <a:tab pos="0" algn="l"/>
-              </a:tabLst>
-            </a:pPr>
-            <a:r>
-              <a:rPr lang="en-US" sz="1300" b="1" u="none" strike="noStrike">
-                <a:solidFill>
-                  <a:srgbClr val="FF4000"/>
-                </a:solidFill>
-                <a:effectLst/>
-                <a:uFillTx/>
-                <a:latin typeface="SRH Text"/>
-                <a:ea typeface="SRH Text"/>
-              </a:rPr>
-              <a:t>2. PREDICTION / MODEL MONITORING</a:t>
-            </a:r>
-            <a:endParaRPr lang="en-US" sz="1300" b="0" u="none" strike="noStrike">
-              <a:solidFill>
-                <a:srgbClr val="000000"/>
-              </a:solidFill>
-              <a:effectLst/>
-              <a:uFillTx/>
-              <a:latin typeface="Arial"/>
-            </a:endParaRPr>
-          </a:p>
-          <a:p>
-            <a:pPr marL="285840" indent="-285840" defTabSz="914400">
-              <a:lnSpc>
-                <a:spcPct val="150000"/>
-              </a:lnSpc>
-              <a:spcBef>
-                <a:spcPts val="1191"/>
-              </a:spcBef>
-              <a:spcAft>
-                <a:spcPts val="992"/>
-              </a:spcAft>
-              <a:buClr>
-                <a:srgbClr val="575756"/>
-              </a:buClr>
-              <a:buFont typeface="Wingdings" charset="2"/>
-              <a:buChar char=""/>
-              <a:tabLst>
-                <a:tab pos="0" algn="l"/>
-              </a:tabLst>
-            </a:pPr>
-            <a:r>
-              <a:rPr lang="en-US" sz="1300" b="0" u="none" strike="noStrike">
-                <a:solidFill>
-                  <a:srgbClr val="1C1C1C"/>
-                </a:solidFill>
-                <a:effectLst/>
-                <a:uFillTx/>
-                <a:latin typeface="SRH Text"/>
-                <a:ea typeface="SRH Text"/>
-              </a:rPr>
-              <a:t>Monitor changes in model behavior and performance</a:t>
-            </a:r>
-            <a:endParaRPr lang="en-US" sz="1300" b="0" u="none" strike="noStrike">
-              <a:solidFill>
-                <a:srgbClr val="000000"/>
-              </a:solidFill>
-              <a:effectLst/>
-              <a:uFillTx/>
-              <a:latin typeface="Arial"/>
-            </a:endParaRPr>
-          </a:p>
-          <a:p>
-            <a:pPr marL="285840" indent="-285840" defTabSz="914400">
-              <a:lnSpc>
-                <a:spcPct val="150000"/>
-              </a:lnSpc>
-              <a:spcBef>
-                <a:spcPts val="1191"/>
-              </a:spcBef>
-              <a:spcAft>
-                <a:spcPts val="992"/>
-              </a:spcAft>
-              <a:buClr>
-                <a:srgbClr val="575756"/>
-              </a:buClr>
-              <a:buFont typeface="Wingdings" charset="2"/>
-              <a:buChar char=""/>
-              <a:tabLst>
-                <a:tab pos="0" algn="l"/>
-              </a:tabLst>
-            </a:pPr>
-            <a:r>
-              <a:rPr lang="en-US" sz="1300" b="0" u="none" strike="noStrike">
-                <a:solidFill>
-                  <a:srgbClr val="1C1C1C"/>
-                </a:solidFill>
-                <a:effectLst/>
-                <a:uFillTx/>
-                <a:latin typeface="SRH Text"/>
-                <a:ea typeface="SRH Text"/>
-              </a:rPr>
-              <a:t>AUC</a:t>
-            </a:r>
-            <a:endParaRPr lang="en-US" sz="1300" b="0" u="none" strike="noStrike">
-              <a:solidFill>
-                <a:srgbClr val="000000"/>
-              </a:solidFill>
-              <a:effectLst/>
-              <a:uFillTx/>
-              <a:latin typeface="Arial"/>
-            </a:endParaRPr>
-          </a:p>
-          <a:p>
-            <a:pPr marL="285840" indent="-285840" defTabSz="914400">
-              <a:lnSpc>
-                <a:spcPct val="150000"/>
-              </a:lnSpc>
-              <a:spcBef>
-                <a:spcPts val="1191"/>
-              </a:spcBef>
-              <a:spcAft>
-                <a:spcPts val="992"/>
-              </a:spcAft>
-              <a:buClr>
-                <a:srgbClr val="575756"/>
-              </a:buClr>
-              <a:buFont typeface="Wingdings" charset="2"/>
-              <a:buChar char=""/>
-              <a:tabLst>
-                <a:tab pos="0" algn="l"/>
-              </a:tabLst>
-            </a:pPr>
-            <a:r>
-              <a:rPr lang="en-US" sz="1300" b="0" u="none" strike="noStrike">
-                <a:solidFill>
-                  <a:srgbClr val="1C1C1C"/>
-                </a:solidFill>
-                <a:effectLst/>
-                <a:uFillTx/>
-                <a:latin typeface="SRH Text"/>
-                <a:ea typeface="SRH Text"/>
-              </a:rPr>
-              <a:t>Accuracy</a:t>
-            </a:r>
-            <a:endParaRPr lang="en-US" sz="1300" b="0" u="none" strike="noStrike">
-              <a:solidFill>
-                <a:srgbClr val="000000"/>
-              </a:solidFill>
-              <a:effectLst/>
-              <a:uFillTx/>
-              <a:latin typeface="Arial"/>
-            </a:endParaRPr>
-          </a:p>
-          <a:p>
-            <a:pPr marL="285840" indent="-285840" defTabSz="914400">
-              <a:lnSpc>
-                <a:spcPct val="150000"/>
-              </a:lnSpc>
-              <a:spcBef>
-                <a:spcPts val="1191"/>
-              </a:spcBef>
-              <a:spcAft>
-                <a:spcPts val="992"/>
-              </a:spcAft>
-              <a:buClr>
-                <a:srgbClr val="575756"/>
-              </a:buClr>
-              <a:buFont typeface="Wingdings" charset="2"/>
-              <a:buChar char=""/>
-              <a:tabLst>
-                <a:tab pos="0" algn="l"/>
-              </a:tabLst>
-            </a:pPr>
-            <a:r>
-              <a:rPr lang="en-US" sz="1300" b="0" u="none" strike="noStrike">
-                <a:solidFill>
-                  <a:srgbClr val="1C1C1C"/>
-                </a:solidFill>
-                <a:effectLst/>
-                <a:uFillTx/>
-                <a:latin typeface="SRH Text"/>
-                <a:ea typeface="SRH Text"/>
-              </a:rPr>
-              <a:t>False Negatives</a:t>
-            </a:r>
-            <a:endParaRPr lang="en-US" sz="1300" b="0" u="none" strike="noStrike">
-              <a:solidFill>
-                <a:srgbClr val="000000"/>
-              </a:solidFill>
-              <a:effectLst/>
-              <a:uFillTx/>
-              <a:latin typeface="Arial"/>
-            </a:endParaRPr>
-          </a:p>
-          <a:p>
-            <a:pPr marL="285840" indent="-285840" defTabSz="914400">
-              <a:lnSpc>
-                <a:spcPct val="150000"/>
-              </a:lnSpc>
-              <a:spcBef>
-                <a:spcPts val="1191"/>
-              </a:spcBef>
-              <a:spcAft>
-                <a:spcPts val="992"/>
-              </a:spcAft>
-              <a:buClr>
-                <a:srgbClr val="575756"/>
-              </a:buClr>
-              <a:buFont typeface="Wingdings" charset="2"/>
-              <a:buChar char=""/>
-              <a:tabLst>
-                <a:tab pos="0" algn="l"/>
-              </a:tabLst>
-            </a:pPr>
-            <a:r>
-              <a:rPr lang="en-US" sz="1300" b="0" u="none" strike="noStrike">
-                <a:solidFill>
-                  <a:srgbClr val="1C1C1C"/>
-                </a:solidFill>
-                <a:effectLst/>
-                <a:uFillTx/>
-                <a:latin typeface="SRH Text"/>
-                <a:ea typeface="SRH Text"/>
-              </a:rPr>
-              <a:t>False Positives</a:t>
-            </a:r>
-            <a:endParaRPr lang="en-US" sz="1300" b="0" u="none" strike="noStrike">
-              <a:solidFill>
-                <a:srgbClr val="000000"/>
-              </a:solidFill>
-              <a:effectLst/>
-              <a:uFillTx/>
-              <a:latin typeface="Arial"/>
             </a:endParaRPr>
           </a:p>
         </p:txBody>
       </p:sp>
       <p:pic>
         <p:nvPicPr>
-          <p:cNvPr id="343" name=""/>
+          <p:cNvPr id="341" name=""/>
           <p:cNvPicPr/>
           <p:nvPr/>
         </p:nvPicPr>
@@ -41487,32 +40996,8 @@
         </p:blipFill>
         <p:spPr>
           <a:xfrm>
-            <a:off x="228600" y="4343400"/>
-            <a:ext cx="5247720" cy="1143000"/>
-          </a:xfrm>
-          <a:prstGeom prst="rect">
-            <a:avLst/>
-          </a:prstGeom>
-          <a:noFill/>
-          <a:ln w="0">
-            <a:noFill/>
-          </a:ln>
-        </p:spPr>
-      </p:pic>
-      <p:pic>
-        <p:nvPicPr>
-          <p:cNvPr id="344" name=""/>
-          <p:cNvPicPr/>
-          <p:nvPr/>
-        </p:nvPicPr>
-        <p:blipFill>
-          <a:blip r:embed="rId2"/>
-          <a:stretch/>
-        </p:blipFill>
-        <p:spPr>
-          <a:xfrm>
-            <a:off x="6400800" y="1828800"/>
-            <a:ext cx="5008320" cy="1005120"/>
+            <a:off x="479520" y="1242360"/>
+            <a:ext cx="10720800" cy="4471560"/>
           </a:xfrm>
           <a:prstGeom prst="rect">
             <a:avLst/>
@@ -42350,7 +41835,7 @@
                 <a:tab pos="0" algn="l"/>
               </a:tabLst>
             </a:pPr>
-            <a:fld id="{D02D5A46-2D6B-443D-9613-D7DC69D37567}" type="datetime1">
+            <a:fld id="{0B3FF9C1-C2CD-4CE9-8C22-89CA27F1256C}" type="datetime1">
               <a:rPr lang="en-CA" sz="900" b="1" u="none" strike="noStrike">
                 <a:solidFill>
                   <a:srgbClr val="6D7373"/>
@@ -42360,7 +41845,7 @@
                 <a:latin typeface="SRH Text"/>
                 <a:ea typeface="SRH"/>
               </a:rPr>
-              <a:t>2026-09-11</a:t>
+              <a:t>2026-09-12</a:t>
             </a:fld>
             <a:endParaRPr lang="en-US" sz="900" b="0" u="none" strike="noStrike">
               <a:solidFill>
@@ -42510,7 +41995,7 @@
                 <a:tab pos="0" algn="l"/>
               </a:tabLst>
             </a:pPr>
-            <a:fld id="{0082514F-E31C-4C6A-9138-11C72C90B1CE}" type="slidenum">
+            <a:fld id="{900A739D-FC1A-4479-B313-447424646666}" type="slidenum">
               <a:rPr lang="de-DE" sz="1550" b="1" u="none" strike="noStrike">
                 <a:solidFill>
                   <a:srgbClr val="6D7373"/>
@@ -42520,7 +42005,7 @@
                 <a:latin typeface="SRH Text"/>
                 <a:ea typeface="SRH"/>
               </a:rPr>
-              <a:t>13</a:t>
+              <a:t>&lt;number&gt;</a:t>
             </a:fld>
             <a:endParaRPr lang="en-US" sz="1550" b="0" u="none" strike="noStrike">
               <a:solidFill>
@@ -42565,7 +42050,7 @@
       </p:grpSpPr>
       <p:sp>
         <p:nvSpPr>
-          <p:cNvPr id="345" name="PlaceHolder 1"/>
+          <p:cNvPr id="342" name="PlaceHolder 1"/>
           <p:cNvSpPr>
             <a:spLocks noGrp="1"/>
           </p:cNvSpPr>
@@ -42631,7 +42116,7 @@
       </p:sp>
       <p:sp>
         <p:nvSpPr>
-          <p:cNvPr id="346" name="PlaceHolder 2"/>
+          <p:cNvPr id="343" name="PlaceHolder 2"/>
           <p:cNvSpPr>
             <a:spLocks noGrp="1"/>
           </p:cNvSpPr>
@@ -42641,8 +42126,8 @@
         </p:nvSpPr>
         <p:spPr>
           <a:xfrm>
-            <a:off x="228600" y="914400"/>
-            <a:ext cx="5714280" cy="5451120"/>
+            <a:off x="228600" y="696600"/>
+            <a:ext cx="5256720" cy="6032160"/>
           </a:xfrm>
           <a:prstGeom prst="rect">
             <a:avLst/>
@@ -42673,16 +42158,16 @@
               </a:tabLst>
             </a:pPr>
             <a:r>
-              <a:rPr lang="en-US" sz="1300" b="1" u="none" strike="noStrike">
-                <a:solidFill>
-                  <a:srgbClr val="FF4000"/>
+              <a:rPr lang="en-US" sz="1300" b="0" u="none" strike="noStrike">
+                <a:solidFill>
+                  <a:srgbClr val="1C1C1C"/>
                 </a:solidFill>
                 <a:effectLst/>
                 <a:uFillTx/>
                 <a:latin typeface="SRH Text"/>
                 <a:ea typeface="SRH Text"/>
               </a:rPr>
-              <a:t>3. RELIABILITY ACTION</a:t>
+              <a:t>Ensure that the credit-risk model remains reliable after deployment when customer populations and data distributions change.</a:t>
             </a:r>
             <a:endParaRPr lang="de-DE" sz="1300" b="0" u="none" strike="noStrike">
               <a:solidFill>
@@ -42710,7 +42195,7 @@
               </a:tabLst>
             </a:pPr>
             <a:r>
-              <a:rPr lang="en-US" sz="1400" b="0" u="none" strike="noStrike">
+              <a:rPr lang="en-US" sz="1300" b="0" u="none" strike="noStrike">
                 <a:solidFill>
                   <a:srgbClr val="1C1C1C"/>
                 </a:solidFill>
@@ -42719,9 +42204,9 @@
                 <a:latin typeface="SRH Text"/>
                 <a:ea typeface="SRH Text"/>
               </a:rPr>
-              <a:t>Detect degradation → Generate alert → Investigate / Retrain</a:t>
-            </a:r>
-            <a:endParaRPr lang="de-DE" sz="1400" b="0" u="none" strike="noStrike">
+              <a:t>Automated Monitoring Pipeline</a:t>
+            </a:r>
+            <a:endParaRPr lang="de-DE" sz="1300" b="0" u="none" strike="noStrike">
               <a:solidFill>
                 <a:schemeClr val="dk1"/>
               </a:solidFill>
@@ -42747,18 +42232,18 @@
               </a:tabLst>
             </a:pPr>
             <a:r>
-              <a:rPr lang="en-US" sz="1400" b="0" u="none" strike="noStrike">
-                <a:solidFill>
-                  <a:srgbClr val="1C1C1C"/>
+              <a:rPr lang="en-US" sz="1300" b="1" u="none" strike="noStrike">
+                <a:solidFill>
+                  <a:srgbClr val="FF4000"/>
                 </a:solidFill>
                 <a:effectLst/>
                 <a:uFillTx/>
                 <a:latin typeface="SRH Text"/>
                 <a:ea typeface="SRH Text"/>
               </a:rPr>
-              <a:t>Drift Classification</a:t>
-            </a:r>
-            <a:endParaRPr lang="de-DE" sz="1400" b="0" u="none" strike="noStrike">
+              <a:t>1. DATA DRIFT</a:t>
+            </a:r>
+            <a:endParaRPr lang="de-DE" sz="1300" b="0" u="none" strike="noStrike">
               <a:solidFill>
                 <a:schemeClr val="dk1"/>
               </a:solidFill>
@@ -42768,7 +42253,7 @@
             </a:endParaRPr>
           </a:p>
           <a:p>
-            <a:pPr marL="285840" indent="-285840" algn="l" defTabSz="914400">
+            <a:pPr marL="285840" indent="0" algn="l" defTabSz="914400">
               <a:lnSpc>
                 <a:spcPct val="150000"/>
               </a:lnSpc>
@@ -42778,17 +42263,13 @@
               <a:spcAft>
                 <a:spcPts val="992"/>
               </a:spcAft>
-              <a:buClr>
-                <a:srgbClr val="575756"/>
-              </a:buClr>
-              <a:buFont typeface="Wingdings" charset="2"/>
-              <a:buChar char=""/>
-              <a:tabLst>
-                <a:tab pos="0" algn="l"/>
-              </a:tabLst>
-            </a:pPr>
-            <a:r>
-              <a:rPr lang="en-US" sz="1400" b="0" u="none" strike="noStrike">
+              <a:buNone/>
+              <a:tabLst>
+                <a:tab pos="0" algn="l"/>
+              </a:tabLst>
+            </a:pPr>
+            <a:r>
+              <a:rPr lang="en-US" sz="1300" b="0" u="none" strike="noStrike">
                 <a:solidFill>
                   <a:srgbClr val="1C1C1C"/>
                 </a:solidFill>
@@ -42797,9 +42278,9 @@
                 <a:latin typeface="SRH Text"/>
                 <a:ea typeface="SRH Text"/>
               </a:rPr>
-              <a:t>🟢 Stable</a:t>
-            </a:r>
-            <a:endParaRPr lang="de-DE" sz="1400" b="0" u="none" strike="noStrike">
+              <a:t>Monitor changes in customer characteristics</a:t>
+            </a:r>
+            <a:endParaRPr lang="de-DE" sz="1300" b="0" u="none" strike="noStrike">
               <a:solidFill>
                 <a:schemeClr val="dk1"/>
               </a:solidFill>
@@ -42809,7 +42290,7 @@
             </a:endParaRPr>
           </a:p>
           <a:p>
-            <a:pPr marL="285840" indent="-285840" algn="l" defTabSz="914400">
+            <a:pPr marL="285840" indent="0" algn="l" defTabSz="914400">
               <a:lnSpc>
                 <a:spcPct val="150000"/>
               </a:lnSpc>
@@ -42819,17 +42300,13 @@
               <a:spcAft>
                 <a:spcPts val="992"/>
               </a:spcAft>
-              <a:buClr>
-                <a:srgbClr val="575756"/>
-              </a:buClr>
-              <a:buFont typeface="Wingdings" charset="2"/>
-              <a:buChar char=""/>
-              <a:tabLst>
-                <a:tab pos="0" algn="l"/>
-              </a:tabLst>
-            </a:pPr>
-            <a:r>
-              <a:rPr lang="en-US" sz="1400" b="0" u="none" strike="noStrike">
+              <a:buNone/>
+              <a:tabLst>
+                <a:tab pos="0" algn="l"/>
+              </a:tabLst>
+            </a:pPr>
+            <a:r>
+              <a:rPr lang="en-US" sz="1300" b="0" u="none" strike="noStrike">
                 <a:solidFill>
                   <a:srgbClr val="1C1C1C"/>
                 </a:solidFill>
@@ -42838,9 +42315,9 @@
                 <a:latin typeface="SRH Text"/>
                 <a:ea typeface="SRH Text"/>
               </a:rPr>
-              <a:t>🟠 Moderate Drift</a:t>
-            </a:r>
-            <a:endParaRPr lang="de-DE" sz="1400" b="0" u="none" strike="noStrike">
+              <a:t>PSI → measures changes in feature distributions</a:t>
+            </a:r>
+            <a:endParaRPr lang="de-DE" sz="1300" b="0" u="none" strike="noStrike">
               <a:solidFill>
                 <a:schemeClr val="dk1"/>
               </a:solidFill>
@@ -42850,7 +42327,7 @@
             </a:endParaRPr>
           </a:p>
           <a:p>
-            <a:pPr marL="285840" indent="-285840" algn="l" defTabSz="914400">
+            <a:pPr marL="285840" indent="0" algn="l" defTabSz="914400">
               <a:lnSpc>
                 <a:spcPct val="150000"/>
               </a:lnSpc>
@@ -42860,17 +42337,13 @@
               <a:spcAft>
                 <a:spcPts val="992"/>
               </a:spcAft>
-              <a:buClr>
-                <a:srgbClr val="575756"/>
-              </a:buClr>
-              <a:buFont typeface="Wingdings" charset="2"/>
-              <a:buChar char=""/>
-              <a:tabLst>
-                <a:tab pos="0" algn="l"/>
-              </a:tabLst>
-            </a:pPr>
-            <a:r>
-              <a:rPr lang="en-US" sz="1400" b="0" u="none" strike="noStrike">
+              <a:buNone/>
+              <a:tabLst>
+                <a:tab pos="0" algn="l"/>
+              </a:tabLst>
+            </a:pPr>
+            <a:r>
+              <a:rPr lang="en-US" sz="1300" b="0" u="none" strike="noStrike">
                 <a:solidFill>
                   <a:srgbClr val="1C1C1C"/>
                 </a:solidFill>
@@ -42879,9 +42352,59 @@
                 <a:latin typeface="SRH Text"/>
                 <a:ea typeface="SRH Text"/>
               </a:rPr>
-              <a:t>🔴 Significant Drift</a:t>
-            </a:r>
-            <a:endParaRPr lang="de-DE" sz="1400" b="0" u="none" strike="noStrike">
+              <a:t>PSI Interpretation:</a:t>
+            </a:r>
+            <a:endParaRPr lang="de-DE" sz="1300" b="0" u="none" strike="noStrike">
+              <a:solidFill>
+                <a:schemeClr val="dk1"/>
+              </a:solidFill>
+              <a:effectLst/>
+              <a:uFillTx/>
+              <a:latin typeface="SRH Text"/>
+            </a:endParaRPr>
+          </a:p>
+          <a:p>
+            <a:pPr marL="285840" indent="0" algn="l" defTabSz="914400">
+              <a:lnSpc>
+                <a:spcPct val="150000"/>
+              </a:lnSpc>
+              <a:spcBef>
+                <a:spcPts val="1191"/>
+              </a:spcBef>
+              <a:spcAft>
+                <a:spcPts val="992"/>
+              </a:spcAft>
+              <a:buNone/>
+              <a:tabLst>
+                <a:tab pos="0" algn="l"/>
+              </a:tabLst>
+            </a:pPr>
+            <a:endParaRPr lang="de-DE" sz="1300" b="0" u="none" strike="noStrike">
+              <a:solidFill>
+                <a:schemeClr val="dk1"/>
+              </a:solidFill>
+              <a:effectLst/>
+              <a:uFillTx/>
+              <a:latin typeface="SRH Text"/>
+            </a:endParaRPr>
+          </a:p>
+          <a:p>
+            <a:pPr marL="285840" indent="0" algn="l" defTabSz="914400">
+              <a:lnSpc>
+                <a:spcPct val="150000"/>
+              </a:lnSpc>
+              <a:spcBef>
+                <a:spcPts val="1191"/>
+              </a:spcBef>
+              <a:spcAft>
+                <a:spcPts val="992"/>
+              </a:spcAft>
+              <a:buNone/>
+              <a:tabLst>
+                <a:tab pos="0" algn="l"/>
+              </a:tabLst>
+            </a:pPr>
+            <a:endParaRPr lang="de-DE" sz="1300" b="0" u="none" strike="noStrike">
               <a:solidFill>
                 <a:schemeClr val="dk1"/>
               </a:solidFill>
@@ -42919,7 +42442,7 @@
       </p:sp>
       <p:sp>
         <p:nvSpPr>
-          <p:cNvPr id="347" name="PlaceHolder 3"/>
+          <p:cNvPr id="344" name="PlaceHolder 3"/>
           <p:cNvSpPr>
             <a:spLocks noGrp="1"/>
           </p:cNvSpPr>
@@ -42974,7 +42497,7 @@
                 <a:tab pos="0" algn="l"/>
               </a:tabLst>
             </a:pPr>
-            <a:fld id="{01DFB1EA-5E87-4F1B-AB7D-82F2BB457C2C}" type="datetime1">
+            <a:fld id="{127657C2-CF0B-4951-A531-C7A8A42799AD}" type="datetime1">
               <a:rPr lang="en-CA" sz="900" b="1" u="none" strike="noStrike">
                 <a:solidFill>
                   <a:srgbClr val="6D7373"/>
@@ -42984,7 +42507,7 @@
                 <a:latin typeface="SRH Text"/>
                 <a:ea typeface="SRH"/>
               </a:rPr>
-              <a:t>2026-09-11</a:t>
+              <a:t>2026-09-12</a:t>
             </a:fld>
             <a:endParaRPr lang="en-US" sz="900" b="0" u="none" strike="noStrike">
               <a:solidFill>
@@ -42999,7 +42522,7 @@
       </p:sp>
       <p:sp>
         <p:nvSpPr>
-          <p:cNvPr id="348" name="PlaceHolder 4"/>
+          <p:cNvPr id="345" name="PlaceHolder 4"/>
           <p:cNvSpPr>
             <a:spLocks noGrp="1"/>
           </p:cNvSpPr>
@@ -43079,7 +42602,7 @@
       </p:sp>
       <p:sp>
         <p:nvSpPr>
-          <p:cNvPr id="349" name="PlaceHolder 5"/>
+          <p:cNvPr id="346" name="PlaceHolder 5"/>
           <p:cNvSpPr>
             <a:spLocks noGrp="1"/>
           </p:cNvSpPr>
@@ -43134,7 +42657,7 @@
                 <a:tab pos="0" algn="l"/>
               </a:tabLst>
             </a:pPr>
-            <a:fld id="{9A1A6142-9BD0-46E3-B867-3374A8076FE4}" type="slidenum">
+            <a:fld id="{CF0D34FE-752F-4B24-9087-7031F4C114B2}" type="slidenum">
               <a:rPr lang="de-DE" sz="1550" b="1" u="none" strike="noStrike">
                 <a:solidFill>
                   <a:srgbClr val="6D7373"/>
@@ -43159,14 +42682,14 @@
       </p:sp>
       <p:sp>
         <p:nvSpPr>
-          <p:cNvPr id="350" name="PlaceHolder 152"/>
+          <p:cNvPr id="347" name="PlaceHolder 114"/>
           <p:cNvSpPr/>
           <p:nvPr/>
         </p:nvSpPr>
         <p:spPr>
           <a:xfrm>
-            <a:off x="6168960" y="914400"/>
-            <a:ext cx="5945760" cy="5485320"/>
+            <a:off x="6172200" y="685800"/>
+            <a:ext cx="5256720" cy="6032160"/>
           </a:xfrm>
           <a:prstGeom prst="rect">
             <a:avLst/>
@@ -43207,16 +42730,16 @@
               </a:tabLst>
             </a:pPr>
             <a:r>
-              <a:rPr lang="en-US" sz="1300" b="1" u="none" strike="noStrike">
-                <a:solidFill>
-                  <a:srgbClr val="FF4000"/>
+              <a:rPr lang="en-US" sz="1300" b="0" u="none" strike="noStrike">
+                <a:solidFill>
+                  <a:srgbClr val="1C1C1C"/>
                 </a:solidFill>
                 <a:effectLst/>
                 <a:uFillTx/>
                 <a:latin typeface="SRH Text"/>
                 <a:ea typeface="SRH Text"/>
               </a:rPr>
-              <a:t>Reference Population</a:t>
+              <a:t>KS Test → compares reference and new distributions</a:t>
             </a:r>
             <a:endParaRPr lang="en-US" sz="1300" b="0" u="none" strike="noStrike">
               <a:solidFill>
@@ -43248,7 +42771,7 @@
               </a:tabLst>
             </a:pPr>
             <a:r>
-              <a:rPr lang="en-US" sz="1400" b="0" u="none" strike="noStrike">
+              <a:rPr lang="en-US" sz="1300" b="0" u="none" strike="noStrike">
                 <a:solidFill>
                   <a:srgbClr val="1C1C1C"/>
                 </a:solidFill>
@@ -43257,9 +42780,57 @@
                 <a:latin typeface="SRH Text"/>
                 <a:ea typeface="SRH Text"/>
               </a:rPr>
-              <a:t>The validation dataset was used as the baseline because it represents unseen customers.</a:t>
-            </a:r>
-            <a:endParaRPr lang="en-US" sz="1400" b="0" u="none" strike="noStrike">
+              <a:t>KS Interpretation:</a:t>
+            </a:r>
+            <a:endParaRPr lang="en-US" sz="1300" b="0" u="none" strike="noStrike">
+              <a:solidFill>
+                <a:srgbClr val="000000"/>
+              </a:solidFill>
+              <a:effectLst/>
+              <a:uFillTx/>
+              <a:latin typeface="Arial"/>
+            </a:endParaRPr>
+          </a:p>
+          <a:p>
+            <a:pPr defTabSz="914400">
+              <a:lnSpc>
+                <a:spcPct val="150000"/>
+              </a:lnSpc>
+              <a:spcBef>
+                <a:spcPts val="1191"/>
+              </a:spcBef>
+              <a:spcAft>
+                <a:spcPts val="992"/>
+              </a:spcAft>
+              <a:tabLst>
+                <a:tab pos="0" algn="l"/>
+              </a:tabLst>
+            </a:pPr>
+            <a:endParaRPr lang="en-US" sz="1300" b="0" u="none" strike="noStrike">
+              <a:solidFill>
+                <a:srgbClr val="000000"/>
+              </a:solidFill>
+              <a:effectLst/>
+              <a:uFillTx/>
+              <a:latin typeface="Arial"/>
+            </a:endParaRPr>
+          </a:p>
+          <a:p>
+            <a:pPr defTabSz="914400">
+              <a:lnSpc>
+                <a:spcPct val="150000"/>
+              </a:lnSpc>
+              <a:spcBef>
+                <a:spcPts val="1191"/>
+              </a:spcBef>
+              <a:spcAft>
+                <a:spcPts val="992"/>
+              </a:spcAft>
+              <a:tabLst>
+                <a:tab pos="0" algn="l"/>
+              </a:tabLst>
+            </a:pPr>
+            <a:endParaRPr lang="en-US" sz="1300" b="0" u="none" strike="noStrike">
               <a:solidFill>
                 <a:srgbClr val="000000"/>
               </a:solidFill>
@@ -43289,18 +42860,18 @@
               </a:tabLst>
             </a:pPr>
             <a:r>
-              <a:rPr lang="en-US" sz="1400" b="0" u="none" strike="noStrike">
-                <a:solidFill>
-                  <a:srgbClr val="1C1C1C"/>
+              <a:rPr lang="en-US" sz="1300" b="1" u="none" strike="noStrike">
+                <a:solidFill>
+                  <a:srgbClr val="FF4000"/>
                 </a:solidFill>
                 <a:effectLst/>
                 <a:uFillTx/>
                 <a:latin typeface="SRH Text"/>
                 <a:ea typeface="SRH Text"/>
               </a:rPr>
-              <a:t>Key Contribution</a:t>
-            </a:r>
-            <a:endParaRPr lang="en-US" sz="1400" b="0" u="none" strike="noStrike">
+              <a:t>2. PREDICTION / MODEL MONITORING</a:t>
+            </a:r>
+            <a:endParaRPr lang="en-US" sz="1300" b="0" u="none" strike="noStrike">
               <a:solidFill>
                 <a:srgbClr val="000000"/>
               </a:solidFill>
@@ -43330,7 +42901,7 @@
               </a:tabLst>
             </a:pPr>
             <a:r>
-              <a:rPr lang="en-US" sz="1400" b="0" u="none" strike="noStrike">
+              <a:rPr lang="en-US" sz="1300" b="0" u="none" strike="noStrike">
                 <a:solidFill>
                   <a:srgbClr val="1C1C1C"/>
                 </a:solidFill>
@@ -43339,9 +42910,9 @@
                 <a:latin typeface="SRH Text"/>
                 <a:ea typeface="SRH Text"/>
               </a:rPr>
-              <a:t>The model is not treated as a static predictor.</a:t>
-            </a:r>
-            <a:endParaRPr lang="en-US" sz="1400" b="0" u="none" strike="noStrike">
+              <a:t>Monitor changes in model behavior and performance</a:t>
+            </a:r>
+            <a:endParaRPr lang="en-US" sz="1300" b="0" u="none" strike="noStrike">
               <a:solidFill>
                 <a:srgbClr val="000000"/>
               </a:solidFill>
@@ -43371,7 +42942,7 @@
               </a:tabLst>
             </a:pPr>
             <a:r>
-              <a:rPr lang="en-US" sz="1400" b="0" u="none" strike="noStrike">
+              <a:rPr lang="en-US" sz="1300" b="0" u="none" strike="noStrike">
                 <a:solidFill>
                   <a:srgbClr val="1C1C1C"/>
                 </a:solidFill>
@@ -43380,9 +42951,132 @@
                 <a:latin typeface="SRH Text"/>
                 <a:ea typeface="SRH Text"/>
               </a:rPr>
-              <a:t>Reliability is continuously monitored under distribution shift.</a:t>
-            </a:r>
-            <a:endParaRPr lang="en-US" sz="1400" b="0" u="none" strike="noStrike">
+              <a:t>AUC</a:t>
+            </a:r>
+            <a:endParaRPr lang="en-US" sz="1300" b="0" u="none" strike="noStrike">
+              <a:solidFill>
+                <a:srgbClr val="000000"/>
+              </a:solidFill>
+              <a:effectLst/>
+              <a:uFillTx/>
+              <a:latin typeface="Arial"/>
+            </a:endParaRPr>
+          </a:p>
+          <a:p>
+            <a:pPr marL="285840" indent="-285840" defTabSz="914400">
+              <a:lnSpc>
+                <a:spcPct val="150000"/>
+              </a:lnSpc>
+              <a:spcBef>
+                <a:spcPts val="1191"/>
+              </a:spcBef>
+              <a:spcAft>
+                <a:spcPts val="992"/>
+              </a:spcAft>
+              <a:buClr>
+                <a:srgbClr val="575756"/>
+              </a:buClr>
+              <a:buFont typeface="Wingdings" charset="2"/>
+              <a:buChar char=""/>
+              <a:tabLst>
+                <a:tab pos="0" algn="l"/>
+              </a:tabLst>
+            </a:pPr>
+            <a:r>
+              <a:rPr lang="en-US" sz="1300" b="0" u="none" strike="noStrike">
+                <a:solidFill>
+                  <a:srgbClr val="1C1C1C"/>
+                </a:solidFill>
+                <a:effectLst/>
+                <a:uFillTx/>
+                <a:latin typeface="SRH Text"/>
+                <a:ea typeface="SRH Text"/>
+              </a:rPr>
+              <a:t>Accuracy</a:t>
+            </a:r>
+            <a:endParaRPr lang="en-US" sz="1300" b="0" u="none" strike="noStrike">
+              <a:solidFill>
+                <a:srgbClr val="000000"/>
+              </a:solidFill>
+              <a:effectLst/>
+              <a:uFillTx/>
+              <a:latin typeface="Arial"/>
+            </a:endParaRPr>
+          </a:p>
+          <a:p>
+            <a:pPr marL="285840" indent="-285840" defTabSz="914400">
+              <a:lnSpc>
+                <a:spcPct val="150000"/>
+              </a:lnSpc>
+              <a:spcBef>
+                <a:spcPts val="1191"/>
+              </a:spcBef>
+              <a:spcAft>
+                <a:spcPts val="992"/>
+              </a:spcAft>
+              <a:buClr>
+                <a:srgbClr val="575756"/>
+              </a:buClr>
+              <a:buFont typeface="Wingdings" charset="2"/>
+              <a:buChar char=""/>
+              <a:tabLst>
+                <a:tab pos="0" algn="l"/>
+              </a:tabLst>
+            </a:pPr>
+            <a:r>
+              <a:rPr lang="en-US" sz="1300" b="0" u="none" strike="noStrike">
+                <a:solidFill>
+                  <a:srgbClr val="1C1C1C"/>
+                </a:solidFill>
+                <a:effectLst/>
+                <a:uFillTx/>
+                <a:latin typeface="SRH Text"/>
+                <a:ea typeface="SRH Text"/>
+              </a:rPr>
+              <a:t>False Negatives</a:t>
+            </a:r>
+            <a:endParaRPr lang="en-US" sz="1300" b="0" u="none" strike="noStrike">
+              <a:solidFill>
+                <a:srgbClr val="000000"/>
+              </a:solidFill>
+              <a:effectLst/>
+              <a:uFillTx/>
+              <a:latin typeface="Arial"/>
+            </a:endParaRPr>
+          </a:p>
+          <a:p>
+            <a:pPr marL="285840" indent="-285840" defTabSz="914400">
+              <a:lnSpc>
+                <a:spcPct val="150000"/>
+              </a:lnSpc>
+              <a:spcBef>
+                <a:spcPts val="1191"/>
+              </a:spcBef>
+              <a:spcAft>
+                <a:spcPts val="992"/>
+              </a:spcAft>
+              <a:buClr>
+                <a:srgbClr val="575756"/>
+              </a:buClr>
+              <a:buFont typeface="Wingdings" charset="2"/>
+              <a:buChar char=""/>
+              <a:tabLst>
+                <a:tab pos="0" algn="l"/>
+              </a:tabLst>
+            </a:pPr>
+            <a:r>
+              <a:rPr lang="en-US" sz="1300" b="0" u="none" strike="noStrike">
+                <a:solidFill>
+                  <a:srgbClr val="1C1C1C"/>
+                </a:solidFill>
+                <a:effectLst/>
+                <a:uFillTx/>
+                <a:latin typeface="SRH Text"/>
+                <a:ea typeface="SRH Text"/>
+              </a:rPr>
+              <a:t>False Positives</a:t>
+            </a:r>
+            <a:endParaRPr lang="en-US" sz="1300" b="0" u="none" strike="noStrike">
               <a:solidFill>
                 <a:srgbClr val="000000"/>
               </a:solidFill>
@@ -43393,6 +43087,54 @@
           </a:p>
         </p:txBody>
       </p:sp>
+      <p:pic>
+        <p:nvPicPr>
+          <p:cNvPr id="348" name=""/>
+          <p:cNvPicPr/>
+          <p:nvPr/>
+        </p:nvPicPr>
+        <p:blipFill>
+          <a:blip r:embed="rId1"/>
+          <a:stretch/>
+        </p:blipFill>
+        <p:spPr>
+          <a:xfrm>
+            <a:off x="228600" y="4343400"/>
+            <a:ext cx="5247720" cy="1143000"/>
+          </a:xfrm>
+          <a:prstGeom prst="rect">
+            <a:avLst/>
+          </a:prstGeom>
+          <a:noFill/>
+          <a:ln w="0">
+            <a:noFill/>
+          </a:ln>
+        </p:spPr>
+      </p:pic>
+      <p:pic>
+        <p:nvPicPr>
+          <p:cNvPr id="349" name=""/>
+          <p:cNvPicPr/>
+          <p:nvPr/>
+        </p:nvPicPr>
+        <p:blipFill>
+          <a:blip r:embed="rId2"/>
+          <a:stretch/>
+        </p:blipFill>
+        <p:spPr>
+          <a:xfrm>
+            <a:off x="6400800" y="1828800"/>
+            <a:ext cx="5008320" cy="1005120"/>
+          </a:xfrm>
+          <a:prstGeom prst="rect">
+            <a:avLst/>
+          </a:prstGeom>
+          <a:noFill/>
+          <a:ln w="0">
+            <a:noFill/>
+          </a:ln>
+        </p:spPr>
+      </p:pic>
     </p:spTree>
   </p:cSld>
   <mc:AlternateContent>
@@ -43425,7 +43167,7 @@
       </p:grpSpPr>
       <p:sp>
         <p:nvSpPr>
-          <p:cNvPr id="351" name="PlaceHolder 1"/>
+          <p:cNvPr id="350" name="PlaceHolder 1"/>
           <p:cNvSpPr>
             <a:spLocks noGrp="1"/>
           </p:cNvSpPr>
@@ -43451,9 +43193,9 @@
             <a:noAutofit/>
           </a:bodyPr>
           <a:p>
-            <a:pPr marL="285840" indent="0" algn="l" defTabSz="914400">
-              <a:lnSpc>
-                <a:spcPct val="150000"/>
+            <a:pPr indent="0" algn="l" defTabSz="914400">
+              <a:lnSpc>
+                <a:spcPct val="100000"/>
               </a:lnSpc>
               <a:spcBef>
                 <a:spcPts val="1191"/>
@@ -43467,16 +43209,16 @@
               </a:tabLst>
             </a:pPr>
             <a:r>
-              <a:rPr lang="en-US" sz="2600" b="1" u="none" strike="noStrike">
+              <a:rPr lang="de-DE" sz="2600" b="1" u="none" strike="noStrike">
                 <a:solidFill>
                   <a:srgbClr val="FF4000"/>
                 </a:solidFill>
                 <a:effectLst/>
                 <a:uFillTx/>
-                <a:latin typeface="SRH Text"/>
-                <a:ea typeface="SRH Text"/>
-              </a:rPr>
-              <a:t>Nightly Automated Model Monitoring</a:t>
+                <a:latin typeface="SRH Headline"/>
+                <a:ea typeface="SRH Headline"/>
+              </a:rPr>
+              <a:t>Reliability Monitoring Framework</a:t>
             </a:r>
             <a:endParaRPr lang="de-DE" sz="2600" b="1" u="none" strike="noStrike">
               <a:solidFill>
@@ -43491,7 +43233,7 @@
       </p:sp>
       <p:sp>
         <p:nvSpPr>
-          <p:cNvPr id="352" name="PlaceHolder 2"/>
+          <p:cNvPr id="351" name="PlaceHolder 2"/>
           <p:cNvSpPr>
             <a:spLocks noGrp="1"/>
           </p:cNvSpPr>
@@ -43502,7 +43244,7 @@
         <p:spPr>
           <a:xfrm>
             <a:off x="228600" y="914400"/>
-            <a:ext cx="5942520" cy="5451120"/>
+            <a:ext cx="5714280" cy="5451120"/>
           </a:xfrm>
           <a:prstGeom prst="rect">
             <a:avLst/>
@@ -43517,9 +43259,9 @@
             <a:noAutofit/>
           </a:bodyPr>
           <a:p>
-            <a:pPr indent="0" algn="l" defTabSz="914400">
-              <a:lnSpc>
-                <a:spcPct val="110000"/>
+            <a:pPr marL="285840" indent="0" algn="l" defTabSz="914400">
+              <a:lnSpc>
+                <a:spcPct val="150000"/>
               </a:lnSpc>
               <a:spcBef>
                 <a:spcPts val="1191"/>
@@ -43533,16 +43275,16 @@
               </a:tabLst>
             </a:pPr>
             <a:r>
-              <a:rPr lang="de-DE" sz="1300" b="0" u="none" strike="noStrike">
-                <a:solidFill>
-                  <a:schemeClr val="dk1"/>
+              <a:rPr lang="en-US" sz="1300" b="1" u="none" strike="noStrike">
+                <a:solidFill>
+                  <a:srgbClr val="FF4000"/>
                 </a:solidFill>
                 <a:effectLst/>
                 <a:uFillTx/>
                 <a:latin typeface="SRH Text"/>
                 <a:ea typeface="SRH Text"/>
               </a:rPr>
-              <a:t>Purpose: Continuously monitor the deployed credit-risk model for data and prediction changes.</a:t>
+              <a:t>3. RELIABILITY ACTION</a:t>
             </a:r>
             <a:endParaRPr lang="de-DE" sz="1300" b="0" u="none" strike="noStrike">
               <a:solidFill>
@@ -43554,9 +43296,9 @@
             </a:endParaRPr>
           </a:p>
           <a:p>
-            <a:pPr indent="0" algn="l" defTabSz="914400">
-              <a:lnSpc>
-                <a:spcPct val="110000"/>
+            <a:pPr marL="285840" indent="0" algn="l" defTabSz="914400">
+              <a:lnSpc>
+                <a:spcPct val="150000"/>
               </a:lnSpc>
               <a:spcBef>
                 <a:spcPts val="1191"/>
@@ -43570,18 +43312,18 @@
               </a:tabLst>
             </a:pPr>
             <a:r>
-              <a:rPr lang="de-DE" sz="1300" b="0" u="none" strike="noStrike">
-                <a:solidFill>
-                  <a:schemeClr val="dk1"/>
+              <a:rPr lang="en-US" sz="1400" b="0" u="none" strike="noStrike">
+                <a:solidFill>
+                  <a:srgbClr val="1C1C1C"/>
                 </a:solidFill>
                 <a:effectLst/>
                 <a:uFillTx/>
                 <a:latin typeface="SRH Text"/>
                 <a:ea typeface="SRH Text"/>
               </a:rPr>
-              <a:t>Monitoring Pipeline</a:t>
-            </a:r>
-            <a:endParaRPr lang="de-DE" sz="1300" b="0" u="none" strike="noStrike">
+              <a:t>Detect degradation → Generate alert → Investigate / Retrain</a:t>
+            </a:r>
+            <a:endParaRPr lang="de-DE" sz="1400" b="0" u="none" strike="noStrike">
               <a:solidFill>
                 <a:schemeClr val="dk1"/>
               </a:solidFill>
@@ -43591,9 +43333,9 @@
             </a:endParaRPr>
           </a:p>
           <a:p>
-            <a:pPr indent="0" algn="l" defTabSz="914400">
-              <a:lnSpc>
-                <a:spcPct val="110000"/>
+            <a:pPr marL="285840" indent="0" algn="l" defTabSz="914400">
+              <a:lnSpc>
+                <a:spcPct val="150000"/>
               </a:lnSpc>
               <a:spcBef>
                 <a:spcPts val="1191"/>
@@ -43607,18 +43349,18 @@
               </a:tabLst>
             </a:pPr>
             <a:r>
-              <a:rPr lang="de-DE" sz="1300" b="0" u="none" strike="noStrike">
-                <a:solidFill>
-                  <a:schemeClr val="dk1"/>
+              <a:rPr lang="en-US" sz="1400" b="0" u="none" strike="noStrike">
+                <a:solidFill>
+                  <a:srgbClr val="1C1C1C"/>
                 </a:solidFill>
                 <a:effectLst/>
                 <a:uFillTx/>
                 <a:latin typeface="SRH Text"/>
                 <a:ea typeface="SRH Text"/>
               </a:rPr>
-              <a:t>Collect new data</a:t>
-            </a:r>
-            <a:endParaRPr lang="de-DE" sz="1300" b="0" u="none" strike="noStrike">
+              <a:t>Drift Classification</a:t>
+            </a:r>
+            <a:endParaRPr lang="de-DE" sz="1400" b="0" u="none" strike="noStrike">
               <a:solidFill>
                 <a:schemeClr val="dk1"/>
               </a:solidFill>
@@ -43628,9 +43370,9 @@
             </a:endParaRPr>
           </a:p>
           <a:p>
-            <a:pPr indent="0" algn="l" defTabSz="914400">
-              <a:lnSpc>
-                <a:spcPct val="110000"/>
+            <a:pPr marL="285840" indent="-285840" algn="l" defTabSz="914400">
+              <a:lnSpc>
+                <a:spcPct val="150000"/>
               </a:lnSpc>
               <a:spcBef>
                 <a:spcPts val="1191"/>
@@ -43638,24 +43380,28 @@
               <a:spcAft>
                 <a:spcPts val="992"/>
               </a:spcAft>
-              <a:buNone/>
-              <a:tabLst>
-                <a:tab pos="0" algn="l"/>
-              </a:tabLst>
-            </a:pPr>
-            <a:r>
-              <a:rPr lang="de-DE" sz="1300" b="0" u="none" strike="noStrike">
-                <a:solidFill>
-                  <a:schemeClr val="dk1"/>
+              <a:buClr>
+                <a:srgbClr val="575756"/>
+              </a:buClr>
+              <a:buFont typeface="Wingdings" charset="2"/>
+              <a:buChar char=""/>
+              <a:tabLst>
+                <a:tab pos="0" algn="l"/>
+              </a:tabLst>
+            </a:pPr>
+            <a:r>
+              <a:rPr lang="en-US" sz="1400" b="0" u="none" strike="noStrike">
+                <a:solidFill>
+                  <a:srgbClr val="1C1C1C"/>
                 </a:solidFill>
                 <a:effectLst/>
                 <a:uFillTx/>
                 <a:latin typeface="SRH Text"/>
                 <a:ea typeface="SRH Text"/>
               </a:rPr>
-              <a:t>→ Latest scored loan applications </a:t>
-            </a:r>
-            <a:endParaRPr lang="de-DE" sz="1300" b="0" u="none" strike="noStrike">
+              <a:t>🟢 Stable</a:t>
+            </a:r>
+            <a:endParaRPr lang="de-DE" sz="1400" b="0" u="none" strike="noStrike">
               <a:solidFill>
                 <a:schemeClr val="dk1"/>
               </a:solidFill>
@@ -43665,9 +43411,9 @@
             </a:endParaRPr>
           </a:p>
           <a:p>
-            <a:pPr indent="0" algn="l" defTabSz="914400">
-              <a:lnSpc>
-                <a:spcPct val="110000"/>
+            <a:pPr marL="285840" indent="-285840" algn="l" defTabSz="914400">
+              <a:lnSpc>
+                <a:spcPct val="150000"/>
               </a:lnSpc>
               <a:spcBef>
                 <a:spcPts val="1191"/>
@@ -43675,24 +43421,28 @@
               <a:spcAft>
                 <a:spcPts val="992"/>
               </a:spcAft>
-              <a:buNone/>
-              <a:tabLst>
-                <a:tab pos="0" algn="l"/>
-              </a:tabLst>
-            </a:pPr>
-            <a:r>
-              <a:rPr lang="de-DE" sz="1300" b="0" u="none" strike="noStrike">
-                <a:solidFill>
-                  <a:schemeClr val="dk1"/>
+              <a:buClr>
+                <a:srgbClr val="575756"/>
+              </a:buClr>
+              <a:buFont typeface="Wingdings" charset="2"/>
+              <a:buChar char=""/>
+              <a:tabLst>
+                <a:tab pos="0" algn="l"/>
+              </a:tabLst>
+            </a:pPr>
+            <a:r>
+              <a:rPr lang="en-US" sz="1400" b="0" u="none" strike="noStrike">
+                <a:solidFill>
+                  <a:srgbClr val="1C1C1C"/>
                 </a:solidFill>
                 <a:effectLst/>
                 <a:uFillTx/>
                 <a:latin typeface="SRH Text"/>
                 <a:ea typeface="SRH Text"/>
               </a:rPr>
-              <a:t>Data Drift Detection</a:t>
-            </a:r>
-            <a:endParaRPr lang="de-DE" sz="1300" b="0" u="none" strike="noStrike">
+              <a:t>🟠 Moderate Drift</a:t>
+            </a:r>
+            <a:endParaRPr lang="de-DE" sz="1400" b="0" u="none" strike="noStrike">
               <a:solidFill>
                 <a:schemeClr val="dk1"/>
               </a:solidFill>
@@ -43702,9 +43452,9 @@
             </a:endParaRPr>
           </a:p>
           <a:p>
-            <a:pPr indent="0" algn="l" defTabSz="914400">
-              <a:lnSpc>
-                <a:spcPct val="110000"/>
+            <a:pPr marL="285840" indent="-285840" algn="l" defTabSz="914400">
+              <a:lnSpc>
+                <a:spcPct val="150000"/>
               </a:lnSpc>
               <a:spcBef>
                 <a:spcPts val="1191"/>
@@ -43712,24 +43462,28 @@
               <a:spcAft>
                 <a:spcPts val="992"/>
               </a:spcAft>
-              <a:buNone/>
-              <a:tabLst>
-                <a:tab pos="0" algn="l"/>
-              </a:tabLst>
-            </a:pPr>
-            <a:r>
-              <a:rPr lang="de-DE" sz="1300" b="0" u="none" strike="noStrike">
-                <a:solidFill>
-                  <a:schemeClr val="dk1"/>
+              <a:buClr>
+                <a:srgbClr val="575756"/>
+              </a:buClr>
+              <a:buFont typeface="Wingdings" charset="2"/>
+              <a:buChar char=""/>
+              <a:tabLst>
+                <a:tab pos="0" algn="l"/>
+              </a:tabLst>
+            </a:pPr>
+            <a:r>
+              <a:rPr lang="en-US" sz="1400" b="0" u="none" strike="noStrike">
+                <a:solidFill>
+                  <a:srgbClr val="1C1C1C"/>
                 </a:solidFill>
                 <a:effectLst/>
                 <a:uFillTx/>
                 <a:latin typeface="SRH Text"/>
                 <a:ea typeface="SRH Text"/>
               </a:rPr>
-              <a:t>→ Compare current features with reference data</a:t>
-            </a:r>
-            <a:endParaRPr lang="de-DE" sz="1300" b="0" u="none" strike="noStrike">
+              <a:t>🔴 Significant Drift</a:t>
+            </a:r>
+            <a:endParaRPr lang="de-DE" sz="1400" b="0" u="none" strike="noStrike">
               <a:solidFill>
                 <a:schemeClr val="dk1"/>
               </a:solidFill>
@@ -43739,9 +43493,9 @@
             </a:endParaRPr>
           </a:p>
           <a:p>
-            <a:pPr indent="0" algn="l" defTabSz="914400">
-              <a:lnSpc>
-                <a:spcPct val="110000"/>
+            <a:pPr marL="285840" indent="0" algn="l" defTabSz="914400">
+              <a:lnSpc>
+                <a:spcPct val="150000"/>
               </a:lnSpc>
               <a:spcBef>
                 <a:spcPts val="1191"/>
@@ -43754,166 +43508,6 @@
                 <a:tab pos="0" algn="l"/>
               </a:tabLst>
             </a:pPr>
-            <a:r>
-              <a:rPr lang="de-DE" sz="1300" b="0" u="none" strike="noStrike">
-                <a:solidFill>
-                  <a:schemeClr val="dk1"/>
-                </a:solidFill>
-                <a:effectLst/>
-                <a:uFillTx/>
-                <a:latin typeface="SRH Text"/>
-                <a:ea typeface="SRH Text"/>
-              </a:rPr>
-              <a:t>→ Identify MODERATE / SEVERE drift </a:t>
-            </a:r>
-            <a:endParaRPr lang="de-DE" sz="1300" b="0" u="none" strike="noStrike">
-              <a:solidFill>
-                <a:schemeClr val="dk1"/>
-              </a:solidFill>
-              <a:effectLst/>
-              <a:uFillTx/>
-              <a:latin typeface="SRH Text"/>
-            </a:endParaRPr>
-          </a:p>
-          <a:p>
-            <a:pPr indent="0" algn="l" defTabSz="914400">
-              <a:lnSpc>
-                <a:spcPct val="110000"/>
-              </a:lnSpc>
-              <a:spcBef>
-                <a:spcPts val="1191"/>
-              </a:spcBef>
-              <a:spcAft>
-                <a:spcPts val="992"/>
-              </a:spcAft>
-              <a:buNone/>
-              <a:tabLst>
-                <a:tab pos="0" algn="l"/>
-              </a:tabLst>
-            </a:pPr>
-            <a:r>
-              <a:rPr lang="de-DE" sz="1300" b="0" u="none" strike="noStrike">
-                <a:solidFill>
-                  <a:schemeClr val="dk1"/>
-                </a:solidFill>
-                <a:effectLst/>
-                <a:uFillTx/>
-                <a:latin typeface="SRH Text"/>
-                <a:ea typeface="SRH Text"/>
-              </a:rPr>
-              <a:t>Prediction Drift</a:t>
-            </a:r>
-            <a:endParaRPr lang="de-DE" sz="1300" b="0" u="none" strike="noStrike">
-              <a:solidFill>
-                <a:schemeClr val="dk1"/>
-              </a:solidFill>
-              <a:effectLst/>
-              <a:uFillTx/>
-              <a:latin typeface="SRH Text"/>
-            </a:endParaRPr>
-          </a:p>
-          <a:p>
-            <a:pPr indent="0" algn="l" defTabSz="914400">
-              <a:lnSpc>
-                <a:spcPct val="110000"/>
-              </a:lnSpc>
-              <a:spcBef>
-                <a:spcPts val="1191"/>
-              </a:spcBef>
-              <a:spcAft>
-                <a:spcPts val="992"/>
-              </a:spcAft>
-              <a:buNone/>
-              <a:tabLst>
-                <a:tab pos="0" algn="l"/>
-              </a:tabLst>
-            </a:pPr>
-            <a:r>
-              <a:rPr lang="de-DE" sz="1300" b="0" u="none" strike="noStrike">
-                <a:solidFill>
-                  <a:schemeClr val="dk1"/>
-                </a:solidFill>
-                <a:effectLst/>
-                <a:uFillTx/>
-                <a:latin typeface="SRH Text"/>
-                <a:ea typeface="SRH Text"/>
-              </a:rPr>
-              <a:t>→ Monitor predicted probabilities</a:t>
-            </a:r>
-            <a:endParaRPr lang="de-DE" sz="1300" b="0" u="none" strike="noStrike">
-              <a:solidFill>
-                <a:schemeClr val="dk1"/>
-              </a:solidFill>
-              <a:effectLst/>
-              <a:uFillTx/>
-              <a:latin typeface="SRH Text"/>
-            </a:endParaRPr>
-          </a:p>
-          <a:p>
-            <a:pPr indent="0" algn="l" defTabSz="914400">
-              <a:lnSpc>
-                <a:spcPct val="110000"/>
-              </a:lnSpc>
-              <a:spcBef>
-                <a:spcPts val="1191"/>
-              </a:spcBef>
-              <a:spcAft>
-                <a:spcPts val="992"/>
-              </a:spcAft>
-              <a:buNone/>
-              <a:tabLst>
-                <a:tab pos="0" algn="l"/>
-              </a:tabLst>
-            </a:pPr>
-            <a:r>
-              <a:rPr lang="de-DE" sz="1300" b="0" u="none" strike="noStrike">
-                <a:solidFill>
-                  <a:schemeClr val="dk1"/>
-                </a:solidFill>
-                <a:effectLst/>
-                <a:uFillTx/>
-                <a:latin typeface="SRH Text"/>
-                <a:ea typeface="SRH Text"/>
-              </a:rPr>
-              <a:t>→ Calculate Population Stability Index (PSI) </a:t>
-            </a:r>
-            <a:endParaRPr lang="de-DE" sz="1300" b="0" u="none" strike="noStrike">
-              <a:solidFill>
-                <a:schemeClr val="dk1"/>
-              </a:solidFill>
-              <a:effectLst/>
-              <a:uFillTx/>
-              <a:latin typeface="SRH Text"/>
-            </a:endParaRPr>
-          </a:p>
-          <a:p>
-            <a:pPr indent="0" algn="l" defTabSz="914400">
-              <a:lnSpc>
-                <a:spcPct val="110000"/>
-              </a:lnSpc>
-              <a:spcBef>
-                <a:spcPts val="1191"/>
-              </a:spcBef>
-              <a:spcAft>
-                <a:spcPts val="992"/>
-              </a:spcAft>
-              <a:buNone/>
-              <a:tabLst>
-                <a:tab pos="0" algn="l"/>
-              </a:tabLst>
-            </a:pPr>
-            <a:r>
-              <a:rPr lang="de-DE" sz="1300" b="0" u="none" strike="noStrike">
-                <a:solidFill>
-                  <a:schemeClr val="dk1"/>
-                </a:solidFill>
-                <a:effectLst/>
-                <a:uFillTx/>
-                <a:latin typeface="SRH Text"/>
-                <a:ea typeface="SRH Text"/>
-              </a:rPr>
-              <a:t> </a:t>
-            </a:r>
             <a:endParaRPr lang="de-DE" sz="1300" b="0" u="none" strike="noStrike">
               <a:solidFill>
                 <a:schemeClr val="dk1"/>
@@ -43927,7 +43521,7 @@
       </p:sp>
       <p:sp>
         <p:nvSpPr>
-          <p:cNvPr id="353" name="PlaceHolder 3"/>
+          <p:cNvPr id="352" name="PlaceHolder 3"/>
           <p:cNvSpPr>
             <a:spLocks noGrp="1"/>
           </p:cNvSpPr>
@@ -43982,7 +43576,7 @@
                 <a:tab pos="0" algn="l"/>
               </a:tabLst>
             </a:pPr>
-            <a:fld id="{7C1DFD9A-6901-4741-896E-AD2AADAF24E7}" type="datetime1">
+            <a:fld id="{72BB0A40-39AE-4D34-88FC-C891D48752B9}" type="datetime1">
               <a:rPr lang="en-CA" sz="900" b="1" u="none" strike="noStrike">
                 <a:solidFill>
                   <a:srgbClr val="6D7373"/>
@@ -43992,7 +43586,7 @@
                 <a:latin typeface="SRH Text"/>
                 <a:ea typeface="SRH"/>
               </a:rPr>
-              <a:t>2026-09-11</a:t>
+              <a:t>2026-09-12</a:t>
             </a:fld>
             <a:endParaRPr lang="en-US" sz="900" b="0" u="none" strike="noStrike">
               <a:solidFill>
@@ -44007,7 +43601,7 @@
       </p:sp>
       <p:sp>
         <p:nvSpPr>
-          <p:cNvPr id="354" name="PlaceHolder 4"/>
+          <p:cNvPr id="353" name="PlaceHolder 4"/>
           <p:cNvSpPr>
             <a:spLocks noGrp="1"/>
           </p:cNvSpPr>
@@ -44087,7 +43681,7 @@
       </p:sp>
       <p:sp>
         <p:nvSpPr>
-          <p:cNvPr id="355" name="PlaceHolder 5"/>
+          <p:cNvPr id="354" name="PlaceHolder 5"/>
           <p:cNvSpPr>
             <a:spLocks noGrp="1"/>
           </p:cNvSpPr>
@@ -44142,7 +43736,7 @@
                 <a:tab pos="0" algn="l"/>
               </a:tabLst>
             </a:pPr>
-            <a:fld id="{414E9977-3164-4B0A-A16A-751863D23238}" type="slidenum">
+            <a:fld id="{82BC49BF-9851-496C-8D38-1D49D00DA673}" type="slidenum">
               <a:rPr lang="de-DE" sz="1550" b="1" u="none" strike="noStrike">
                 <a:solidFill>
                   <a:srgbClr val="6D7373"/>
@@ -44167,14 +43761,14 @@
       </p:sp>
       <p:sp>
         <p:nvSpPr>
-          <p:cNvPr id="356" name="PlaceHolder 150"/>
+          <p:cNvPr id="355" name="PlaceHolder 152"/>
           <p:cNvSpPr/>
           <p:nvPr/>
         </p:nvSpPr>
         <p:spPr>
           <a:xfrm>
-            <a:off x="6172200" y="914400"/>
-            <a:ext cx="5614920" cy="5256720"/>
+            <a:off x="6168960" y="914400"/>
+            <a:ext cx="5945760" cy="5485320"/>
           </a:xfrm>
           <a:prstGeom prst="rect">
             <a:avLst/>
@@ -44195,9 +43789,9 @@
             <a:noAutofit/>
           </a:bodyPr>
           <a:p>
-            <a:pPr defTabSz="914400">
-              <a:lnSpc>
-                <a:spcPct val="110000"/>
+            <a:pPr marL="285840" indent="-285840" defTabSz="914400">
+              <a:lnSpc>
+                <a:spcPct val="150000"/>
               </a:lnSpc>
               <a:spcBef>
                 <a:spcPts val="1191"/>
@@ -44205,21 +43799,26 @@
               <a:spcAft>
                 <a:spcPts val="992"/>
               </a:spcAft>
-              <a:tabLst>
-                <a:tab pos="0" algn="l"/>
-              </a:tabLst>
-            </a:pPr>
-            <a:r>
-              <a:rPr lang="de-DE" sz="1300" b="0" u="none" strike="noStrike">
-                <a:solidFill>
-                  <a:schemeClr val="dk1"/>
+              <a:buClr>
+                <a:srgbClr val="575756"/>
+              </a:buClr>
+              <a:buFont typeface="Wingdings" charset="2"/>
+              <a:buChar char=""/>
+              <a:tabLst>
+                <a:tab pos="0" algn="l"/>
+              </a:tabLst>
+            </a:pPr>
+            <a:r>
+              <a:rPr lang="en-US" sz="1300" b="1" u="none" strike="noStrike">
+                <a:solidFill>
+                  <a:srgbClr val="FF4000"/>
                 </a:solidFill>
                 <a:effectLst/>
                 <a:uFillTx/>
                 <a:latin typeface="SRH Text"/>
                 <a:ea typeface="SRH Text"/>
               </a:rPr>
-              <a:t>Performance Monitoring</a:t>
+              <a:t>Reference Population</a:t>
             </a:r>
             <a:endParaRPr lang="en-US" sz="1300" b="0" u="none" strike="noStrike">
               <a:solidFill>
@@ -44231,9 +43830,9 @@
             </a:endParaRPr>
           </a:p>
           <a:p>
-            <a:pPr defTabSz="914400">
-              <a:lnSpc>
-                <a:spcPct val="110000"/>
+            <a:pPr marL="285840" indent="-285840" defTabSz="914400">
+              <a:lnSpc>
+                <a:spcPct val="150000"/>
               </a:lnSpc>
               <a:spcBef>
                 <a:spcPts val="1191"/>
@@ -44241,23 +43840,28 @@
               <a:spcAft>
                 <a:spcPts val="992"/>
               </a:spcAft>
-              <a:tabLst>
-                <a:tab pos="0" algn="l"/>
-              </a:tabLst>
-            </a:pPr>
-            <a:r>
-              <a:rPr lang="de-DE" sz="1300" b="1" u="none" strike="noStrike">
-                <a:solidFill>
-                  <a:schemeClr val="dk1"/>
+              <a:buClr>
+                <a:srgbClr val="575756"/>
+              </a:buClr>
+              <a:buFont typeface="Wingdings" charset="2"/>
+              <a:buChar char=""/>
+              <a:tabLst>
+                <a:tab pos="0" algn="l"/>
+              </a:tabLst>
+            </a:pPr>
+            <a:r>
+              <a:rPr lang="en-US" sz="1400" b="0" u="none" strike="noStrike">
+                <a:solidFill>
+                  <a:srgbClr val="1C1C1C"/>
                 </a:solidFill>
                 <a:effectLst/>
                 <a:uFillTx/>
                 <a:latin typeface="SRH Text"/>
                 <a:ea typeface="SRH Text"/>
               </a:rPr>
-              <a:t>→ AUC, False Negatives (FN), False Positives (FP)</a:t>
-            </a:r>
-            <a:endParaRPr lang="en-US" sz="1300" b="0" u="none" strike="noStrike">
+              <a:t>The validation dataset was used as the baseline because it represents unseen customers.</a:t>
+            </a:r>
+            <a:endParaRPr lang="en-US" sz="1400" b="0" u="none" strike="noStrike">
               <a:solidFill>
                 <a:srgbClr val="000000"/>
               </a:solidFill>
@@ -44267,9 +43871,9 @@
             </a:endParaRPr>
           </a:p>
           <a:p>
-            <a:pPr defTabSz="914400">
-              <a:lnSpc>
-                <a:spcPct val="110000"/>
+            <a:pPr marL="285840" indent="-285840" defTabSz="914400">
+              <a:lnSpc>
+                <a:spcPct val="150000"/>
               </a:lnSpc>
               <a:spcBef>
                 <a:spcPts val="1191"/>
@@ -44277,23 +43881,28 @@
               <a:spcAft>
                 <a:spcPts val="992"/>
               </a:spcAft>
-              <a:tabLst>
-                <a:tab pos="0" algn="l"/>
-              </a:tabLst>
-            </a:pPr>
-            <a:r>
-              <a:rPr lang="de-DE" sz="1300" b="1" u="none" strike="noStrike">
-                <a:solidFill>
-                  <a:schemeClr val="dk1"/>
+              <a:buClr>
+                <a:srgbClr val="575756"/>
+              </a:buClr>
+              <a:buFont typeface="Wingdings" charset="2"/>
+              <a:buChar char=""/>
+              <a:tabLst>
+                <a:tab pos="0" algn="l"/>
+              </a:tabLst>
+            </a:pPr>
+            <a:r>
+              <a:rPr lang="en-US" sz="1400" b="0" u="none" strike="noStrike">
+                <a:solidFill>
+                  <a:srgbClr val="1C1C1C"/>
                 </a:solidFill>
                 <a:effectLst/>
                 <a:uFillTx/>
                 <a:latin typeface="SRH Text"/>
                 <a:ea typeface="SRH Text"/>
               </a:rPr>
-              <a:t>→ Cost-sensitive performance </a:t>
-            </a:r>
-            <a:endParaRPr lang="en-US" sz="1300" b="0" u="none" strike="noStrike">
+              <a:t>Key Contribution</a:t>
+            </a:r>
+            <a:endParaRPr lang="en-US" sz="1400" b="0" u="none" strike="noStrike">
               <a:solidFill>
                 <a:srgbClr val="000000"/>
               </a:solidFill>
@@ -44303,9 +43912,9 @@
             </a:endParaRPr>
           </a:p>
           <a:p>
-            <a:pPr defTabSz="914400">
-              <a:lnSpc>
-                <a:spcPct val="110000"/>
+            <a:pPr marL="285840" indent="-285840" defTabSz="914400">
+              <a:lnSpc>
+                <a:spcPct val="150000"/>
               </a:lnSpc>
               <a:spcBef>
                 <a:spcPts val="1191"/>
@@ -44313,23 +43922,28 @@
               <a:spcAft>
                 <a:spcPts val="992"/>
               </a:spcAft>
-              <a:tabLst>
-                <a:tab pos="0" algn="l"/>
-              </a:tabLst>
-            </a:pPr>
-            <a:r>
-              <a:rPr lang="de-DE" sz="1300" b="1" u="none" strike="noStrike">
-                <a:solidFill>
-                  <a:schemeClr val="dk1"/>
+              <a:buClr>
+                <a:srgbClr val="575756"/>
+              </a:buClr>
+              <a:buFont typeface="Wingdings" charset="2"/>
+              <a:buChar char=""/>
+              <a:tabLst>
+                <a:tab pos="0" algn="l"/>
+              </a:tabLst>
+            </a:pPr>
+            <a:r>
+              <a:rPr lang="en-US" sz="1400" b="0" u="none" strike="noStrike">
+                <a:solidFill>
+                  <a:srgbClr val="1C1C1C"/>
                 </a:solidFill>
                 <a:effectLst/>
                 <a:uFillTx/>
                 <a:latin typeface="SRH Text"/>
                 <a:ea typeface="SRH Text"/>
               </a:rPr>
-              <a:t>Automated Alerting</a:t>
-            </a:r>
-            <a:endParaRPr lang="en-US" sz="1300" b="0" u="none" strike="noStrike">
+              <a:t>The model is not treated as a static predictor.</a:t>
+            </a:r>
+            <a:endParaRPr lang="en-US" sz="1400" b="0" u="none" strike="noStrike">
               <a:solidFill>
                 <a:srgbClr val="000000"/>
               </a:solidFill>
@@ -44339,9 +43953,9 @@
             </a:endParaRPr>
           </a:p>
           <a:p>
-            <a:pPr defTabSz="914400">
-              <a:lnSpc>
-                <a:spcPct val="110000"/>
+            <a:pPr marL="285840" indent="-285840" defTabSz="914400">
+              <a:lnSpc>
+                <a:spcPct val="150000"/>
               </a:lnSpc>
               <a:spcBef>
                 <a:spcPts val="1191"/>
@@ -44349,95 +43963,28 @@
               <a:spcAft>
                 <a:spcPts val="992"/>
               </a:spcAft>
-              <a:tabLst>
-                <a:tab pos="0" algn="l"/>
-              </a:tabLst>
-            </a:pPr>
-            <a:r>
-              <a:rPr lang="de-DE" sz="1300" b="0" u="none" strike="noStrike">
-                <a:solidFill>
-                  <a:schemeClr val="dk1"/>
+              <a:buClr>
+                <a:srgbClr val="575756"/>
+              </a:buClr>
+              <a:buFont typeface="Wingdings" charset="2"/>
+              <a:buChar char=""/>
+              <a:tabLst>
+                <a:tab pos="0" algn="l"/>
+              </a:tabLst>
+            </a:pPr>
+            <a:r>
+              <a:rPr lang="en-US" sz="1400" b="0" u="none" strike="noStrike">
+                <a:solidFill>
+                  <a:srgbClr val="1C1C1C"/>
                 </a:solidFill>
                 <a:effectLst/>
                 <a:uFillTx/>
                 <a:latin typeface="SRH Text"/>
                 <a:ea typeface="SRH Text"/>
               </a:rPr>
-              <a:t>→ Trigger alert when severe drift, prediction drift, or performance degradation is detected </a:t>
-            </a:r>
-            <a:endParaRPr lang="en-US" sz="1300" b="0" u="none" strike="noStrike">
-              <a:solidFill>
-                <a:srgbClr val="000000"/>
-              </a:solidFill>
-              <a:effectLst/>
-              <a:uFillTx/>
-              <a:latin typeface="Arial"/>
-            </a:endParaRPr>
-          </a:p>
-          <a:p>
-            <a:pPr defTabSz="914400">
-              <a:lnSpc>
-                <a:spcPct val="110000"/>
-              </a:lnSpc>
-              <a:spcBef>
-                <a:spcPts val="1191"/>
-              </a:spcBef>
-              <a:spcAft>
-                <a:spcPts val="992"/>
-              </a:spcAft>
-              <a:tabLst>
-                <a:tab pos="0" algn="l"/>
-              </a:tabLst>
-            </a:pPr>
-            <a:r>
-              <a:rPr lang="de-DE" sz="1300" b="0" u="none" strike="noStrike">
-                <a:solidFill>
-                  <a:schemeClr val="dk1"/>
-                </a:solidFill>
-                <a:effectLst/>
-                <a:uFillTx/>
-                <a:latin typeface="SRH Text"/>
-                <a:ea typeface="SRH Text"/>
-              </a:rPr>
-              <a:t>Schedule: Daily at 02:00 AM</a:t>
-            </a:r>
-            <a:endParaRPr lang="en-US" sz="1300" b="0" u="none" strike="noStrike">
-              <a:solidFill>
-                <a:srgbClr val="000000"/>
-              </a:solidFill>
-              <a:effectLst/>
-              <a:uFillTx/>
-              <a:latin typeface="Arial"/>
-            </a:endParaRPr>
-          </a:p>
-          <a:p>
-            <a:pPr defTabSz="914400">
-              <a:lnSpc>
-                <a:spcPct val="110000"/>
-              </a:lnSpc>
-              <a:spcBef>
-                <a:spcPts val="1191"/>
-              </a:spcBef>
-              <a:spcAft>
-                <a:spcPts val="992"/>
-              </a:spcAft>
-              <a:tabLst>
-                <a:tab pos="0" algn="l"/>
-              </a:tabLst>
-            </a:pPr>
-            <a:r>
-              <a:rPr lang="de-DE" sz="1300" b="0" u="none" strike="noStrike">
-                <a:solidFill>
-                  <a:schemeClr val="dk1"/>
-                </a:solidFill>
-                <a:effectLst/>
-                <a:uFillTx/>
-                <a:latin typeface="SRH Text"/>
-                <a:ea typeface="SRH Text"/>
-              </a:rPr>
-              <a:t> </a:t>
-            </a:r>
-            <a:endParaRPr lang="en-US" sz="1300" b="0" u="none" strike="noStrike">
+              <a:t>Reliability is continuously monitored under distribution shift.</a:t>
+            </a:r>
+            <a:endParaRPr lang="en-US" sz="1400" b="0" u="none" strike="noStrike">
               <a:solidFill>
                 <a:srgbClr val="000000"/>
               </a:solidFill>
@@ -44480,7 +44027,7 @@
       </p:grpSpPr>
       <p:sp>
         <p:nvSpPr>
-          <p:cNvPr id="357" name="PlaceHolder 1"/>
+          <p:cNvPr id="356" name="PlaceHolder 1"/>
           <p:cNvSpPr>
             <a:spLocks noGrp="1"/>
           </p:cNvSpPr>
@@ -44490,7 +44037,7 @@
         </p:nvSpPr>
         <p:spPr>
           <a:xfrm>
-            <a:off x="191880" y="90720"/>
+            <a:off x="191880" y="-147600"/>
             <a:ext cx="9155160" cy="832320"/>
           </a:xfrm>
           <a:prstGeom prst="rect">
@@ -44506,26 +44053,32 @@
             <a:noAutofit/>
           </a:bodyPr>
           <a:p>
-            <a:pPr indent="0" algn="l" defTabSz="914400">
-              <a:lnSpc>
-                <a:spcPct val="100000"/>
-              </a:lnSpc>
-              <a:buNone/>
-              <a:tabLst>
-                <a:tab pos="0" algn="l"/>
-              </a:tabLst>
-            </a:pPr>
-            <a:r>
-              <a:rPr lang="en-IN" sz="2600" b="1" u="none" strike="noStrike">
+            <a:pPr marL="285840" indent="0" algn="l" defTabSz="914400">
+              <a:lnSpc>
+                <a:spcPct val="150000"/>
+              </a:lnSpc>
+              <a:spcBef>
+                <a:spcPts val="1191"/>
+              </a:spcBef>
+              <a:spcAft>
+                <a:spcPts val="992"/>
+              </a:spcAft>
+              <a:buNone/>
+              <a:tabLst>
+                <a:tab pos="0" algn="l"/>
+              </a:tabLst>
+            </a:pPr>
+            <a:r>
+              <a:rPr lang="en-US" sz="2600" b="1" u="none" strike="noStrike">
                 <a:solidFill>
                   <a:srgbClr val="FF4000"/>
                 </a:solidFill>
                 <a:effectLst/>
                 <a:uFillTx/>
-                <a:latin typeface="SRH Headline"/>
-                <a:ea typeface="SRH Headline"/>
-              </a:rPr>
-              <a:t>Further Improvements</a:t>
+                <a:latin typeface="SRH Text"/>
+                <a:ea typeface="SRH Text"/>
+              </a:rPr>
+              <a:t>Nightly Automated Model Monitoring</a:t>
             </a:r>
             <a:endParaRPr lang="de-DE" sz="2600" b="1" u="none" strike="noStrike">
               <a:solidFill>
@@ -44540,7 +44093,7 @@
       </p:sp>
       <p:sp>
         <p:nvSpPr>
-          <p:cNvPr id="358" name="PlaceHolder 2"/>
+          <p:cNvPr id="357" name="PlaceHolder 2"/>
           <p:cNvSpPr>
             <a:spLocks noGrp="1"/>
           </p:cNvSpPr>
@@ -44550,8 +44103,8 @@
         </p:nvSpPr>
         <p:spPr>
           <a:xfrm>
-            <a:off x="276840" y="1143000"/>
-            <a:ext cx="10802880" cy="5547600"/>
+            <a:off x="228600" y="914400"/>
+            <a:ext cx="5942520" cy="5451120"/>
           </a:xfrm>
           <a:prstGeom prst="rect">
             <a:avLst/>
@@ -44566,9 +44119,9 @@
             <a:noAutofit/>
           </a:bodyPr>
           <a:p>
-            <a:pPr marL="360000" lvl="1" indent="-360000" algn="l" defTabSz="914400">
-              <a:lnSpc>
-                <a:spcPct val="150000"/>
+            <a:pPr indent="0" algn="l" defTabSz="914400">
+              <a:lnSpc>
+                <a:spcPct val="110000"/>
               </a:lnSpc>
               <a:spcBef>
                 <a:spcPts val="1191"/>
@@ -44576,17 +44129,13 @@
               <a:spcAft>
                 <a:spcPts val="992"/>
               </a:spcAft>
-              <a:buClr>
-                <a:srgbClr val="DF4807"/>
-              </a:buClr>
-              <a:buFont typeface="Arial"/>
-              <a:buChar char="•"/>
-              <a:tabLst>
-                <a:tab pos="0" algn="l"/>
-              </a:tabLst>
-            </a:pPr>
-            <a:r>
-              <a:rPr lang="en-US" sz="1300" b="0" u="none" strike="noStrike">
+              <a:buNone/>
+              <a:tabLst>
+                <a:tab pos="0" algn="l"/>
+              </a:tabLst>
+            </a:pPr>
+            <a:r>
+              <a:rPr lang="de-DE" sz="1300" b="0" u="none" strike="noStrike">
                 <a:solidFill>
                   <a:schemeClr val="dk1"/>
                 </a:solidFill>
@@ -44595,7 +44144,7 @@
                 <a:latin typeface="SRH Text"/>
                 <a:ea typeface="SRH Text"/>
               </a:rPr>
-              <a:t>Current Study – PD:</a:t>
+              <a:t>Purpose: Continuously monitor the deployed credit-risk model for data and prediction changes.</a:t>
             </a:r>
             <a:endParaRPr lang="de-DE" sz="1300" b="0" u="none" strike="noStrike">
               <a:solidFill>
@@ -44607,9 +44156,9 @@
             </a:endParaRPr>
           </a:p>
           <a:p>
-            <a:pPr marL="360000" indent="0" algn="l" defTabSz="914400">
-              <a:lnSpc>
-                <a:spcPct val="150000"/>
+            <a:pPr indent="0" algn="l" defTabSz="914400">
+              <a:lnSpc>
+                <a:spcPct val="110000"/>
               </a:lnSpc>
               <a:spcBef>
                 <a:spcPts val="1191"/>
@@ -44623,7 +44172,7 @@
               </a:tabLst>
             </a:pPr>
             <a:r>
-              <a:rPr lang="en-US" sz="1300" b="0" u="none" strike="noStrike">
+              <a:rPr lang="de-DE" sz="1300" b="0" u="none" strike="noStrike">
                 <a:solidFill>
                   <a:schemeClr val="dk1"/>
                 </a:solidFill>
@@ -44632,19 +44181,7 @@
                 <a:latin typeface="SRH Text"/>
                 <a:ea typeface="SRH Text"/>
               </a:rPr>
-              <a:t>Estimates the Probability of Default (PD) and uses it for cost-sensitive selective credit decisions:</a:t>
-            </a:r>
-            <a:r>
-              <a:rPr lang="en-US" sz="1300" b="1" u="none" strike="noStrike">
-                <a:solidFill>
-                  <a:schemeClr val="dk1"/>
-                </a:solidFill>
-                <a:effectLst/>
-                <a:uFillTx/>
-                <a:latin typeface="SRH Text"/>
-                <a:ea typeface="SRH Text"/>
-              </a:rPr>
-              <a:t>PD=P(Default∣X) </a:t>
+              <a:t>Monitoring Pipeline</a:t>
             </a:r>
             <a:endParaRPr lang="de-DE" sz="1300" b="0" u="none" strike="noStrike">
               <a:solidFill>
@@ -44656,9 +44193,9 @@
             </a:endParaRPr>
           </a:p>
           <a:p>
-            <a:pPr marL="360000" lvl="1" indent="-360000" algn="l" defTabSz="914400">
-              <a:lnSpc>
-                <a:spcPct val="150000"/>
+            <a:pPr indent="0" algn="l" defTabSz="914400">
+              <a:lnSpc>
+                <a:spcPct val="110000"/>
               </a:lnSpc>
               <a:spcBef>
                 <a:spcPts val="1191"/>
@@ -44666,17 +44203,13 @@
               <a:spcAft>
                 <a:spcPts val="992"/>
               </a:spcAft>
-              <a:buClr>
-                <a:srgbClr val="DF4807"/>
-              </a:buClr>
-              <a:buFont typeface="Arial"/>
-              <a:buChar char="•"/>
-              <a:tabLst>
-                <a:tab pos="0" algn="l"/>
-              </a:tabLst>
-            </a:pPr>
-            <a:r>
-              <a:rPr lang="en-US" sz="1300" b="0" u="none" strike="noStrike">
+              <a:buNone/>
+              <a:tabLst>
+                <a:tab pos="0" algn="l"/>
+              </a:tabLst>
+            </a:pPr>
+            <a:r>
+              <a:rPr lang="de-DE" sz="1300" b="0" u="none" strike="noStrike">
                 <a:solidFill>
                   <a:schemeClr val="dk1"/>
                 </a:solidFill>
@@ -44685,7 +44218,7 @@
                 <a:latin typeface="SRH Text"/>
                 <a:ea typeface="SRH Text"/>
               </a:rPr>
-              <a:t>Future Work – LGD &amp; EAD:</a:t>
+              <a:t>Collect new data</a:t>
             </a:r>
             <a:endParaRPr lang="de-DE" sz="1300" b="0" u="none" strike="noStrike">
               <a:solidFill>
@@ -44697,9 +44230,9 @@
             </a:endParaRPr>
           </a:p>
           <a:p>
-            <a:pPr marL="360000" indent="0" algn="l" defTabSz="914400">
-              <a:lnSpc>
-                <a:spcPct val="150000"/>
+            <a:pPr indent="0" algn="l" defTabSz="914400">
+              <a:lnSpc>
+                <a:spcPct val="110000"/>
               </a:lnSpc>
               <a:spcBef>
                 <a:spcPts val="1191"/>
@@ -44713,7 +44246,7 @@
               </a:tabLst>
             </a:pPr>
             <a:r>
-              <a:rPr lang="en-US" sz="1300" b="0" u="none" strike="noStrike">
+              <a:rPr lang="de-DE" sz="1300" b="0" u="none" strike="noStrike">
                 <a:solidFill>
                   <a:schemeClr val="dk1"/>
                 </a:solidFill>
@@ -44722,7 +44255,7 @@
                 <a:latin typeface="SRH Text"/>
                 <a:ea typeface="SRH Text"/>
               </a:rPr>
-              <a:t>Extend the framework by incorporating Loss Given Default (LGD) and Exposure at Default (EAD) to quantify the expected financial loss.</a:t>
+              <a:t>→ Latest scored loan applications </a:t>
             </a:r>
             <a:endParaRPr lang="de-DE" sz="1300" b="0" u="none" strike="noStrike">
               <a:solidFill>
@@ -44734,9 +44267,9 @@
             </a:endParaRPr>
           </a:p>
           <a:p>
-            <a:pPr marL="360000" indent="0" algn="l" defTabSz="914400">
-              <a:lnSpc>
-                <a:spcPct val="150000"/>
+            <a:pPr indent="0" algn="l" defTabSz="914400">
+              <a:lnSpc>
+                <a:spcPct val="110000"/>
               </a:lnSpc>
               <a:spcBef>
                 <a:spcPts val="1191"/>
@@ -44750,7 +44283,7 @@
               </a:tabLst>
             </a:pPr>
             <a:r>
-              <a:rPr lang="en-US" sz="1300" b="1" u="none" strike="noStrike">
+              <a:rPr lang="de-DE" sz="1300" b="0" u="none" strike="noStrike">
                 <a:solidFill>
                   <a:schemeClr val="dk1"/>
                 </a:solidFill>
@@ -44759,7 +44292,7 @@
                 <a:latin typeface="SRH Text"/>
                 <a:ea typeface="SRH Text"/>
               </a:rPr>
-              <a:t>Expected Loss=PD×LGD×EAD​ </a:t>
+              <a:t>Data Drift Detection</a:t>
             </a:r>
             <a:endParaRPr lang="de-DE" sz="1300" b="0" u="none" strike="noStrike">
               <a:solidFill>
@@ -44771,9 +44304,9 @@
             </a:endParaRPr>
           </a:p>
           <a:p>
-            <a:pPr marL="360000" indent="0" algn="l" defTabSz="914400">
-              <a:lnSpc>
-                <a:spcPct val="150000"/>
+            <a:pPr indent="0" algn="l" defTabSz="914400">
+              <a:lnSpc>
+                <a:spcPct val="110000"/>
               </a:lnSpc>
               <a:spcBef>
                 <a:spcPts val="1191"/>
@@ -44787,7 +44320,7 @@
               </a:tabLst>
             </a:pPr>
             <a:r>
-              <a:rPr lang="en-US" sz="1300" b="0" u="none" strike="noStrike">
+              <a:rPr lang="de-DE" sz="1300" b="0" u="none" strike="noStrike">
                 <a:solidFill>
                   <a:schemeClr val="dk1"/>
                 </a:solidFill>
@@ -44796,7 +44329,7 @@
                 <a:latin typeface="SRH Text"/>
                 <a:ea typeface="SRH Text"/>
               </a:rPr>
-              <a:t>Interpretation:</a:t>
+              <a:t>→ Compare current features with reference data</a:t>
             </a:r>
             <a:endParaRPr lang="de-DE" sz="1300" b="0" u="none" strike="noStrike">
               <a:solidFill>
@@ -44808,9 +44341,9 @@
             </a:endParaRPr>
           </a:p>
           <a:p>
-            <a:pPr marL="360000" indent="0" algn="l" defTabSz="914400">
-              <a:lnSpc>
-                <a:spcPct val="150000"/>
+            <a:pPr indent="0" algn="l" defTabSz="914400">
+              <a:lnSpc>
+                <a:spcPct val="110000"/>
               </a:lnSpc>
               <a:spcBef>
                 <a:spcPts val="1191"/>
@@ -44824,7 +44357,7 @@
               </a:tabLst>
             </a:pPr>
             <a:r>
-              <a:rPr lang="en-US" sz="1300" b="0" u="none" strike="noStrike">
+              <a:rPr lang="de-DE" sz="1300" b="0" u="none" strike="noStrike">
                 <a:solidFill>
                   <a:schemeClr val="dk1"/>
                 </a:solidFill>
@@ -44833,7 +44366,7 @@
                 <a:latin typeface="SRH Text"/>
                 <a:ea typeface="SRH Text"/>
               </a:rPr>
-              <a:t>PD → How likely is default?</a:t>
+              <a:t>→ Identify MODERATE / SEVERE drift </a:t>
             </a:r>
             <a:endParaRPr lang="de-DE" sz="1300" b="0" u="none" strike="noStrike">
               <a:solidFill>
@@ -44845,9 +44378,9 @@
             </a:endParaRPr>
           </a:p>
           <a:p>
-            <a:pPr marL="360000" indent="0" algn="l" defTabSz="914400">
-              <a:lnSpc>
-                <a:spcPct val="150000"/>
+            <a:pPr indent="0" algn="l" defTabSz="914400">
+              <a:lnSpc>
+                <a:spcPct val="110000"/>
               </a:lnSpc>
               <a:spcBef>
                 <a:spcPts val="1191"/>
@@ -44861,7 +44394,7 @@
               </a:tabLst>
             </a:pPr>
             <a:r>
-              <a:rPr lang="en-US" sz="1300" b="0" u="none" strike="noStrike">
+              <a:rPr lang="de-DE" sz="1300" b="0" u="none" strike="noStrike">
                 <a:solidFill>
                   <a:schemeClr val="dk1"/>
                 </a:solidFill>
@@ -44870,7 +44403,7 @@
                 <a:latin typeface="SRH Text"/>
                 <a:ea typeface="SRH Text"/>
               </a:rPr>
-              <a:t>LGD → How much will the bank lose if default occurs?</a:t>
+              <a:t>Prediction Drift</a:t>
             </a:r>
             <a:endParaRPr lang="de-DE" sz="1300" b="0" u="none" strike="noStrike">
               <a:solidFill>
@@ -44882,9 +44415,9 @@
             </a:endParaRPr>
           </a:p>
           <a:p>
-            <a:pPr marL="360000" indent="0" algn="l" defTabSz="914400">
-              <a:lnSpc>
-                <a:spcPct val="150000"/>
+            <a:pPr indent="0" algn="l" defTabSz="914400">
+              <a:lnSpc>
+                <a:spcPct val="110000"/>
               </a:lnSpc>
               <a:spcBef>
                 <a:spcPts val="1191"/>
@@ -44898,7 +44431,7 @@
               </a:tabLst>
             </a:pPr>
             <a:r>
-              <a:rPr lang="en-US" sz="1300" b="0" u="none" strike="noStrike">
+              <a:rPr lang="de-DE" sz="1300" b="0" u="none" strike="noStrike">
                 <a:solidFill>
                   <a:schemeClr val="dk1"/>
                 </a:solidFill>
@@ -44907,7 +44440,7 @@
                 <a:latin typeface="SRH Text"/>
                 <a:ea typeface="SRH Text"/>
               </a:rPr>
-              <a:t>EAD → How much is exposed when default occurs? </a:t>
+              <a:t>→ Monitor predicted probabilities</a:t>
             </a:r>
             <a:endParaRPr lang="de-DE" sz="1300" b="0" u="none" strike="noStrike">
               <a:solidFill>
@@ -44919,9 +44452,9 @@
             </a:endParaRPr>
           </a:p>
           <a:p>
-            <a:pPr marL="360000" indent="0" algn="l" defTabSz="914400">
-              <a:lnSpc>
-                <a:spcPct val="150000"/>
+            <a:pPr indent="0" algn="l" defTabSz="914400">
+              <a:lnSpc>
+                <a:spcPct val="110000"/>
               </a:lnSpc>
               <a:spcBef>
                 <a:spcPts val="1191"/>
@@ -44935,7 +44468,44 @@
               </a:tabLst>
             </a:pPr>
             <a:r>
-              <a:rPr lang="en-US" sz="1300" b="0" u="none" strike="noStrike">
+              <a:rPr lang="de-DE" sz="1300" b="0" u="none" strike="noStrike">
+                <a:solidFill>
+                  <a:schemeClr val="dk1"/>
+                </a:solidFill>
+                <a:effectLst/>
+                <a:uFillTx/>
+                <a:latin typeface="SRH Text"/>
+                <a:ea typeface="SRH Text"/>
+              </a:rPr>
+              <a:t>→ Calculate Population Stability Index (PSI) </a:t>
+            </a:r>
+            <a:endParaRPr lang="de-DE" sz="1300" b="0" u="none" strike="noStrike">
+              <a:solidFill>
+                <a:schemeClr val="dk1"/>
+              </a:solidFill>
+              <a:effectLst/>
+              <a:uFillTx/>
+              <a:latin typeface="SRH Text"/>
+            </a:endParaRPr>
+          </a:p>
+          <a:p>
+            <a:pPr indent="0" algn="l" defTabSz="914400">
+              <a:lnSpc>
+                <a:spcPct val="110000"/>
+              </a:lnSpc>
+              <a:spcBef>
+                <a:spcPts val="1191"/>
+              </a:spcBef>
+              <a:spcAft>
+                <a:spcPts val="992"/>
+              </a:spcAft>
+              <a:buNone/>
+              <a:tabLst>
+                <a:tab pos="0" algn="l"/>
+              </a:tabLst>
+            </a:pPr>
+            <a:r>
+              <a:rPr lang="de-DE" sz="1300" b="0" u="none" strike="noStrike">
                 <a:solidFill>
                   <a:schemeClr val="dk1"/>
                 </a:solidFill>
@@ -44959,7 +44529,7 @@
       </p:sp>
       <p:sp>
         <p:nvSpPr>
-          <p:cNvPr id="359" name="PlaceHolder 3"/>
+          <p:cNvPr id="358" name="PlaceHolder 3"/>
           <p:cNvSpPr>
             <a:spLocks noGrp="1"/>
           </p:cNvSpPr>
@@ -45014,7 +44584,7 @@
                 <a:tab pos="0" algn="l"/>
               </a:tabLst>
             </a:pPr>
-            <a:fld id="{73D0A17A-892B-4939-928B-47EC36B0FB09}" type="datetime1">
+            <a:fld id="{59B2B9F6-3D14-4A23-86A6-9FA84EEAB6E0}" type="datetime1">
               <a:rPr lang="en-CA" sz="900" b="1" u="none" strike="noStrike">
                 <a:solidFill>
                   <a:srgbClr val="6D7373"/>
@@ -45024,7 +44594,7 @@
                 <a:latin typeface="SRH Text"/>
                 <a:ea typeface="SRH"/>
               </a:rPr>
-              <a:t>2026-09-11</a:t>
+              <a:t>2026-09-12</a:t>
             </a:fld>
             <a:endParaRPr lang="en-US" sz="900" b="0" u="none" strike="noStrike">
               <a:solidFill>
@@ -45039,7 +44609,7 @@
       </p:sp>
       <p:sp>
         <p:nvSpPr>
-          <p:cNvPr id="360" name="PlaceHolder 4"/>
+          <p:cNvPr id="359" name="PlaceHolder 4"/>
           <p:cNvSpPr>
             <a:spLocks noGrp="1"/>
           </p:cNvSpPr>
@@ -45119,7 +44689,7 @@
       </p:sp>
       <p:sp>
         <p:nvSpPr>
-          <p:cNvPr id="361" name="PlaceHolder 5"/>
+          <p:cNvPr id="360" name="PlaceHolder 5"/>
           <p:cNvSpPr>
             <a:spLocks noGrp="1"/>
           </p:cNvSpPr>
@@ -45174,7 +44744,7 @@
                 <a:tab pos="0" algn="l"/>
               </a:tabLst>
             </a:pPr>
-            <a:fld id="{990E8F6D-7B5F-4376-A4D3-8A0E5E602018}" type="slidenum">
+            <a:fld id="{F8296F77-24F8-47B5-9009-BBBC00249683}" type="slidenum">
               <a:rPr lang="de-DE" sz="1550" b="1" u="none" strike="noStrike">
                 <a:solidFill>
                   <a:srgbClr val="6D7373"/>
@@ -45193,6 +44763,289 @@
               <a:effectLst/>
               <a:uFillTx/>
               <a:latin typeface="Times New Roman"/>
+            </a:endParaRPr>
+          </a:p>
+        </p:txBody>
+      </p:sp>
+      <p:sp>
+        <p:nvSpPr>
+          <p:cNvPr id="361" name="PlaceHolder 150"/>
+          <p:cNvSpPr/>
+          <p:nvPr/>
+        </p:nvSpPr>
+        <p:spPr>
+          <a:xfrm>
+            <a:off x="6172200" y="914400"/>
+            <a:ext cx="5614920" cy="5256720"/>
+          </a:xfrm>
+          <a:prstGeom prst="rect">
+            <a:avLst/>
+          </a:prstGeom>
+          <a:noFill/>
+          <a:ln w="0">
+            <a:noFill/>
+          </a:ln>
+        </p:spPr>
+        <p:style>
+          <a:lnRef idx="0"/>
+          <a:fillRef idx="0"/>
+          <a:effectRef idx="0"/>
+          <a:fontRef idx="minor"/>
+        </p:style>
+        <p:txBody>
+          <a:bodyPr numCol="1" spcCol="216000" lIns="0" tIns="0" rIns="0" bIns="0" anchor="t">
+            <a:noAutofit/>
+          </a:bodyPr>
+          <a:p>
+            <a:pPr defTabSz="914400">
+              <a:lnSpc>
+                <a:spcPct val="110000"/>
+              </a:lnSpc>
+              <a:spcBef>
+                <a:spcPts val="1191"/>
+              </a:spcBef>
+              <a:spcAft>
+                <a:spcPts val="992"/>
+              </a:spcAft>
+              <a:tabLst>
+                <a:tab pos="0" algn="l"/>
+              </a:tabLst>
+            </a:pPr>
+            <a:r>
+              <a:rPr lang="de-DE" sz="1300" b="0" u="none" strike="noStrike">
+                <a:solidFill>
+                  <a:schemeClr val="dk1"/>
+                </a:solidFill>
+                <a:effectLst/>
+                <a:uFillTx/>
+                <a:latin typeface="SRH Text"/>
+                <a:ea typeface="SRH Text"/>
+              </a:rPr>
+              <a:t>Performance Monitoring</a:t>
+            </a:r>
+            <a:endParaRPr lang="en-US" sz="1300" b="0" u="none" strike="noStrike">
+              <a:solidFill>
+                <a:srgbClr val="000000"/>
+              </a:solidFill>
+              <a:effectLst/>
+              <a:uFillTx/>
+              <a:latin typeface="Arial"/>
+            </a:endParaRPr>
+          </a:p>
+          <a:p>
+            <a:pPr defTabSz="914400">
+              <a:lnSpc>
+                <a:spcPct val="110000"/>
+              </a:lnSpc>
+              <a:spcBef>
+                <a:spcPts val="1191"/>
+              </a:spcBef>
+              <a:spcAft>
+                <a:spcPts val="992"/>
+              </a:spcAft>
+              <a:tabLst>
+                <a:tab pos="0" algn="l"/>
+              </a:tabLst>
+            </a:pPr>
+            <a:r>
+              <a:rPr lang="de-DE" sz="1300" b="1" u="none" strike="noStrike">
+                <a:solidFill>
+                  <a:schemeClr val="dk1"/>
+                </a:solidFill>
+                <a:effectLst/>
+                <a:uFillTx/>
+                <a:latin typeface="SRH Text"/>
+                <a:ea typeface="SRH Text"/>
+              </a:rPr>
+              <a:t>→ AUC, False Negatives (FN), False Positives (FP)</a:t>
+            </a:r>
+            <a:endParaRPr lang="en-US" sz="1300" b="0" u="none" strike="noStrike">
+              <a:solidFill>
+                <a:srgbClr val="000000"/>
+              </a:solidFill>
+              <a:effectLst/>
+              <a:uFillTx/>
+              <a:latin typeface="Arial"/>
+            </a:endParaRPr>
+          </a:p>
+          <a:p>
+            <a:pPr defTabSz="914400">
+              <a:lnSpc>
+                <a:spcPct val="110000"/>
+              </a:lnSpc>
+              <a:spcBef>
+                <a:spcPts val="1191"/>
+              </a:spcBef>
+              <a:spcAft>
+                <a:spcPts val="992"/>
+              </a:spcAft>
+              <a:tabLst>
+                <a:tab pos="0" algn="l"/>
+              </a:tabLst>
+            </a:pPr>
+            <a:r>
+              <a:rPr lang="de-DE" sz="1300" b="1" u="none" strike="noStrike">
+                <a:solidFill>
+                  <a:schemeClr val="dk1"/>
+                </a:solidFill>
+                <a:effectLst/>
+                <a:uFillTx/>
+                <a:latin typeface="SRH Text"/>
+                <a:ea typeface="SRH Text"/>
+              </a:rPr>
+              <a:t>→ Cost-sensitive performance </a:t>
+            </a:r>
+            <a:endParaRPr lang="en-US" sz="1300" b="0" u="none" strike="noStrike">
+              <a:solidFill>
+                <a:srgbClr val="000000"/>
+              </a:solidFill>
+              <a:effectLst/>
+              <a:uFillTx/>
+              <a:latin typeface="Arial"/>
+            </a:endParaRPr>
+          </a:p>
+          <a:p>
+            <a:pPr defTabSz="914400">
+              <a:lnSpc>
+                <a:spcPct val="110000"/>
+              </a:lnSpc>
+              <a:spcBef>
+                <a:spcPts val="1191"/>
+              </a:spcBef>
+              <a:spcAft>
+                <a:spcPts val="992"/>
+              </a:spcAft>
+              <a:tabLst>
+                <a:tab pos="0" algn="l"/>
+              </a:tabLst>
+            </a:pPr>
+            <a:r>
+              <a:rPr lang="de-DE" sz="1300" b="1" u="none" strike="noStrike">
+                <a:solidFill>
+                  <a:schemeClr val="dk1"/>
+                </a:solidFill>
+                <a:effectLst/>
+                <a:uFillTx/>
+                <a:latin typeface="SRH Text"/>
+                <a:ea typeface="SRH Text"/>
+              </a:rPr>
+              <a:t>Automated Alerting</a:t>
+            </a:r>
+            <a:endParaRPr lang="en-US" sz="1300" b="0" u="none" strike="noStrike">
+              <a:solidFill>
+                <a:srgbClr val="000000"/>
+              </a:solidFill>
+              <a:effectLst/>
+              <a:uFillTx/>
+              <a:latin typeface="Arial"/>
+            </a:endParaRPr>
+          </a:p>
+          <a:p>
+            <a:pPr defTabSz="914400">
+              <a:lnSpc>
+                <a:spcPct val="110000"/>
+              </a:lnSpc>
+              <a:spcBef>
+                <a:spcPts val="1191"/>
+              </a:spcBef>
+              <a:spcAft>
+                <a:spcPts val="992"/>
+              </a:spcAft>
+              <a:tabLst>
+                <a:tab pos="0" algn="l"/>
+              </a:tabLst>
+            </a:pPr>
+            <a:r>
+              <a:rPr lang="de-DE" sz="1300" b="0" u="none" strike="noStrike">
+                <a:solidFill>
+                  <a:schemeClr val="dk1"/>
+                </a:solidFill>
+                <a:effectLst/>
+                <a:uFillTx/>
+                <a:latin typeface="SRH Text"/>
+                <a:ea typeface="SRH Text"/>
+              </a:rPr>
+              <a:t>→ Trigger alert when severe drift, prediction drift, or performance degradation is detected </a:t>
+            </a:r>
+            <a:endParaRPr lang="en-US" sz="1300" b="0" u="none" strike="noStrike">
+              <a:solidFill>
+                <a:srgbClr val="000000"/>
+              </a:solidFill>
+              <a:effectLst/>
+              <a:uFillTx/>
+              <a:latin typeface="Arial"/>
+            </a:endParaRPr>
+          </a:p>
+          <a:p>
+            <a:pPr defTabSz="914400">
+              <a:lnSpc>
+                <a:spcPct val="110000"/>
+              </a:lnSpc>
+              <a:spcBef>
+                <a:spcPts val="1191"/>
+              </a:spcBef>
+              <a:spcAft>
+                <a:spcPts val="992"/>
+              </a:spcAft>
+              <a:tabLst>
+                <a:tab pos="0" algn="l"/>
+              </a:tabLst>
+            </a:pPr>
+            <a:r>
+              <a:rPr lang="de-DE" sz="1300" b="0" u="none" strike="noStrike">
+                <a:solidFill>
+                  <a:schemeClr val="dk1"/>
+                </a:solidFill>
+                <a:effectLst/>
+                <a:uFillTx/>
+                <a:latin typeface="SRH Text"/>
+                <a:ea typeface="SRH Text"/>
+              </a:rPr>
+              <a:t>Schedule: Daily at 02:00 AM</a:t>
+            </a:r>
+            <a:endParaRPr lang="en-US" sz="1300" b="0" u="none" strike="noStrike">
+              <a:solidFill>
+                <a:srgbClr val="000000"/>
+              </a:solidFill>
+              <a:effectLst/>
+              <a:uFillTx/>
+              <a:latin typeface="Arial"/>
+            </a:endParaRPr>
+          </a:p>
+          <a:p>
+            <a:pPr defTabSz="914400">
+              <a:lnSpc>
+                <a:spcPct val="110000"/>
+              </a:lnSpc>
+              <a:spcBef>
+                <a:spcPts val="1191"/>
+              </a:spcBef>
+              <a:spcAft>
+                <a:spcPts val="992"/>
+              </a:spcAft>
+              <a:tabLst>
+                <a:tab pos="0" algn="l"/>
+              </a:tabLst>
+            </a:pPr>
+            <a:r>
+              <a:rPr lang="de-DE" sz="1300" b="0" u="none" strike="noStrike">
+                <a:solidFill>
+                  <a:schemeClr val="dk1"/>
+                </a:solidFill>
+                <a:effectLst/>
+                <a:uFillTx/>
+                <a:latin typeface="SRH Text"/>
+                <a:ea typeface="SRH Text"/>
+              </a:rPr>
+              <a:t> </a:t>
+            </a:r>
+            <a:endParaRPr lang="en-US" sz="1300" b="0" u="none" strike="noStrike">
+              <a:solidFill>
+                <a:srgbClr val="000000"/>
+              </a:solidFill>
+              <a:effectLst/>
+              <a:uFillTx/>
+              <a:latin typeface="Arial"/>
             </a:endParaRPr>
           </a:p>
         </p:txBody>
@@ -45734,7 +45587,7 @@
                 <a:tab pos="0" algn="l"/>
               </a:tabLst>
             </a:pPr>
-            <a:fld id="{0732C273-FA95-4CEE-AED8-55695642351E}" type="datetime1">
+            <a:fld id="{87412F09-6E40-4E18-822D-863F11EF8518}" type="datetime1">
               <a:rPr lang="en-CA" sz="900" b="1" u="none" strike="noStrike">
                 <a:solidFill>
                   <a:srgbClr val="6D7373"/>
@@ -45744,7 +45597,7 @@
                 <a:latin typeface="SRH Text"/>
                 <a:ea typeface="SRH"/>
               </a:rPr>
-              <a:t>2026-09-11</a:t>
+              <a:t>2026-09-12</a:t>
             </a:fld>
             <a:endParaRPr lang="en-US" sz="900" b="0" u="none" strike="noStrike">
               <a:solidFill>
@@ -45894,7 +45747,7 @@
                 <a:tab pos="0" algn="l"/>
               </a:tabLst>
             </a:pPr>
-            <a:fld id="{4B418B94-DCC7-47C3-A41D-4DBDD494FB55}" type="slidenum">
+            <a:fld id="{91B5D084-3C4D-4F2E-B7D0-163CF63557F9}" type="slidenum">
               <a:rPr lang="de-DE" sz="1550" b="1" u="none" strike="noStrike">
                 <a:solidFill>
                   <a:srgbClr val="6D7373"/>
@@ -46534,7 +46387,7 @@
                 <a:tab pos="0" algn="l"/>
               </a:tabLst>
             </a:pPr>
-            <a:fld id="{F3B0C7D9-764B-4C5B-87E0-5380CC6CD975}" type="datetime1">
+            <a:fld id="{6783E6E4-9CE1-4C4C-A248-AE1B6C7CAD26}" type="datetime1">
               <a:rPr lang="en-CA" sz="900" b="1" u="none" strike="noStrike">
                 <a:solidFill>
                   <a:srgbClr val="6D7373"/>
@@ -46544,7 +46397,7 @@
                 <a:latin typeface="SRH Text"/>
                 <a:ea typeface="SRH"/>
               </a:rPr>
-              <a:t>2026-09-11</a:t>
+              <a:t>2026-09-12</a:t>
             </a:fld>
             <a:endParaRPr lang="en-US" sz="900" b="0" u="none" strike="noStrike">
               <a:solidFill>
@@ -46694,7 +46547,7 @@
                 <a:tab pos="0" algn="l"/>
               </a:tabLst>
             </a:pPr>
-            <a:fld id="{1FF1C329-8666-4B41-B563-B5CAB5C44F82}" type="slidenum">
+            <a:fld id="{785B430C-CF69-4D3C-8F1E-018017CE6ABF}" type="slidenum">
               <a:rPr lang="de-DE" sz="1550" b="1" u="none" strike="noStrike">
                 <a:solidFill>
                   <a:srgbClr val="6D7373"/>
@@ -46704,7 +46557,7 @@
                 <a:latin typeface="SRH Text"/>
                 <a:ea typeface="SRH"/>
               </a:rPr>
-              <a:t>13</a:t>
+              <a:t>&lt;number&gt;</a:t>
             </a:fld>
             <a:endParaRPr lang="en-US" sz="1550" b="0" u="none" strike="noStrike">
               <a:solidFill>
@@ -47255,7 +47108,7 @@
                 <a:tab pos="0" algn="l"/>
               </a:tabLst>
             </a:pPr>
-            <a:fld id="{089DC2D6-6F17-4156-B14B-AFDC99712760}" type="datetime1">
+            <a:fld id="{85BE6BC2-F75C-42FE-81E5-4CFF9EF29B65}" type="datetime1">
               <a:rPr lang="en-CA" sz="900" b="1" u="none" strike="noStrike">
                 <a:solidFill>
                   <a:srgbClr val="6D7373"/>
@@ -47265,7 +47118,7 @@
                 <a:latin typeface="SRH Text"/>
                 <a:ea typeface="SRH"/>
               </a:rPr>
-              <a:t>2026-09-11</a:t>
+              <a:t>2026-09-12</a:t>
             </a:fld>
             <a:endParaRPr lang="en-US" sz="900" b="0" u="none" strike="noStrike">
               <a:solidFill>
@@ -47415,7 +47268,7 @@
                 <a:tab pos="0" algn="l"/>
               </a:tabLst>
             </a:pPr>
-            <a:fld id="{02CDD5A9-09F9-43CB-A6E9-C174AA7EBB6B}" type="slidenum">
+            <a:fld id="{AF4992EA-A9DA-4161-8D3F-EA58A41A3226}" type="slidenum">
               <a:rPr lang="de-DE" sz="1550" b="1" u="none" strike="noStrike">
                 <a:solidFill>
                   <a:srgbClr val="6D7373"/>
@@ -47425,7 +47278,7 @@
                 <a:latin typeface="SRH Text"/>
                 <a:ea typeface="SRH"/>
               </a:rPr>
-              <a:t>13</a:t>
+              <a:t>&lt;number&gt;</a:t>
             </a:fld>
             <a:endParaRPr lang="en-US" sz="1550" b="0" u="none" strike="noStrike">
               <a:solidFill>
@@ -47980,7 +47833,7 @@
                 <a:tab pos="0" algn="l"/>
               </a:tabLst>
             </a:pPr>
-            <a:fld id="{65A3793E-7D67-4BE6-B044-33550E7A6242}" type="datetime1">
+            <a:fld id="{B781D931-D7DD-407C-BB7E-A23B797BDBAA}" type="datetime1">
               <a:rPr lang="en-CA" sz="900" b="1" u="none" strike="noStrike">
                 <a:solidFill>
                   <a:srgbClr val="6D7373"/>
@@ -47990,7 +47843,7 @@
                 <a:latin typeface="SRH Text"/>
                 <a:ea typeface="SRH"/>
               </a:rPr>
-              <a:t>2026-09-11</a:t>
+              <a:t>2026-09-12</a:t>
             </a:fld>
             <a:endParaRPr lang="en-US" sz="900" b="0" u="none" strike="noStrike">
               <a:solidFill>
@@ -48140,7 +47993,7 @@
                 <a:tab pos="0" algn="l"/>
               </a:tabLst>
             </a:pPr>
-            <a:fld id="{C6BFA342-B653-4E0B-A620-E25BCE82B64C}" type="slidenum">
+            <a:fld id="{E1F680BC-CAD8-4011-A651-04C59C3A2E53}" type="slidenum">
               <a:rPr lang="de-DE" sz="1550" b="1" u="none" strike="noStrike">
                 <a:solidFill>
                   <a:srgbClr val="6D7373"/>
@@ -48150,7 +48003,7 @@
                 <a:latin typeface="SRH Text"/>
                 <a:ea typeface="SRH"/>
               </a:rPr>
-              <a:t>13</a:t>
+              <a:t>&lt;number&gt;</a:t>
             </a:fld>
             <a:endParaRPr lang="en-US" sz="1550" b="0" u="none" strike="noStrike">
               <a:solidFill>
@@ -48657,7 +48510,7 @@
                 <a:tab pos="0" algn="l"/>
               </a:tabLst>
             </a:pPr>
-            <a:fld id="{3ED6D61B-673C-46E2-B7B0-0552EDB53AF1}" type="datetime1">
+            <a:fld id="{0899A7CF-166D-47F1-8E6A-5018FAFA1A6C}" type="datetime1">
               <a:rPr lang="en-CA" sz="900" b="1" u="none" strike="noStrike">
                 <a:solidFill>
                   <a:srgbClr val="6D7373"/>
@@ -48667,7 +48520,7 @@
                 <a:latin typeface="SRH Text"/>
                 <a:ea typeface="SRH"/>
               </a:rPr>
-              <a:t>2026-09-11</a:t>
+              <a:t>2026-09-12</a:t>
             </a:fld>
             <a:endParaRPr lang="en-US" sz="900" b="0" u="none" strike="noStrike">
               <a:solidFill>
@@ -48817,7 +48670,7 @@
                 <a:tab pos="0" algn="l"/>
               </a:tabLst>
             </a:pPr>
-            <a:fld id="{68C0A63F-23B8-428F-9944-21D8E8C29C84}" type="slidenum">
+            <a:fld id="{46154E48-690E-4229-9C08-C60ED596C6BC}" type="slidenum">
               <a:rPr lang="de-DE" sz="1550" b="1" u="none" strike="noStrike">
                 <a:solidFill>
                   <a:srgbClr val="6D7373"/>
@@ -48827,7 +48680,7 @@
                 <a:latin typeface="SRH Text"/>
                 <a:ea typeface="SRH"/>
               </a:rPr>
-              <a:t>13</a:t>
+              <a:t>&lt;number&gt;</a:t>
             </a:fld>
             <a:endParaRPr lang="en-US" sz="1550" b="0" u="none" strike="noStrike">
               <a:solidFill>
@@ -49359,7 +49212,7 @@
                 <a:tab pos="0" algn="l"/>
               </a:tabLst>
             </a:pPr>
-            <a:fld id="{A09FDF0D-D788-4A93-B18A-B89EDAB10BC5}" type="datetime1">
+            <a:fld id="{0109DC6C-3C17-44CE-8BDC-6E499F1EB011}" type="datetime1">
               <a:rPr lang="en-CA" sz="900" b="1" u="none" strike="noStrike">
                 <a:solidFill>
                   <a:srgbClr val="6D7373"/>
@@ -49369,7 +49222,7 @@
                 <a:latin typeface="SRH Text"/>
                 <a:ea typeface="SRH"/>
               </a:rPr>
-              <a:t>2026-09-11</a:t>
+              <a:t>2026-09-12</a:t>
             </a:fld>
             <a:endParaRPr lang="en-US" sz="900" b="0" u="none" strike="noStrike">
               <a:solidFill>
@@ -49519,7 +49372,7 @@
                 <a:tab pos="0" algn="l"/>
               </a:tabLst>
             </a:pPr>
-            <a:fld id="{9D3F9DCD-B3F2-40DC-B683-7E464C715ED0}" type="slidenum">
+            <a:fld id="{D2DBF6A2-5387-4A97-AEE5-C414360A886C}" type="slidenum">
               <a:rPr lang="de-DE" sz="1550" b="1" u="none" strike="noStrike">
                 <a:solidFill>
                   <a:srgbClr val="6D7373"/>
@@ -49529,7 +49382,7 @@
                 <a:latin typeface="SRH Text"/>
                 <a:ea typeface="SRH"/>
               </a:rPr>
-              <a:t>13</a:t>
+              <a:t>&lt;number&gt;</a:t>
             </a:fld>
             <a:endParaRPr lang="en-US" sz="1550" b="0" u="none" strike="noStrike">
               <a:solidFill>
